--- a/output/ChineseBabyLM_NLPCC2026_Oral_v2.pptx
+++ b/output/ChineseBabyLM_NLPCC2026_Oral_v2.pptx
@@ -10,8 +10,8 @@
   <p:sldIdLst>
     <p:sldId id="256" r:id="rId2"/>
     <p:sldId id="257" r:id="rId3"/>
-    <p:sldId id="258" r:id="rId4"/>
-    <p:sldId id="259" r:id="rId5"/>
+    <p:sldId id="259" r:id="rId4"/>
+    <p:sldId id="258" r:id="rId5"/>
     <p:sldId id="260" r:id="rId6"/>
     <p:sldId id="261" r:id="rId7"/>
     <p:sldId id="262" r:id="rId8"/>
@@ -113,6 +113,11 @@
       </a:defRPr>
     </a:lvl9pPr>
   </p:defaultTextStyle>
+  <p:extLst>
+    <p:ext uri="{EFAFB233-063F-42B5-8137-9DF3F51BA10A}">
+      <p15:sldGuideLst xmlns:p15="http://schemas.microsoft.com/office/powerpoint/2012/main"/>
+    </p:ext>
+  </p:extLst>
 </p:presentation>
 </file>
 
@@ -146,11 +151,6 @@
             <c:idx val="0"/>
             <c:invertIfNegative val="0"/>
             <c:bubble3D val="0"/>
-            <c:spPr>
-              <a:solidFill>
-                <a:srgbClr val="9E1B32"/>
-              </a:solidFill>
-            </c:spPr>
             <c:extLst>
               <c:ext xmlns:c16="http://schemas.microsoft.com/office/drawing/2014/chart" uri="{C3380CC4-5D6E-409C-BE32-E72D297353CC}">
                 <c16:uniqueId val="{00000001-7C87-490B-BF42-D82E164F69DF}"/>
@@ -829,27 +829,25 @@
           <a:bodyPr/>
           <a:lstStyle/>
           <a:p>
+            <a:pPr>
+              <a:lnSpc>
+                <a:spcPct val="105000"/>
+              </a:lnSpc>
+              <a:buNone/>
+              <a:defRPr sz="2100">
+                <a:solidFill>
+                  <a:srgbClr val="233342"/>
+                </a:solidFill>
+                <a:latin typeface="Arial"/>
+                <a:ea typeface="Arial"/>
+                <a:cs typeface="Arial"/>
+              </a:defRPr>
+            </a:pPr>
             <a:r>
-              <a:t>In this work, we present the first ChineseBabyLM Challenge. We ask how much Chinese linguistic competence a model can acquire from a developmentally motivated data budget. We turn this question into a shared task with controlled training data and evaluation across language understanding, Chinese character knowledge, and cognitive alignment.</a:t>
+              <a:rPr lang="en-US" altLang="zh-CN"/>
+              <a:t>I am Zhiheng Qian. I am here to present the first ChineseBabyLM Challenge on behalf of the shared task organisers.</a:t>
             </a:r>
-          </a:p>
-          <a:p>
             <a:endParaRPr/>
-          </a:p>
-          <a:p>
-            <a:r>
-              <a:t>Sources</a:t>
-            </a:r>
-          </a:p>
-          <a:p>
-            <a:r>
-              <a:t>Song et al. (2026), abstract and Section 1</a:t>
-            </a:r>
-          </a:p>
-          <a:p>
-            <a:r>
-              <a:t>ChineseBabyLM official website: https://chinese-babylm.github.io/</a:t>
-            </a:r>
           </a:p>
         </p:txBody>
       </p:sp>
@@ -924,39 +922,74 @@
           <a:bodyPr/>
           <a:lstStyle/>
           <a:p>
+            <a:pPr marL="0" marR="0" lvl="0" indent="0" algn="l" defTabSz="914400" rtl="0" eaLnBrk="1" fontAlgn="auto" latinLnBrk="0" hangingPunct="1">
+              <a:lnSpc>
+                <a:spcPct val="100000"/>
+              </a:lnSpc>
+              <a:spcBef>
+                <a:spcPts val="0"/>
+              </a:spcBef>
+              <a:spcAft>
+                <a:spcPts val="0"/>
+              </a:spcAft>
+              <a:buClrTx/>
+              <a:buSzTx/>
+              <a:buFontTx/>
+              <a:buNone/>
+              <a:tabLst/>
+              <a:defRPr/>
+            </a:pPr>
             <a:r>
-              <a:rPr dirty="0" err="1"/>
-              <a:t>BabyLM</a:t>
+              <a:rPr lang="en-US" altLang="zh-CN"/>
+              <a:t>The first ChineseBabyLM Challenge aims </a:t>
+            </a:r>
+            <a:r>
+              <a:rPr lang="en-US" altLang="zh-CN" sz="1200">
+                <a:solidFill>
+                  <a:srgbClr val="233342"/>
+                </a:solidFill>
+                <a:latin typeface="Arial"/>
+                <a:cs typeface="Arial"/>
+              </a:rPr>
+              <a:t>t</a:t>
+            </a:r>
+            <a:r>
+              <a:rPr lang="en-US" altLang="zh-CN" sz="1200">
+                <a:solidFill>
+                  <a:srgbClr val="233342"/>
+                </a:solidFill>
+                <a:latin typeface="Arial"/>
+                <a:ea typeface="Arial"/>
+                <a:cs typeface="Arial"/>
+              </a:rPr>
+              <a:t>raining data-efficient and cognitively plausible language models for Chinese language. Our shared task is inspired by BabyLM challenge. </a:t>
+            </a:r>
+            <a:r>
+              <a:t>BabyLM </a:t>
             </a:r>
             <a:r>
               <a:rPr dirty="0"/>
-              <a:t> studies sample-efficient pretraining under data budgets inspired by human language acquisition, but previous shared tasks focused mainly on English. Chinese adds language-specific questions about segmentation, compounding, and the structural and phonological information carried by characters. Our contribution is a complete shared-task framework: a standardized corpus and evaluation pipeline, 14 tasks across three complementary tracks, and an empirical comparison of 28 submitted models from 18 teams. This setup shifts attention from access to massive corpora toward choices in data, representation, and learning objective.</a:t>
+              <a:t>studies sample-efficient pretraining under data budgets inspired by human language acquisition, but previous shared tasks focused mainly on English</a:t>
+            </a:r>
+            <a:r>
+              <a:t>. </a:t>
+            </a:r>
+            <a:endParaRPr lang="en-US"/>
+          </a:p>
+          <a:p>
+            <a:endParaRPr lang="en-US"/>
+          </a:p>
+          <a:p>
+            <a:r>
+              <a:t>Chinese </a:t>
+            </a:r>
+            <a:r>
+              <a:rPr dirty="0"/>
+              <a:t>adds language-specific questions about segmentation, compounding, and the structural and phonological information carried by characters. Our contribution is a complete shared-task framework: a standardized corpus and evaluation pipeline, 14 tasks across three complementary tracks, and an empirical comparison of 28 submitted models from 18 teams. This setup shifts attention from access to massive corpora toward choices in data, representation, and learning objective.</a:t>
             </a:r>
           </a:p>
           <a:p>
             <a:endParaRPr dirty="0"/>
-          </a:p>
-          <a:p>
-            <a:r>
-              <a:rPr dirty="0"/>
-              <a:t>Sources</a:t>
-            </a:r>
-          </a:p>
-          <a:p>
-            <a:r>
-              <a:rPr dirty="0"/>
-              <a:t>Song et al. (2026), Sections 1 and 3</a:t>
-            </a:r>
-          </a:p>
-          <a:p>
-            <a:r>
-              <a:rPr dirty="0" err="1"/>
-              <a:t>ChineseBabyLM</a:t>
-            </a:r>
-            <a:r>
-              <a:rPr dirty="0"/>
-              <a:t> overview: https://chinese-babylm.github.io/#overview</a:t>
-            </a:r>
           </a:p>
         </p:txBody>
       </p:sp>
@@ -1031,27 +1064,54 @@
           <a:bodyPr/>
           <a:lstStyle/>
           <a:p>
+            <a:pPr marL="0" marR="0" lvl="0" indent="0" algn="l" defTabSz="914400" rtl="0" eaLnBrk="1" fontAlgn="auto" latinLnBrk="0" hangingPunct="1">
+              <a:lnSpc>
+                <a:spcPct val="100000"/>
+              </a:lnSpc>
+              <a:spcBef>
+                <a:spcPts val="0"/>
+              </a:spcBef>
+              <a:spcAft>
+                <a:spcPts val="0"/>
+              </a:spcAft>
+              <a:buClrTx/>
+              <a:buSzTx/>
+              <a:buFontTx/>
+              <a:buNone/>
+              <a:tabLst/>
+              <a:defRPr/>
+            </a:pPr>
             <a:r>
-              <a:t>We provided a 102-million-word corpus derived from the Chinese portion of BabyBabelLM. It combines child-available and child-directed speech with books, educational material, subtitles, and child-oriented reference text. Teams could instead compile their own corpus under the same limit, measured with a fixed Jieba word-counting procedure. We placed no restriction on the tokenizer, architecture, or number of epochs. However, every model had to start from random initialization. Pretrained checkpoints and distillation from existing large models were prohibited. The protocol therefore controlled access to linguistic data while leaving the main modeling decisions open.</a:t>
+              <a:rPr lang="zh-CN" altLang="zh-CN"/>
+              <a:t>ChineseBabyLM evaluates models along three complementary tracks, with 14 tasks in total. First, the </a:t>
+            </a:r>
+            <a:r>
+              <a:rPr lang="zh-CN" altLang="zh-CN" b="1"/>
+              <a:t>NLU track</a:t>
+            </a:r>
+            <a:r>
+              <a:rPr lang="zh-CN" altLang="zh-CN"/>
+              <a:t> measures Chinese syntactic and semantic understanding. It includes two zero-shot minimal-pair tasks, ZhoBLiMP and XCOMPS-ZH, together with six fine-tuning tasks covering semantic matching, inference, text classification, coreference, and reading comprehension. Second, the </a:t>
+            </a:r>
+            <a:r>
+              <a:rPr lang="zh-CN" altLang="zh-CN" b="1"/>
+              <a:t>Cognitive Modeling track</a:t>
+            </a:r>
+            <a:r>
+              <a:rPr lang="zh-CN" altLang="zh-CN"/>
+              <a:t> asks whether model representations resemble human language representations in the brain. It uses two Chinese fMRI datasets from MulCogBench: a word-level dataset with 672 words read by 11 participants, and a discourse-level dataset with 60 stories and more than 52,000 words heard by 12 participants. Finally, the </a:t>
+            </a:r>
+            <a:r>
+              <a:rPr lang="zh-CN" altLang="zh-CN" b="1"/>
+              <a:t>Hanzi track</a:t>
+            </a:r>
+            <a:r>
+              <a:rPr lang="zh-CN" altLang="zh-CN"/>
+              <a:t> focuses on knowledge specific to the Chinese writing system. It contains four zero-shot minimal-pair tasks, with open and hidden sets for both character structure and pinyin. Each task contains 2,000 pairs and tests whether the model understands character components as well as differences in initials, finals, and tones.</a:t>
             </a:r>
           </a:p>
           <a:p>
             <a:endParaRPr/>
-          </a:p>
-          <a:p>
-            <a:r>
-              <a:t>Sources</a:t>
-            </a:r>
-          </a:p>
-          <a:p>
-            <a:r>
-              <a:t>Song et al. (2026), Section 3</a:t>
-            </a:r>
-          </a:p>
-          <a:p>
-            <a:r>
-              <a:t>ChineseBabyLM training data: https://chinese-babylm.github.io/#data</a:t>
-            </a:r>
           </a:p>
         </p:txBody>
       </p:sp>
@@ -1126,8 +1186,17 @@
           <a:bodyPr/>
           <a:lstStyle/>
           <a:p>
+            <a:endParaRPr lang="en-US"/>
+          </a:p>
+          <a:p>
+            <a:endParaRPr lang="en-US"/>
+          </a:p>
+          <a:p>
+            <a:endParaRPr lang="en-US"/>
+          </a:p>
+          <a:p>
             <a:r>
-              <a:t>We evaluated models on 14 tasks. The NLU track combined two zero-shot minimal-pair benchmarks with six fine-tuning tasks, covering grammar, semantic compatibility, inference, classification, coreference, and reading comprehension. The Hanzi track used four minimal-pair tasks to test character structure and pinyin, including initials, finals, and tones. Minimal-pair tasks used accuracy, while an unrecognized target or component counted as a failure in the Hanzi evaluation. The Cognitive Modeling track fitted encoding models from hidden states to human fMRI responses for isolated words and spoken stories, then used correlation-based scores. We combined open development tasks with hidden final tasks to limit direct tuning to the test set.</a:t>
+              <a:t>We provided a 102-million-word corpus derived from the Chinese portion of BabyBabelLM. It combines child-available and child-directed speech with books, educational material, subtitles, and child-oriented reference text. Teams could instead compile their own corpus under the same limit, measured with a fixed Jieba word-counting procedure. We placed no restriction on the tokenizer, architecture, or number of epochs. However, every model had to start from random initialization. Pretrained checkpoints and distillation from existing large models were prohibited. The protocol therefore controlled access to linguistic data while leaving the main modeling decisions open.</a:t>
             </a:r>
           </a:p>
           <a:p>
@@ -1140,12 +1209,12 @@
           </a:p>
           <a:p>
             <a:r>
-              <a:t>Song et al. (2026), Section 2 and Table 1</a:t>
+              <a:t>Song et al. (2026), Section 3</a:t>
             </a:r>
           </a:p>
           <a:p>
             <a:r>
-              <a:t>ChineseBabyLM evaluation tracks: https://chinese-babylm.github.io/#tracks</a:t>
+              <a:t>ChineseBabyLM training data: https://chinese-babylm.github.io/#data</a:t>
             </a:r>
           </a:p>
         </p:txBody>
@@ -5137,165 +5206,6 @@
           </a:p>
         </p:txBody>
       </p:sp>
-      <p:sp>
-        <p:nvSpPr>
-          <p:cNvPr id="9" name="cover-footer">
-            <a:extLst>
-              <a:ext uri="{FF2B5EF4-FFF2-40B4-BE49-F238E27FC236}">
-                <a16:creationId xmlns:a16="http://schemas.microsoft.com/office/drawing/2014/main" id="{38D9462B-D8AB-40D0-A0FD-3BA3546DD947}"/>
-              </a:ext>
-            </a:extLst>
-          </p:cNvPr>
-          <p:cNvSpPr>
-            <a:spLocks noGrp="1"/>
-          </p:cNvSpPr>
-          <p:nvPr/>
-        </p:nvSpPr>
-        <p:spPr>
-          <a:xfrm>
-            <a:off x="723900" y="5905500"/>
-            <a:ext cx="7143750" cy="247650"/>
-          </a:xfrm>
-          <a:prstGeom prst="rect">
-            <a:avLst/>
-          </a:prstGeom>
-          <a:noFill/>
-          <a:ln w="0">
-            <a:noFill/>
-            <a:prstDash val="solid"/>
-          </a:ln>
-        </p:spPr>
-        <p:txBody>
-          <a:bodyPr wrap="square" lIns="0" tIns="0" rIns="0" bIns="0">
-            <a:noAutofit/>
-          </a:bodyPr>
-          <a:lstStyle>
-            <a:defPPr>
-              <a:defRPr sz="1200">
-                <a:solidFill>
-                  <a:srgbClr val="A5A9AE"/>
-                </a:solidFill>
-                <a:latin typeface="Arial"/>
-                <a:ea typeface="Arial"/>
-                <a:cs typeface="Arial"/>
-              </a:defRPr>
-            </a:defPPr>
-            <a:lvl1pPr>
-              <a:defRPr sz="1200">
-                <a:solidFill>
-                  <a:srgbClr val="A5A9AE"/>
-                </a:solidFill>
-                <a:latin typeface="Arial"/>
-                <a:ea typeface="Arial"/>
-                <a:cs typeface="Arial"/>
-              </a:defRPr>
-            </a:lvl1pPr>
-            <a:lvl2pPr>
-              <a:defRPr sz="1200">
-                <a:solidFill>
-                  <a:srgbClr val="A5A9AE"/>
-                </a:solidFill>
-                <a:latin typeface="Arial"/>
-                <a:ea typeface="Arial"/>
-                <a:cs typeface="Arial"/>
-              </a:defRPr>
-            </a:lvl2pPr>
-            <a:lvl3pPr>
-              <a:defRPr sz="1200">
-                <a:solidFill>
-                  <a:srgbClr val="A5A9AE"/>
-                </a:solidFill>
-                <a:latin typeface="Arial"/>
-                <a:ea typeface="Arial"/>
-                <a:cs typeface="Arial"/>
-              </a:defRPr>
-            </a:lvl3pPr>
-            <a:lvl4pPr>
-              <a:defRPr sz="1200">
-                <a:solidFill>
-                  <a:srgbClr val="A5A9AE"/>
-                </a:solidFill>
-                <a:latin typeface="Arial"/>
-                <a:ea typeface="Arial"/>
-                <a:cs typeface="Arial"/>
-              </a:defRPr>
-            </a:lvl4pPr>
-            <a:lvl5pPr>
-              <a:defRPr sz="1200">
-                <a:solidFill>
-                  <a:srgbClr val="A5A9AE"/>
-                </a:solidFill>
-                <a:latin typeface="Arial"/>
-                <a:ea typeface="Arial"/>
-                <a:cs typeface="Arial"/>
-              </a:defRPr>
-            </a:lvl5pPr>
-            <a:lvl6pPr>
-              <a:defRPr sz="1200">
-                <a:solidFill>
-                  <a:srgbClr val="A5A9AE"/>
-                </a:solidFill>
-                <a:latin typeface="Arial"/>
-                <a:ea typeface="Arial"/>
-                <a:cs typeface="Arial"/>
-              </a:defRPr>
-            </a:lvl6pPr>
-            <a:lvl7pPr>
-              <a:defRPr sz="1200">
-                <a:solidFill>
-                  <a:srgbClr val="A5A9AE"/>
-                </a:solidFill>
-                <a:latin typeface="Arial"/>
-                <a:ea typeface="Arial"/>
-                <a:cs typeface="Arial"/>
-              </a:defRPr>
-            </a:lvl7pPr>
-            <a:lvl8pPr>
-              <a:defRPr sz="1200">
-                <a:solidFill>
-                  <a:srgbClr val="A5A9AE"/>
-                </a:solidFill>
-                <a:latin typeface="Arial"/>
-                <a:ea typeface="Arial"/>
-                <a:cs typeface="Arial"/>
-              </a:defRPr>
-            </a:lvl8pPr>
-            <a:lvl9pPr>
-              <a:defRPr sz="1200">
-                <a:solidFill>
-                  <a:srgbClr val="A5A9AE"/>
-                </a:solidFill>
-                <a:latin typeface="Arial"/>
-                <a:ea typeface="Arial"/>
-                <a:cs typeface="Arial"/>
-              </a:defRPr>
-            </a:lvl9pPr>
-          </a:lstStyle>
-          <a:p>
-            <a:pPr>
-              <a:defRPr sz="1200">
-                <a:solidFill>
-                  <a:srgbClr val="A5A9AE"/>
-                </a:solidFill>
-                <a:latin typeface="Arial"/>
-                <a:ea typeface="Arial"/>
-                <a:cs typeface="Arial"/>
-              </a:defRPr>
-            </a:pPr>
-            <a:r>
-              <a:rPr sz="1200">
-                <a:solidFill>
-                  <a:srgbClr val="A5A9AE"/>
-                </a:solidFill>
-                <a:latin typeface="Arial"/>
-                <a:ea typeface="Arial"/>
-                <a:cs typeface="Arial"/>
-              </a:rPr>
-              <a:t>Data-efficient pretraining  /  Chinese-specific evaluation</a:t>
-            </a:r>
-          </a:p>
-        </p:txBody>
-      </p:sp>
     </p:spTree>
     <p:extLst>
       <p:ext uri="{BB962C8B-B14F-4D97-AF65-F5344CB8AC3E}">
@@ -7869,6 +7779,3340 @@
 </file>
 
 <file path=ppt/slides/slide3.xml><?xml version="1.0" encoding="utf-8"?>
+<p:sld xmlns:a="http://schemas.openxmlformats.org/drawingml/2006/main" xmlns:r="http://schemas.openxmlformats.org/officeDocument/2006/relationships" xmlns:p="http://schemas.openxmlformats.org/presentationml/2006/main">
+  <p:cSld>
+    <p:bg>
+      <p:bgPr>
+        <a:solidFill>
+          <a:srgbClr val="FFFFFF"/>
+        </a:solidFill>
+        <a:effectLst/>
+      </p:bgPr>
+    </p:bg>
+    <p:spTree>
+      <p:nvGrpSpPr>
+        <p:cNvPr id="1" name=""/>
+        <p:cNvGrpSpPr/>
+        <p:nvPr/>
+      </p:nvGrpSpPr>
+      <p:grpSpPr>
+        <a:xfrm>
+          <a:off x="0" y="0"/>
+          <a:ext cx="0" cy="0"/>
+          <a:chOff x="0" y="0"/>
+          <a:chExt cx="0" cy="0"/>
+        </a:xfrm>
+      </p:grpSpPr>
+      <p:sp>
+        <p:nvSpPr>
+          <p:cNvPr id="27" name="slide-4-title">
+            <a:extLst>
+              <a:ext uri="{FF2B5EF4-FFF2-40B4-BE49-F238E27FC236}">
+                <a16:creationId xmlns:a16="http://schemas.microsoft.com/office/drawing/2014/main" id="{ED4EF037-91C8-4FEA-AA2C-D87C9FEEBDAF}"/>
+              </a:ext>
+            </a:extLst>
+          </p:cNvPr>
+          <p:cNvSpPr>
+            <a:spLocks noGrp="1"/>
+          </p:cNvSpPr>
+          <p:nvPr/>
+        </p:nvSpPr>
+        <p:spPr>
+          <a:xfrm>
+            <a:off x="685800" y="409575"/>
+            <a:ext cx="10001250" cy="533400"/>
+          </a:xfrm>
+          <a:prstGeom prst="rect">
+            <a:avLst/>
+          </a:prstGeom>
+          <a:noFill/>
+          <a:ln w="0">
+            <a:noFill/>
+            <a:prstDash val="solid"/>
+          </a:ln>
+        </p:spPr>
+        <p:txBody>
+          <a:bodyPr wrap="square" lIns="0" tIns="0" rIns="0" bIns="0">
+            <a:noAutofit/>
+          </a:bodyPr>
+          <a:lstStyle>
+            <a:defPPr>
+              <a:defRPr sz="3150" b="1">
+                <a:solidFill>
+                  <a:srgbClr val="20242A"/>
+                </a:solidFill>
+                <a:latin typeface="Arial"/>
+                <a:ea typeface="Arial"/>
+                <a:cs typeface="Arial"/>
+              </a:defRPr>
+            </a:defPPr>
+            <a:lvl1pPr>
+              <a:defRPr sz="3150" b="1">
+                <a:solidFill>
+                  <a:srgbClr val="20242A"/>
+                </a:solidFill>
+                <a:latin typeface="Arial"/>
+                <a:ea typeface="Arial"/>
+                <a:cs typeface="Arial"/>
+              </a:defRPr>
+            </a:lvl1pPr>
+            <a:lvl2pPr>
+              <a:defRPr sz="3150" b="1">
+                <a:solidFill>
+                  <a:srgbClr val="20242A"/>
+                </a:solidFill>
+                <a:latin typeface="Arial"/>
+                <a:ea typeface="Arial"/>
+                <a:cs typeface="Arial"/>
+              </a:defRPr>
+            </a:lvl2pPr>
+            <a:lvl3pPr>
+              <a:defRPr sz="3150" b="1">
+                <a:solidFill>
+                  <a:srgbClr val="20242A"/>
+                </a:solidFill>
+                <a:latin typeface="Arial"/>
+                <a:ea typeface="Arial"/>
+                <a:cs typeface="Arial"/>
+              </a:defRPr>
+            </a:lvl3pPr>
+            <a:lvl4pPr>
+              <a:defRPr sz="3150" b="1">
+                <a:solidFill>
+                  <a:srgbClr val="20242A"/>
+                </a:solidFill>
+                <a:latin typeface="Arial"/>
+                <a:ea typeface="Arial"/>
+                <a:cs typeface="Arial"/>
+              </a:defRPr>
+            </a:lvl4pPr>
+            <a:lvl5pPr>
+              <a:defRPr sz="3150" b="1">
+                <a:solidFill>
+                  <a:srgbClr val="20242A"/>
+                </a:solidFill>
+                <a:latin typeface="Arial"/>
+                <a:ea typeface="Arial"/>
+                <a:cs typeface="Arial"/>
+              </a:defRPr>
+            </a:lvl5pPr>
+            <a:lvl6pPr>
+              <a:defRPr sz="3150" b="1">
+                <a:solidFill>
+                  <a:srgbClr val="20242A"/>
+                </a:solidFill>
+                <a:latin typeface="Arial"/>
+                <a:ea typeface="Arial"/>
+                <a:cs typeface="Arial"/>
+              </a:defRPr>
+            </a:lvl6pPr>
+            <a:lvl7pPr>
+              <a:defRPr sz="3150" b="1">
+                <a:solidFill>
+                  <a:srgbClr val="20242A"/>
+                </a:solidFill>
+                <a:latin typeface="Arial"/>
+                <a:ea typeface="Arial"/>
+                <a:cs typeface="Arial"/>
+              </a:defRPr>
+            </a:lvl7pPr>
+            <a:lvl8pPr>
+              <a:defRPr sz="3150" b="1">
+                <a:solidFill>
+                  <a:srgbClr val="20242A"/>
+                </a:solidFill>
+                <a:latin typeface="Arial"/>
+                <a:ea typeface="Arial"/>
+                <a:cs typeface="Arial"/>
+              </a:defRPr>
+            </a:lvl8pPr>
+            <a:lvl9pPr>
+              <a:defRPr sz="3150" b="1">
+                <a:solidFill>
+                  <a:srgbClr val="20242A"/>
+                </a:solidFill>
+                <a:latin typeface="Arial"/>
+                <a:ea typeface="Arial"/>
+                <a:cs typeface="Arial"/>
+              </a:defRPr>
+            </a:lvl9pPr>
+          </a:lstStyle>
+          <a:p>
+            <a:pPr>
+              <a:defRPr sz="3150" b="1">
+                <a:solidFill>
+                  <a:srgbClr val="20242A"/>
+                </a:solidFill>
+                <a:latin typeface="Arial"/>
+                <a:ea typeface="Arial"/>
+                <a:cs typeface="Arial"/>
+              </a:defRPr>
+            </a:pPr>
+            <a:r>
+              <a:rPr sz="3150" b="1" dirty="0">
+                <a:solidFill>
+                  <a:srgbClr val="20242A"/>
+                </a:solidFill>
+                <a:latin typeface="Arial"/>
+                <a:ea typeface="Arial"/>
+                <a:cs typeface="Arial"/>
+              </a:rPr>
+              <a:t>Evaluation </a:t>
+            </a:r>
+            <a:r>
+              <a:rPr lang="en-US" sz="3150" b="1" dirty="0">
+                <a:solidFill>
+                  <a:srgbClr val="20242A"/>
+                </a:solidFill>
+                <a:latin typeface="Arial"/>
+                <a:ea typeface="Arial"/>
+                <a:cs typeface="Arial"/>
+              </a:rPr>
+              <a:t>Tracks</a:t>
+            </a:r>
+            <a:endParaRPr sz="3150" b="1" dirty="0">
+              <a:solidFill>
+                <a:srgbClr val="20242A"/>
+              </a:solidFill>
+              <a:latin typeface="Arial"/>
+              <a:ea typeface="Arial"/>
+              <a:cs typeface="Arial"/>
+            </a:endParaRPr>
+          </a:p>
+        </p:txBody>
+      </p:sp>
+      <p:sp>
+        <p:nvSpPr>
+          <p:cNvPr id="2" name="slide-4-top-rule">
+            <a:extLst>
+              <a:ext uri="{FF2B5EF4-FFF2-40B4-BE49-F238E27FC236}">
+                <a16:creationId xmlns:a16="http://schemas.microsoft.com/office/drawing/2014/main" id="{31C64AA6-A017-40C0-B692-B8AE66CA2B32}"/>
+              </a:ext>
+            </a:extLst>
+          </p:cNvPr>
+          <p:cNvSpPr>
+            <a:spLocks noGrp="1"/>
+          </p:cNvSpPr>
+          <p:nvPr/>
+        </p:nvSpPr>
+        <p:spPr>
+          <a:xfrm>
+            <a:off x="685800" y="1057275"/>
+            <a:ext cx="10820400" cy="19050"/>
+          </a:xfrm>
+          <a:prstGeom prst="rect">
+            <a:avLst/>
+          </a:prstGeom>
+          <a:solidFill>
+            <a:srgbClr val="D9D7D2"/>
+          </a:solidFill>
+          <a:ln w="0">
+            <a:noFill/>
+            <a:prstDash val="solid"/>
+          </a:ln>
+        </p:spPr>
+      </p:sp>
+      <p:sp>
+        <p:nvSpPr>
+          <p:cNvPr id="3" name="矩形 2">
+            <a:extLst>
+              <a:ext uri="{FF2B5EF4-FFF2-40B4-BE49-F238E27FC236}">
+                <a16:creationId xmlns:a16="http://schemas.microsoft.com/office/drawing/2014/main" id="{93DDBE9E-E15F-4293-B32E-E33A69941438}"/>
+              </a:ext>
+            </a:extLst>
+          </p:cNvPr>
+          <p:cNvSpPr>
+            <a:spLocks noGrp="1"/>
+          </p:cNvSpPr>
+          <p:nvPr/>
+        </p:nvSpPr>
+        <p:spPr>
+          <a:xfrm>
+            <a:off x="685800" y="1304925"/>
+            <a:ext cx="5429250" cy="228600"/>
+          </a:xfrm>
+          <a:prstGeom prst="rect">
+            <a:avLst/>
+          </a:prstGeom>
+          <a:noFill/>
+          <a:ln w="0">
+            <a:noFill/>
+            <a:prstDash val="solid"/>
+          </a:ln>
+        </p:spPr>
+        <p:txBody>
+          <a:bodyPr wrap="square" lIns="0" tIns="0" rIns="0" bIns="0">
+            <a:noAutofit/>
+          </a:bodyPr>
+          <a:lstStyle>
+            <a:defPPr>
+              <a:defRPr sz="1125" b="1">
+                <a:solidFill>
+                  <a:srgbClr val="C49A2C"/>
+                </a:solidFill>
+                <a:latin typeface="Arial"/>
+                <a:ea typeface="Arial"/>
+                <a:cs typeface="Arial"/>
+              </a:defRPr>
+            </a:defPPr>
+            <a:lvl1pPr>
+              <a:defRPr sz="1125" b="1">
+                <a:solidFill>
+                  <a:srgbClr val="C49A2C"/>
+                </a:solidFill>
+                <a:latin typeface="Arial"/>
+                <a:ea typeface="Arial"/>
+                <a:cs typeface="Arial"/>
+              </a:defRPr>
+            </a:lvl1pPr>
+            <a:lvl2pPr>
+              <a:defRPr sz="1125" b="1">
+                <a:solidFill>
+                  <a:srgbClr val="C49A2C"/>
+                </a:solidFill>
+                <a:latin typeface="Arial"/>
+                <a:ea typeface="Arial"/>
+                <a:cs typeface="Arial"/>
+              </a:defRPr>
+            </a:lvl2pPr>
+            <a:lvl3pPr>
+              <a:defRPr sz="1125" b="1">
+                <a:solidFill>
+                  <a:srgbClr val="C49A2C"/>
+                </a:solidFill>
+                <a:latin typeface="Arial"/>
+                <a:ea typeface="Arial"/>
+                <a:cs typeface="Arial"/>
+              </a:defRPr>
+            </a:lvl3pPr>
+            <a:lvl4pPr>
+              <a:defRPr sz="1125" b="1">
+                <a:solidFill>
+                  <a:srgbClr val="C49A2C"/>
+                </a:solidFill>
+                <a:latin typeface="Arial"/>
+                <a:ea typeface="Arial"/>
+                <a:cs typeface="Arial"/>
+              </a:defRPr>
+            </a:lvl4pPr>
+            <a:lvl5pPr>
+              <a:defRPr sz="1125" b="1">
+                <a:solidFill>
+                  <a:srgbClr val="C49A2C"/>
+                </a:solidFill>
+                <a:latin typeface="Arial"/>
+                <a:ea typeface="Arial"/>
+                <a:cs typeface="Arial"/>
+              </a:defRPr>
+            </a:lvl5pPr>
+            <a:lvl6pPr>
+              <a:defRPr sz="1125" b="1">
+                <a:solidFill>
+                  <a:srgbClr val="C49A2C"/>
+                </a:solidFill>
+                <a:latin typeface="Arial"/>
+                <a:ea typeface="Arial"/>
+                <a:cs typeface="Arial"/>
+              </a:defRPr>
+            </a:lvl6pPr>
+            <a:lvl7pPr>
+              <a:defRPr sz="1125" b="1">
+                <a:solidFill>
+                  <a:srgbClr val="C49A2C"/>
+                </a:solidFill>
+                <a:latin typeface="Arial"/>
+                <a:ea typeface="Arial"/>
+                <a:cs typeface="Arial"/>
+              </a:defRPr>
+            </a:lvl7pPr>
+            <a:lvl8pPr>
+              <a:defRPr sz="1125" b="1">
+                <a:solidFill>
+                  <a:srgbClr val="C49A2C"/>
+                </a:solidFill>
+                <a:latin typeface="Arial"/>
+                <a:ea typeface="Arial"/>
+                <a:cs typeface="Arial"/>
+              </a:defRPr>
+            </a:lvl8pPr>
+            <a:lvl9pPr>
+              <a:defRPr sz="1125" b="1">
+                <a:solidFill>
+                  <a:srgbClr val="C49A2C"/>
+                </a:solidFill>
+                <a:latin typeface="Arial"/>
+                <a:ea typeface="Arial"/>
+                <a:cs typeface="Arial"/>
+              </a:defRPr>
+            </a:lvl9pPr>
+          </a:lstStyle>
+          <a:p>
+            <a:pPr>
+              <a:defRPr sz="1125" b="1">
+                <a:solidFill>
+                  <a:srgbClr val="C49A2C"/>
+                </a:solidFill>
+                <a:latin typeface="Arial"/>
+                <a:ea typeface="Arial"/>
+                <a:cs typeface="Arial"/>
+              </a:defRPr>
+            </a:pPr>
+            <a:r>
+              <a:rPr sz="1125" b="1">
+                <a:solidFill>
+                  <a:srgbClr val="C49A2C"/>
+                </a:solidFill>
+                <a:latin typeface="Arial"/>
+                <a:ea typeface="Arial"/>
+                <a:cs typeface="Arial"/>
+              </a:rPr>
+              <a:t>14 TASKS IN THREE COMPLEMENTARY TRACKS</a:t>
+            </a:r>
+          </a:p>
+        </p:txBody>
+      </p:sp>
+      <p:sp>
+        <p:nvSpPr>
+          <p:cNvPr id="4" name="矩形 3">
+            <a:extLst>
+              <a:ext uri="{FF2B5EF4-FFF2-40B4-BE49-F238E27FC236}">
+                <a16:creationId xmlns:a16="http://schemas.microsoft.com/office/drawing/2014/main" id="{4A649897-7383-4A89-90B8-790AEFE0E312}"/>
+              </a:ext>
+            </a:extLst>
+          </p:cNvPr>
+          <p:cNvSpPr>
+            <a:spLocks noGrp="1"/>
+          </p:cNvSpPr>
+          <p:nvPr/>
+        </p:nvSpPr>
+        <p:spPr>
+          <a:xfrm>
+            <a:off x="685800" y="1695450"/>
+            <a:ext cx="2952750" cy="762000"/>
+          </a:xfrm>
+          <a:prstGeom prst="rect">
+            <a:avLst/>
+          </a:prstGeom>
+          <a:noFill/>
+          <a:ln w="0">
+            <a:noFill/>
+            <a:prstDash val="solid"/>
+          </a:ln>
+        </p:spPr>
+        <p:txBody>
+          <a:bodyPr wrap="square" lIns="0" tIns="0" rIns="0" bIns="0">
+            <a:noAutofit/>
+          </a:bodyPr>
+          <a:lstStyle>
+            <a:defPPr>
+              <a:defRPr sz="4950" b="1">
+                <a:solidFill>
+                  <a:srgbClr val="9E1B32"/>
+                </a:solidFill>
+                <a:latin typeface="Arial"/>
+                <a:ea typeface="Arial"/>
+                <a:cs typeface="Arial"/>
+              </a:defRPr>
+            </a:defPPr>
+            <a:lvl1pPr>
+              <a:defRPr sz="4950" b="1">
+                <a:solidFill>
+                  <a:srgbClr val="9E1B32"/>
+                </a:solidFill>
+                <a:latin typeface="Arial"/>
+                <a:ea typeface="Arial"/>
+                <a:cs typeface="Arial"/>
+              </a:defRPr>
+            </a:lvl1pPr>
+            <a:lvl2pPr>
+              <a:defRPr sz="4950" b="1">
+                <a:solidFill>
+                  <a:srgbClr val="9E1B32"/>
+                </a:solidFill>
+                <a:latin typeface="Arial"/>
+                <a:ea typeface="Arial"/>
+                <a:cs typeface="Arial"/>
+              </a:defRPr>
+            </a:lvl2pPr>
+            <a:lvl3pPr>
+              <a:defRPr sz="4950" b="1">
+                <a:solidFill>
+                  <a:srgbClr val="9E1B32"/>
+                </a:solidFill>
+                <a:latin typeface="Arial"/>
+                <a:ea typeface="Arial"/>
+                <a:cs typeface="Arial"/>
+              </a:defRPr>
+            </a:lvl3pPr>
+            <a:lvl4pPr>
+              <a:defRPr sz="4950" b="1">
+                <a:solidFill>
+                  <a:srgbClr val="9E1B32"/>
+                </a:solidFill>
+                <a:latin typeface="Arial"/>
+                <a:ea typeface="Arial"/>
+                <a:cs typeface="Arial"/>
+              </a:defRPr>
+            </a:lvl4pPr>
+            <a:lvl5pPr>
+              <a:defRPr sz="4950" b="1">
+                <a:solidFill>
+                  <a:srgbClr val="9E1B32"/>
+                </a:solidFill>
+                <a:latin typeface="Arial"/>
+                <a:ea typeface="Arial"/>
+                <a:cs typeface="Arial"/>
+              </a:defRPr>
+            </a:lvl5pPr>
+            <a:lvl6pPr>
+              <a:defRPr sz="4950" b="1">
+                <a:solidFill>
+                  <a:srgbClr val="9E1B32"/>
+                </a:solidFill>
+                <a:latin typeface="Arial"/>
+                <a:ea typeface="Arial"/>
+                <a:cs typeface="Arial"/>
+              </a:defRPr>
+            </a:lvl6pPr>
+            <a:lvl7pPr>
+              <a:defRPr sz="4950" b="1">
+                <a:solidFill>
+                  <a:srgbClr val="9E1B32"/>
+                </a:solidFill>
+                <a:latin typeface="Arial"/>
+                <a:ea typeface="Arial"/>
+                <a:cs typeface="Arial"/>
+              </a:defRPr>
+            </a:lvl7pPr>
+            <a:lvl8pPr>
+              <a:defRPr sz="4950" b="1">
+                <a:solidFill>
+                  <a:srgbClr val="9E1B32"/>
+                </a:solidFill>
+                <a:latin typeface="Arial"/>
+                <a:ea typeface="Arial"/>
+                <a:cs typeface="Arial"/>
+              </a:defRPr>
+            </a:lvl8pPr>
+            <a:lvl9pPr>
+              <a:defRPr sz="4950" b="1">
+                <a:solidFill>
+                  <a:srgbClr val="9E1B32"/>
+                </a:solidFill>
+                <a:latin typeface="Arial"/>
+                <a:ea typeface="Arial"/>
+                <a:cs typeface="Arial"/>
+              </a:defRPr>
+            </a:lvl9pPr>
+          </a:lstStyle>
+          <a:p>
+            <a:pPr>
+              <a:defRPr sz="4950" b="1">
+                <a:solidFill>
+                  <a:srgbClr val="9E1B32"/>
+                </a:solidFill>
+                <a:latin typeface="Arial"/>
+                <a:ea typeface="Arial"/>
+                <a:cs typeface="Arial"/>
+              </a:defRPr>
+            </a:pPr>
+            <a:r>
+              <a:rPr lang="en-US" sz="4000"/>
+              <a:t>NLU </a:t>
+            </a:r>
+            <a:endParaRPr sz="4000" b="1">
+              <a:solidFill>
+                <a:srgbClr val="9E1B32"/>
+              </a:solidFill>
+              <a:latin typeface="Arial"/>
+              <a:ea typeface="Arial"/>
+              <a:cs typeface="Arial"/>
+            </a:endParaRPr>
+          </a:p>
+        </p:txBody>
+      </p:sp>
+      <p:sp>
+        <p:nvSpPr>
+          <p:cNvPr id="5" name="矩形 4">
+            <a:extLst>
+              <a:ext uri="{FF2B5EF4-FFF2-40B4-BE49-F238E27FC236}">
+                <a16:creationId xmlns:a16="http://schemas.microsoft.com/office/drawing/2014/main" id="{477AAA3E-F043-4D63-929C-A4D782AAD594}"/>
+              </a:ext>
+            </a:extLst>
+          </p:cNvPr>
+          <p:cNvSpPr>
+            <a:spLocks noGrp="1"/>
+          </p:cNvSpPr>
+          <p:nvPr/>
+        </p:nvSpPr>
+        <p:spPr>
+          <a:xfrm>
+            <a:off x="685800" y="2571750"/>
+            <a:ext cx="3048000" cy="342900"/>
+          </a:xfrm>
+          <a:prstGeom prst="rect">
+            <a:avLst/>
+          </a:prstGeom>
+          <a:noFill/>
+          <a:ln w="0">
+            <a:noFill/>
+            <a:prstDash val="solid"/>
+          </a:ln>
+        </p:spPr>
+        <p:txBody>
+          <a:bodyPr wrap="square" lIns="0" tIns="0" rIns="0" bIns="0">
+            <a:normAutofit/>
+          </a:bodyPr>
+          <a:lstStyle>
+            <a:defPPr>
+              <a:defRPr sz="1725" b="1">
+                <a:solidFill>
+                  <a:srgbClr val="20242A"/>
+                </a:solidFill>
+                <a:latin typeface="Arial"/>
+                <a:ea typeface="Arial"/>
+                <a:cs typeface="Arial"/>
+              </a:defRPr>
+            </a:defPPr>
+            <a:lvl1pPr>
+              <a:defRPr sz="1725" b="1">
+                <a:solidFill>
+                  <a:srgbClr val="20242A"/>
+                </a:solidFill>
+                <a:latin typeface="Arial"/>
+                <a:ea typeface="Arial"/>
+                <a:cs typeface="Arial"/>
+              </a:defRPr>
+            </a:lvl1pPr>
+            <a:lvl2pPr>
+              <a:defRPr sz="1725" b="1">
+                <a:solidFill>
+                  <a:srgbClr val="20242A"/>
+                </a:solidFill>
+                <a:latin typeface="Arial"/>
+                <a:ea typeface="Arial"/>
+                <a:cs typeface="Arial"/>
+              </a:defRPr>
+            </a:lvl2pPr>
+            <a:lvl3pPr>
+              <a:defRPr sz="1725" b="1">
+                <a:solidFill>
+                  <a:srgbClr val="20242A"/>
+                </a:solidFill>
+                <a:latin typeface="Arial"/>
+                <a:ea typeface="Arial"/>
+                <a:cs typeface="Arial"/>
+              </a:defRPr>
+            </a:lvl3pPr>
+            <a:lvl4pPr>
+              <a:defRPr sz="1725" b="1">
+                <a:solidFill>
+                  <a:srgbClr val="20242A"/>
+                </a:solidFill>
+                <a:latin typeface="Arial"/>
+                <a:ea typeface="Arial"/>
+                <a:cs typeface="Arial"/>
+              </a:defRPr>
+            </a:lvl4pPr>
+            <a:lvl5pPr>
+              <a:defRPr sz="1725" b="1">
+                <a:solidFill>
+                  <a:srgbClr val="20242A"/>
+                </a:solidFill>
+                <a:latin typeface="Arial"/>
+                <a:ea typeface="Arial"/>
+                <a:cs typeface="Arial"/>
+              </a:defRPr>
+            </a:lvl5pPr>
+            <a:lvl6pPr>
+              <a:defRPr sz="1725" b="1">
+                <a:solidFill>
+                  <a:srgbClr val="20242A"/>
+                </a:solidFill>
+                <a:latin typeface="Arial"/>
+                <a:ea typeface="Arial"/>
+                <a:cs typeface="Arial"/>
+              </a:defRPr>
+            </a:lvl6pPr>
+            <a:lvl7pPr>
+              <a:defRPr sz="1725" b="1">
+                <a:solidFill>
+                  <a:srgbClr val="20242A"/>
+                </a:solidFill>
+                <a:latin typeface="Arial"/>
+                <a:ea typeface="Arial"/>
+                <a:cs typeface="Arial"/>
+              </a:defRPr>
+            </a:lvl7pPr>
+            <a:lvl8pPr>
+              <a:defRPr sz="1725" b="1">
+                <a:solidFill>
+                  <a:srgbClr val="20242A"/>
+                </a:solidFill>
+                <a:latin typeface="Arial"/>
+                <a:ea typeface="Arial"/>
+                <a:cs typeface="Arial"/>
+              </a:defRPr>
+            </a:lvl8pPr>
+            <a:lvl9pPr>
+              <a:defRPr sz="1725" b="1">
+                <a:solidFill>
+                  <a:srgbClr val="20242A"/>
+                </a:solidFill>
+                <a:latin typeface="Arial"/>
+                <a:ea typeface="Arial"/>
+                <a:cs typeface="Arial"/>
+              </a:defRPr>
+            </a:lvl9pPr>
+          </a:lstStyle>
+          <a:p>
+            <a:pPr>
+              <a:defRPr sz="1725" b="1">
+                <a:solidFill>
+                  <a:srgbClr val="20242A"/>
+                </a:solidFill>
+                <a:latin typeface="Arial"/>
+                <a:ea typeface="Arial"/>
+                <a:cs typeface="Arial"/>
+              </a:defRPr>
+            </a:pPr>
+            <a:r>
+              <a:rPr sz="1725" b="1">
+                <a:solidFill>
+                  <a:srgbClr val="20242A"/>
+                </a:solidFill>
+                <a:latin typeface="Arial"/>
+                <a:ea typeface="Arial"/>
+                <a:cs typeface="Arial"/>
+              </a:rPr>
+              <a:t>NLU</a:t>
+            </a:r>
+          </a:p>
+        </p:txBody>
+      </p:sp>
+      <p:sp>
+        <p:nvSpPr>
+          <p:cNvPr id="6" name="矩形 5">
+            <a:extLst>
+              <a:ext uri="{FF2B5EF4-FFF2-40B4-BE49-F238E27FC236}">
+                <a16:creationId xmlns:a16="http://schemas.microsoft.com/office/drawing/2014/main" id="{7BBD1935-94F5-42FF-A533-9E7085456772}"/>
+              </a:ext>
+            </a:extLst>
+          </p:cNvPr>
+          <p:cNvSpPr>
+            <a:spLocks noGrp="1"/>
+          </p:cNvSpPr>
+          <p:nvPr/>
+        </p:nvSpPr>
+        <p:spPr>
+          <a:xfrm>
+            <a:off x="685800" y="3133725"/>
+            <a:ext cx="2952750" cy="1000125"/>
+          </a:xfrm>
+          <a:prstGeom prst="rect">
+            <a:avLst/>
+          </a:prstGeom>
+          <a:noFill/>
+          <a:ln w="0">
+            <a:noFill/>
+            <a:prstDash val="solid"/>
+          </a:ln>
+        </p:spPr>
+        <p:txBody>
+          <a:bodyPr wrap="square" lIns="0" tIns="0" rIns="0" bIns="0">
+            <a:normAutofit fontScale="96792" lnSpcReduction="10000"/>
+          </a:bodyPr>
+          <a:lstStyle>
+            <a:defPPr>
+              <a:defRPr sz="1500">
+                <a:solidFill>
+                  <a:srgbClr val="686E75"/>
+                </a:solidFill>
+                <a:latin typeface="Arial"/>
+                <a:ea typeface="Arial"/>
+                <a:cs typeface="Arial"/>
+              </a:defRPr>
+            </a:defPPr>
+            <a:lvl1pPr>
+              <a:defRPr sz="1500">
+                <a:solidFill>
+                  <a:srgbClr val="686E75"/>
+                </a:solidFill>
+                <a:latin typeface="Arial"/>
+                <a:ea typeface="Arial"/>
+                <a:cs typeface="Arial"/>
+              </a:defRPr>
+            </a:lvl1pPr>
+            <a:lvl2pPr>
+              <a:defRPr sz="1500">
+                <a:solidFill>
+                  <a:srgbClr val="686E75"/>
+                </a:solidFill>
+                <a:latin typeface="Arial"/>
+                <a:ea typeface="Arial"/>
+                <a:cs typeface="Arial"/>
+              </a:defRPr>
+            </a:lvl2pPr>
+            <a:lvl3pPr>
+              <a:defRPr sz="1500">
+                <a:solidFill>
+                  <a:srgbClr val="686E75"/>
+                </a:solidFill>
+                <a:latin typeface="Arial"/>
+                <a:ea typeface="Arial"/>
+                <a:cs typeface="Arial"/>
+              </a:defRPr>
+            </a:lvl3pPr>
+            <a:lvl4pPr>
+              <a:defRPr sz="1500">
+                <a:solidFill>
+                  <a:srgbClr val="686E75"/>
+                </a:solidFill>
+                <a:latin typeface="Arial"/>
+                <a:ea typeface="Arial"/>
+                <a:cs typeface="Arial"/>
+              </a:defRPr>
+            </a:lvl4pPr>
+            <a:lvl5pPr>
+              <a:defRPr sz="1500">
+                <a:solidFill>
+                  <a:srgbClr val="686E75"/>
+                </a:solidFill>
+                <a:latin typeface="Arial"/>
+                <a:ea typeface="Arial"/>
+                <a:cs typeface="Arial"/>
+              </a:defRPr>
+            </a:lvl5pPr>
+            <a:lvl6pPr>
+              <a:defRPr sz="1500">
+                <a:solidFill>
+                  <a:srgbClr val="686E75"/>
+                </a:solidFill>
+                <a:latin typeface="Arial"/>
+                <a:ea typeface="Arial"/>
+                <a:cs typeface="Arial"/>
+              </a:defRPr>
+            </a:lvl6pPr>
+            <a:lvl7pPr>
+              <a:defRPr sz="1500">
+                <a:solidFill>
+                  <a:srgbClr val="686E75"/>
+                </a:solidFill>
+                <a:latin typeface="Arial"/>
+                <a:ea typeface="Arial"/>
+                <a:cs typeface="Arial"/>
+              </a:defRPr>
+            </a:lvl7pPr>
+            <a:lvl8pPr>
+              <a:defRPr sz="1500">
+                <a:solidFill>
+                  <a:srgbClr val="686E75"/>
+                </a:solidFill>
+                <a:latin typeface="Arial"/>
+                <a:ea typeface="Arial"/>
+                <a:cs typeface="Arial"/>
+              </a:defRPr>
+            </a:lvl8pPr>
+            <a:lvl9pPr>
+              <a:defRPr sz="1500">
+                <a:solidFill>
+                  <a:srgbClr val="686E75"/>
+                </a:solidFill>
+                <a:latin typeface="Arial"/>
+                <a:ea typeface="Arial"/>
+                <a:cs typeface="Arial"/>
+              </a:defRPr>
+            </a:lvl9pPr>
+          </a:lstStyle>
+          <a:p>
+            <a:pPr>
+              <a:lnSpc>
+                <a:spcPct val="113000"/>
+              </a:lnSpc>
+              <a:buNone/>
+              <a:defRPr sz="1500">
+                <a:solidFill>
+                  <a:srgbClr val="686E75"/>
+                </a:solidFill>
+                <a:latin typeface="Arial"/>
+                <a:ea typeface="Arial"/>
+                <a:cs typeface="Arial"/>
+              </a:defRPr>
+            </a:pPr>
+            <a:r>
+              <a:rPr sz="1500">
+                <a:solidFill>
+                  <a:srgbClr val="686E75"/>
+                </a:solidFill>
+                <a:latin typeface="Arial"/>
+                <a:ea typeface="Arial"/>
+                <a:cs typeface="Arial"/>
+              </a:rPr>
+              <a:t>Grammar, semantic judgments, inference, classification, coreference, and reading comprehension</a:t>
+            </a:r>
+          </a:p>
+        </p:txBody>
+      </p:sp>
+      <p:sp>
+        <p:nvSpPr>
+          <p:cNvPr id="7" name="矩形 6">
+            <a:extLst>
+              <a:ext uri="{FF2B5EF4-FFF2-40B4-BE49-F238E27FC236}">
+                <a16:creationId xmlns:a16="http://schemas.microsoft.com/office/drawing/2014/main" id="{AC4678A9-EA1B-465C-8CAD-CE7AC135647A}"/>
+              </a:ext>
+            </a:extLst>
+          </p:cNvPr>
+          <p:cNvSpPr>
+            <a:spLocks noGrp="1"/>
+          </p:cNvSpPr>
+          <p:nvPr/>
+        </p:nvSpPr>
+        <p:spPr>
+          <a:xfrm>
+            <a:off x="685800" y="4343400"/>
+            <a:ext cx="2952750" cy="19050"/>
+          </a:xfrm>
+          <a:prstGeom prst="rect">
+            <a:avLst/>
+          </a:prstGeom>
+          <a:solidFill>
+            <a:srgbClr val="D9D7D2"/>
+          </a:solidFill>
+          <a:ln w="0">
+            <a:noFill/>
+            <a:prstDash val="solid"/>
+          </a:ln>
+        </p:spPr>
+      </p:sp>
+      <p:sp>
+        <p:nvSpPr>
+          <p:cNvPr id="8" name="矩形 7">
+            <a:extLst>
+              <a:ext uri="{FF2B5EF4-FFF2-40B4-BE49-F238E27FC236}">
+                <a16:creationId xmlns:a16="http://schemas.microsoft.com/office/drawing/2014/main" id="{9CF8B493-8A10-4448-A3B5-DA6493B69CA1}"/>
+              </a:ext>
+            </a:extLst>
+          </p:cNvPr>
+          <p:cNvSpPr>
+            <a:spLocks noGrp="1"/>
+          </p:cNvSpPr>
+          <p:nvPr/>
+        </p:nvSpPr>
+        <p:spPr>
+          <a:xfrm>
+            <a:off x="685800" y="4552950"/>
+            <a:ext cx="2952750" cy="552450"/>
+          </a:xfrm>
+          <a:prstGeom prst="rect">
+            <a:avLst/>
+          </a:prstGeom>
+          <a:noFill/>
+          <a:ln w="0">
+            <a:noFill/>
+            <a:prstDash val="solid"/>
+          </a:ln>
+        </p:spPr>
+        <p:txBody>
+          <a:bodyPr wrap="square" lIns="0" tIns="0" rIns="0" bIns="0">
+            <a:normAutofit/>
+          </a:bodyPr>
+          <a:lstStyle>
+            <a:defPPr>
+              <a:defRPr sz="1200" b="1">
+                <a:solidFill>
+                  <a:srgbClr val="233342"/>
+                </a:solidFill>
+                <a:latin typeface="Arial"/>
+                <a:ea typeface="Arial"/>
+                <a:cs typeface="Arial"/>
+              </a:defRPr>
+            </a:defPPr>
+            <a:lvl1pPr>
+              <a:defRPr sz="1200" b="1">
+                <a:solidFill>
+                  <a:srgbClr val="233342"/>
+                </a:solidFill>
+                <a:latin typeface="Arial"/>
+                <a:ea typeface="Arial"/>
+                <a:cs typeface="Arial"/>
+              </a:defRPr>
+            </a:lvl1pPr>
+            <a:lvl2pPr>
+              <a:defRPr sz="1200" b="1">
+                <a:solidFill>
+                  <a:srgbClr val="233342"/>
+                </a:solidFill>
+                <a:latin typeface="Arial"/>
+                <a:ea typeface="Arial"/>
+                <a:cs typeface="Arial"/>
+              </a:defRPr>
+            </a:lvl2pPr>
+            <a:lvl3pPr>
+              <a:defRPr sz="1200" b="1">
+                <a:solidFill>
+                  <a:srgbClr val="233342"/>
+                </a:solidFill>
+                <a:latin typeface="Arial"/>
+                <a:ea typeface="Arial"/>
+                <a:cs typeface="Arial"/>
+              </a:defRPr>
+            </a:lvl3pPr>
+            <a:lvl4pPr>
+              <a:defRPr sz="1200" b="1">
+                <a:solidFill>
+                  <a:srgbClr val="233342"/>
+                </a:solidFill>
+                <a:latin typeface="Arial"/>
+                <a:ea typeface="Arial"/>
+                <a:cs typeface="Arial"/>
+              </a:defRPr>
+            </a:lvl4pPr>
+            <a:lvl5pPr>
+              <a:defRPr sz="1200" b="1">
+                <a:solidFill>
+                  <a:srgbClr val="233342"/>
+                </a:solidFill>
+                <a:latin typeface="Arial"/>
+                <a:ea typeface="Arial"/>
+                <a:cs typeface="Arial"/>
+              </a:defRPr>
+            </a:lvl5pPr>
+            <a:lvl6pPr>
+              <a:defRPr sz="1200" b="1">
+                <a:solidFill>
+                  <a:srgbClr val="233342"/>
+                </a:solidFill>
+                <a:latin typeface="Arial"/>
+                <a:ea typeface="Arial"/>
+                <a:cs typeface="Arial"/>
+              </a:defRPr>
+            </a:lvl6pPr>
+            <a:lvl7pPr>
+              <a:defRPr sz="1200" b="1">
+                <a:solidFill>
+                  <a:srgbClr val="233342"/>
+                </a:solidFill>
+                <a:latin typeface="Arial"/>
+                <a:ea typeface="Arial"/>
+                <a:cs typeface="Arial"/>
+              </a:defRPr>
+            </a:lvl7pPr>
+            <a:lvl8pPr>
+              <a:defRPr sz="1200" b="1">
+                <a:solidFill>
+                  <a:srgbClr val="233342"/>
+                </a:solidFill>
+                <a:latin typeface="Arial"/>
+                <a:ea typeface="Arial"/>
+                <a:cs typeface="Arial"/>
+              </a:defRPr>
+            </a:lvl8pPr>
+            <a:lvl9pPr>
+              <a:defRPr sz="1200" b="1">
+                <a:solidFill>
+                  <a:srgbClr val="233342"/>
+                </a:solidFill>
+                <a:latin typeface="Arial"/>
+                <a:ea typeface="Arial"/>
+                <a:cs typeface="Arial"/>
+              </a:defRPr>
+            </a:lvl9pPr>
+          </a:lstStyle>
+          <a:p>
+            <a:pPr>
+              <a:defRPr sz="1200" b="1">
+                <a:solidFill>
+                  <a:srgbClr val="233342"/>
+                </a:solidFill>
+                <a:latin typeface="Arial"/>
+                <a:ea typeface="Arial"/>
+                <a:cs typeface="Arial"/>
+              </a:defRPr>
+            </a:pPr>
+            <a:r>
+              <a:rPr sz="1200" b="1">
+                <a:solidFill>
+                  <a:srgbClr val="233342"/>
+                </a:solidFill>
+                <a:latin typeface="Arial"/>
+                <a:ea typeface="Arial"/>
+                <a:cs typeface="Arial"/>
+              </a:rPr>
+              <a:t>Minimal-pair accuracy + fine-tuned task scores</a:t>
+            </a:r>
+          </a:p>
+        </p:txBody>
+      </p:sp>
+      <p:sp>
+        <p:nvSpPr>
+          <p:cNvPr id="9" name="矩形 8">
+            <a:extLst>
+              <a:ext uri="{FF2B5EF4-FFF2-40B4-BE49-F238E27FC236}">
+                <a16:creationId xmlns:a16="http://schemas.microsoft.com/office/drawing/2014/main" id="{10EF365B-CFFE-4C14-BD8B-B49DF9D48000}"/>
+              </a:ext>
+            </a:extLst>
+          </p:cNvPr>
+          <p:cNvSpPr>
+            <a:spLocks noGrp="1"/>
+          </p:cNvSpPr>
+          <p:nvPr/>
+        </p:nvSpPr>
+        <p:spPr>
+          <a:xfrm>
+            <a:off x="4124325" y="1809750"/>
+            <a:ext cx="19050" cy="3105150"/>
+          </a:xfrm>
+          <a:prstGeom prst="rect">
+            <a:avLst/>
+          </a:prstGeom>
+          <a:solidFill>
+            <a:srgbClr val="D9D7D2"/>
+          </a:solidFill>
+          <a:ln w="0">
+            <a:noFill/>
+            <a:prstDash val="solid"/>
+          </a:ln>
+        </p:spPr>
+      </p:sp>
+      <p:sp>
+        <p:nvSpPr>
+          <p:cNvPr id="10" name="矩形 9">
+            <a:extLst>
+              <a:ext uri="{FF2B5EF4-FFF2-40B4-BE49-F238E27FC236}">
+                <a16:creationId xmlns:a16="http://schemas.microsoft.com/office/drawing/2014/main" id="{3A1B5F54-9DEA-45BB-BBC6-D13CD0B2A6CF}"/>
+              </a:ext>
+            </a:extLst>
+          </p:cNvPr>
+          <p:cNvSpPr>
+            <a:spLocks noGrp="1"/>
+          </p:cNvSpPr>
+          <p:nvPr/>
+        </p:nvSpPr>
+        <p:spPr>
+          <a:xfrm>
+            <a:off x="4362450" y="1695450"/>
+            <a:ext cx="2952750" cy="762000"/>
+          </a:xfrm>
+          <a:prstGeom prst="rect">
+            <a:avLst/>
+          </a:prstGeom>
+          <a:noFill/>
+          <a:ln w="0">
+            <a:noFill/>
+            <a:prstDash val="solid"/>
+          </a:ln>
+        </p:spPr>
+        <p:txBody>
+          <a:bodyPr wrap="square" lIns="0" tIns="0" rIns="0" bIns="0">
+            <a:noAutofit/>
+          </a:bodyPr>
+          <a:lstStyle>
+            <a:defPPr>
+              <a:defRPr sz="4950" b="1">
+                <a:solidFill>
+                  <a:srgbClr val="9E1B32"/>
+                </a:solidFill>
+                <a:latin typeface="Arial"/>
+                <a:ea typeface="Arial"/>
+                <a:cs typeface="Arial"/>
+              </a:defRPr>
+            </a:defPPr>
+            <a:lvl1pPr>
+              <a:defRPr sz="4950" b="1">
+                <a:solidFill>
+                  <a:srgbClr val="9E1B32"/>
+                </a:solidFill>
+                <a:latin typeface="Arial"/>
+                <a:ea typeface="Arial"/>
+                <a:cs typeface="Arial"/>
+              </a:defRPr>
+            </a:lvl1pPr>
+            <a:lvl2pPr>
+              <a:defRPr sz="4950" b="1">
+                <a:solidFill>
+                  <a:srgbClr val="9E1B32"/>
+                </a:solidFill>
+                <a:latin typeface="Arial"/>
+                <a:ea typeface="Arial"/>
+                <a:cs typeface="Arial"/>
+              </a:defRPr>
+            </a:lvl2pPr>
+            <a:lvl3pPr>
+              <a:defRPr sz="4950" b="1">
+                <a:solidFill>
+                  <a:srgbClr val="9E1B32"/>
+                </a:solidFill>
+                <a:latin typeface="Arial"/>
+                <a:ea typeface="Arial"/>
+                <a:cs typeface="Arial"/>
+              </a:defRPr>
+            </a:lvl3pPr>
+            <a:lvl4pPr>
+              <a:defRPr sz="4950" b="1">
+                <a:solidFill>
+                  <a:srgbClr val="9E1B32"/>
+                </a:solidFill>
+                <a:latin typeface="Arial"/>
+                <a:ea typeface="Arial"/>
+                <a:cs typeface="Arial"/>
+              </a:defRPr>
+            </a:lvl4pPr>
+            <a:lvl5pPr>
+              <a:defRPr sz="4950" b="1">
+                <a:solidFill>
+                  <a:srgbClr val="9E1B32"/>
+                </a:solidFill>
+                <a:latin typeface="Arial"/>
+                <a:ea typeface="Arial"/>
+                <a:cs typeface="Arial"/>
+              </a:defRPr>
+            </a:lvl5pPr>
+            <a:lvl6pPr>
+              <a:defRPr sz="4950" b="1">
+                <a:solidFill>
+                  <a:srgbClr val="9E1B32"/>
+                </a:solidFill>
+                <a:latin typeface="Arial"/>
+                <a:ea typeface="Arial"/>
+                <a:cs typeface="Arial"/>
+              </a:defRPr>
+            </a:lvl6pPr>
+            <a:lvl7pPr>
+              <a:defRPr sz="4950" b="1">
+                <a:solidFill>
+                  <a:srgbClr val="9E1B32"/>
+                </a:solidFill>
+                <a:latin typeface="Arial"/>
+                <a:ea typeface="Arial"/>
+                <a:cs typeface="Arial"/>
+              </a:defRPr>
+            </a:lvl7pPr>
+            <a:lvl8pPr>
+              <a:defRPr sz="4950" b="1">
+                <a:solidFill>
+                  <a:srgbClr val="9E1B32"/>
+                </a:solidFill>
+                <a:latin typeface="Arial"/>
+                <a:ea typeface="Arial"/>
+                <a:cs typeface="Arial"/>
+              </a:defRPr>
+            </a:lvl8pPr>
+            <a:lvl9pPr>
+              <a:defRPr sz="4950" b="1">
+                <a:solidFill>
+                  <a:srgbClr val="9E1B32"/>
+                </a:solidFill>
+                <a:latin typeface="Arial"/>
+                <a:ea typeface="Arial"/>
+                <a:cs typeface="Arial"/>
+              </a:defRPr>
+            </a:lvl9pPr>
+          </a:lstStyle>
+          <a:p>
+            <a:pPr>
+              <a:defRPr sz="4950" b="1">
+                <a:solidFill>
+                  <a:srgbClr val="9E1B32"/>
+                </a:solidFill>
+                <a:latin typeface="Arial"/>
+                <a:ea typeface="Arial"/>
+                <a:cs typeface="Arial"/>
+              </a:defRPr>
+            </a:pPr>
+            <a:r>
+              <a:rPr lang="zh-CN" altLang="zh-CN" sz="2800"/>
+              <a:t>Cognitive Modeling Track</a:t>
+            </a:r>
+          </a:p>
+          <a:p>
+            <a:pPr>
+              <a:defRPr sz="4950" b="1">
+                <a:solidFill>
+                  <a:srgbClr val="9E1B32"/>
+                </a:solidFill>
+                <a:latin typeface="Arial"/>
+                <a:ea typeface="Arial"/>
+                <a:cs typeface="Arial"/>
+              </a:defRPr>
+            </a:pPr>
+            <a:endParaRPr sz="2800" b="1">
+              <a:solidFill>
+                <a:srgbClr val="9E1B32"/>
+              </a:solidFill>
+              <a:latin typeface="Arial"/>
+              <a:ea typeface="Arial"/>
+              <a:cs typeface="Arial"/>
+            </a:endParaRPr>
+          </a:p>
+        </p:txBody>
+      </p:sp>
+      <p:sp>
+        <p:nvSpPr>
+          <p:cNvPr id="11" name="矩形 10">
+            <a:extLst>
+              <a:ext uri="{FF2B5EF4-FFF2-40B4-BE49-F238E27FC236}">
+                <a16:creationId xmlns:a16="http://schemas.microsoft.com/office/drawing/2014/main" id="{6DBB9FCE-9A4D-4EED-92AE-45C6843DAB40}"/>
+              </a:ext>
+            </a:extLst>
+          </p:cNvPr>
+          <p:cNvSpPr>
+            <a:spLocks noGrp="1"/>
+          </p:cNvSpPr>
+          <p:nvPr/>
+        </p:nvSpPr>
+        <p:spPr>
+          <a:xfrm>
+            <a:off x="4362450" y="2571750"/>
+            <a:ext cx="3048000" cy="342900"/>
+          </a:xfrm>
+          <a:prstGeom prst="rect">
+            <a:avLst/>
+          </a:prstGeom>
+          <a:noFill/>
+          <a:ln w="0">
+            <a:noFill/>
+            <a:prstDash val="solid"/>
+          </a:ln>
+        </p:spPr>
+        <p:txBody>
+          <a:bodyPr wrap="square" lIns="0" tIns="0" rIns="0" bIns="0">
+            <a:normAutofit/>
+          </a:bodyPr>
+          <a:lstStyle>
+            <a:defPPr>
+              <a:defRPr sz="1725" b="1">
+                <a:solidFill>
+                  <a:srgbClr val="20242A"/>
+                </a:solidFill>
+                <a:latin typeface="Arial"/>
+                <a:ea typeface="Arial"/>
+                <a:cs typeface="Arial"/>
+              </a:defRPr>
+            </a:defPPr>
+            <a:lvl1pPr>
+              <a:defRPr sz="1725" b="1">
+                <a:solidFill>
+                  <a:srgbClr val="20242A"/>
+                </a:solidFill>
+                <a:latin typeface="Arial"/>
+                <a:ea typeface="Arial"/>
+                <a:cs typeface="Arial"/>
+              </a:defRPr>
+            </a:lvl1pPr>
+            <a:lvl2pPr>
+              <a:defRPr sz="1725" b="1">
+                <a:solidFill>
+                  <a:srgbClr val="20242A"/>
+                </a:solidFill>
+                <a:latin typeface="Arial"/>
+                <a:ea typeface="Arial"/>
+                <a:cs typeface="Arial"/>
+              </a:defRPr>
+            </a:lvl2pPr>
+            <a:lvl3pPr>
+              <a:defRPr sz="1725" b="1">
+                <a:solidFill>
+                  <a:srgbClr val="20242A"/>
+                </a:solidFill>
+                <a:latin typeface="Arial"/>
+                <a:ea typeface="Arial"/>
+                <a:cs typeface="Arial"/>
+              </a:defRPr>
+            </a:lvl3pPr>
+            <a:lvl4pPr>
+              <a:defRPr sz="1725" b="1">
+                <a:solidFill>
+                  <a:srgbClr val="20242A"/>
+                </a:solidFill>
+                <a:latin typeface="Arial"/>
+                <a:ea typeface="Arial"/>
+                <a:cs typeface="Arial"/>
+              </a:defRPr>
+            </a:lvl4pPr>
+            <a:lvl5pPr>
+              <a:defRPr sz="1725" b="1">
+                <a:solidFill>
+                  <a:srgbClr val="20242A"/>
+                </a:solidFill>
+                <a:latin typeface="Arial"/>
+                <a:ea typeface="Arial"/>
+                <a:cs typeface="Arial"/>
+              </a:defRPr>
+            </a:lvl5pPr>
+            <a:lvl6pPr>
+              <a:defRPr sz="1725" b="1">
+                <a:solidFill>
+                  <a:srgbClr val="20242A"/>
+                </a:solidFill>
+                <a:latin typeface="Arial"/>
+                <a:ea typeface="Arial"/>
+                <a:cs typeface="Arial"/>
+              </a:defRPr>
+            </a:lvl6pPr>
+            <a:lvl7pPr>
+              <a:defRPr sz="1725" b="1">
+                <a:solidFill>
+                  <a:srgbClr val="20242A"/>
+                </a:solidFill>
+                <a:latin typeface="Arial"/>
+                <a:ea typeface="Arial"/>
+                <a:cs typeface="Arial"/>
+              </a:defRPr>
+            </a:lvl7pPr>
+            <a:lvl8pPr>
+              <a:defRPr sz="1725" b="1">
+                <a:solidFill>
+                  <a:srgbClr val="20242A"/>
+                </a:solidFill>
+                <a:latin typeface="Arial"/>
+                <a:ea typeface="Arial"/>
+                <a:cs typeface="Arial"/>
+              </a:defRPr>
+            </a:lvl8pPr>
+            <a:lvl9pPr>
+              <a:defRPr sz="1725" b="1">
+                <a:solidFill>
+                  <a:srgbClr val="20242A"/>
+                </a:solidFill>
+                <a:latin typeface="Arial"/>
+                <a:ea typeface="Arial"/>
+                <a:cs typeface="Arial"/>
+              </a:defRPr>
+            </a:lvl9pPr>
+          </a:lstStyle>
+          <a:p>
+            <a:pPr>
+              <a:defRPr sz="1725" b="1">
+                <a:solidFill>
+                  <a:srgbClr val="20242A"/>
+                </a:solidFill>
+                <a:latin typeface="Arial"/>
+                <a:ea typeface="Arial"/>
+                <a:cs typeface="Arial"/>
+              </a:defRPr>
+            </a:pPr>
+            <a:r>
+              <a:rPr sz="1725" b="1">
+                <a:solidFill>
+                  <a:srgbClr val="20242A"/>
+                </a:solidFill>
+                <a:latin typeface="Arial"/>
+                <a:ea typeface="Arial"/>
+                <a:cs typeface="Arial"/>
+              </a:rPr>
+              <a:t>HANZI</a:t>
+            </a:r>
+          </a:p>
+        </p:txBody>
+      </p:sp>
+      <p:sp>
+        <p:nvSpPr>
+          <p:cNvPr id="12" name="矩形 11">
+            <a:extLst>
+              <a:ext uri="{FF2B5EF4-FFF2-40B4-BE49-F238E27FC236}">
+                <a16:creationId xmlns:a16="http://schemas.microsoft.com/office/drawing/2014/main" id="{8E4D2411-2A5A-4F2E-BD09-4B8039E2F4B3}"/>
+              </a:ext>
+            </a:extLst>
+          </p:cNvPr>
+          <p:cNvSpPr>
+            <a:spLocks noGrp="1"/>
+          </p:cNvSpPr>
+          <p:nvPr/>
+        </p:nvSpPr>
+        <p:spPr>
+          <a:xfrm>
+            <a:off x="4362450" y="3133725"/>
+            <a:ext cx="2952750" cy="1000125"/>
+          </a:xfrm>
+          <a:prstGeom prst="rect">
+            <a:avLst/>
+          </a:prstGeom>
+          <a:noFill/>
+          <a:ln w="0">
+            <a:noFill/>
+            <a:prstDash val="solid"/>
+          </a:ln>
+        </p:spPr>
+        <p:txBody>
+          <a:bodyPr wrap="square" lIns="0" tIns="0" rIns="0" bIns="0">
+            <a:normAutofit/>
+          </a:bodyPr>
+          <a:lstStyle>
+            <a:defPPr>
+              <a:defRPr sz="1500">
+                <a:solidFill>
+                  <a:srgbClr val="686E75"/>
+                </a:solidFill>
+                <a:latin typeface="Arial"/>
+                <a:ea typeface="Arial"/>
+                <a:cs typeface="Arial"/>
+              </a:defRPr>
+            </a:defPPr>
+            <a:lvl1pPr>
+              <a:defRPr sz="1500">
+                <a:solidFill>
+                  <a:srgbClr val="686E75"/>
+                </a:solidFill>
+                <a:latin typeface="Arial"/>
+                <a:ea typeface="Arial"/>
+                <a:cs typeface="Arial"/>
+              </a:defRPr>
+            </a:lvl1pPr>
+            <a:lvl2pPr>
+              <a:defRPr sz="1500">
+                <a:solidFill>
+                  <a:srgbClr val="686E75"/>
+                </a:solidFill>
+                <a:latin typeface="Arial"/>
+                <a:ea typeface="Arial"/>
+                <a:cs typeface="Arial"/>
+              </a:defRPr>
+            </a:lvl2pPr>
+            <a:lvl3pPr>
+              <a:defRPr sz="1500">
+                <a:solidFill>
+                  <a:srgbClr val="686E75"/>
+                </a:solidFill>
+                <a:latin typeface="Arial"/>
+                <a:ea typeface="Arial"/>
+                <a:cs typeface="Arial"/>
+              </a:defRPr>
+            </a:lvl3pPr>
+            <a:lvl4pPr>
+              <a:defRPr sz="1500">
+                <a:solidFill>
+                  <a:srgbClr val="686E75"/>
+                </a:solidFill>
+                <a:latin typeface="Arial"/>
+                <a:ea typeface="Arial"/>
+                <a:cs typeface="Arial"/>
+              </a:defRPr>
+            </a:lvl4pPr>
+            <a:lvl5pPr>
+              <a:defRPr sz="1500">
+                <a:solidFill>
+                  <a:srgbClr val="686E75"/>
+                </a:solidFill>
+                <a:latin typeface="Arial"/>
+                <a:ea typeface="Arial"/>
+                <a:cs typeface="Arial"/>
+              </a:defRPr>
+            </a:lvl5pPr>
+            <a:lvl6pPr>
+              <a:defRPr sz="1500">
+                <a:solidFill>
+                  <a:srgbClr val="686E75"/>
+                </a:solidFill>
+                <a:latin typeface="Arial"/>
+                <a:ea typeface="Arial"/>
+                <a:cs typeface="Arial"/>
+              </a:defRPr>
+            </a:lvl6pPr>
+            <a:lvl7pPr>
+              <a:defRPr sz="1500">
+                <a:solidFill>
+                  <a:srgbClr val="686E75"/>
+                </a:solidFill>
+                <a:latin typeface="Arial"/>
+                <a:ea typeface="Arial"/>
+                <a:cs typeface="Arial"/>
+              </a:defRPr>
+            </a:lvl7pPr>
+            <a:lvl8pPr>
+              <a:defRPr sz="1500">
+                <a:solidFill>
+                  <a:srgbClr val="686E75"/>
+                </a:solidFill>
+                <a:latin typeface="Arial"/>
+                <a:ea typeface="Arial"/>
+                <a:cs typeface="Arial"/>
+              </a:defRPr>
+            </a:lvl8pPr>
+            <a:lvl9pPr>
+              <a:defRPr sz="1500">
+                <a:solidFill>
+                  <a:srgbClr val="686E75"/>
+                </a:solidFill>
+                <a:latin typeface="Arial"/>
+                <a:ea typeface="Arial"/>
+                <a:cs typeface="Arial"/>
+              </a:defRPr>
+            </a:lvl9pPr>
+          </a:lstStyle>
+          <a:p>
+            <a:pPr>
+              <a:lnSpc>
+                <a:spcPct val="113000"/>
+              </a:lnSpc>
+              <a:buNone/>
+              <a:defRPr sz="1500">
+                <a:solidFill>
+                  <a:srgbClr val="686E75"/>
+                </a:solidFill>
+                <a:latin typeface="Arial"/>
+                <a:ea typeface="Arial"/>
+                <a:cs typeface="Arial"/>
+              </a:defRPr>
+            </a:pPr>
+            <a:r>
+              <a:rPr sz="1500">
+                <a:solidFill>
+                  <a:srgbClr val="686E75"/>
+                </a:solidFill>
+                <a:latin typeface="Arial"/>
+                <a:ea typeface="Arial"/>
+                <a:cs typeface="Arial"/>
+              </a:rPr>
+              <a:t>Character structure and pinyin through zero-shot minimal pairs</a:t>
+            </a:r>
+          </a:p>
+        </p:txBody>
+      </p:sp>
+      <p:sp>
+        <p:nvSpPr>
+          <p:cNvPr id="13" name="矩形 12">
+            <a:extLst>
+              <a:ext uri="{FF2B5EF4-FFF2-40B4-BE49-F238E27FC236}">
+                <a16:creationId xmlns:a16="http://schemas.microsoft.com/office/drawing/2014/main" id="{0ED1CD89-1E9A-4159-A88A-1F1A8714F805}"/>
+              </a:ext>
+            </a:extLst>
+          </p:cNvPr>
+          <p:cNvSpPr>
+            <a:spLocks noGrp="1"/>
+          </p:cNvSpPr>
+          <p:nvPr/>
+        </p:nvSpPr>
+        <p:spPr>
+          <a:xfrm>
+            <a:off x="4362450" y="4343400"/>
+            <a:ext cx="2952750" cy="19050"/>
+          </a:xfrm>
+          <a:prstGeom prst="rect">
+            <a:avLst/>
+          </a:prstGeom>
+          <a:solidFill>
+            <a:srgbClr val="D9D7D2"/>
+          </a:solidFill>
+          <a:ln w="0">
+            <a:noFill/>
+            <a:prstDash val="solid"/>
+          </a:ln>
+        </p:spPr>
+      </p:sp>
+      <p:sp>
+        <p:nvSpPr>
+          <p:cNvPr id="14" name="矩形 13">
+            <a:extLst>
+              <a:ext uri="{FF2B5EF4-FFF2-40B4-BE49-F238E27FC236}">
+                <a16:creationId xmlns:a16="http://schemas.microsoft.com/office/drawing/2014/main" id="{99D70EB1-E879-4419-9005-8FC16453FF3F}"/>
+              </a:ext>
+            </a:extLst>
+          </p:cNvPr>
+          <p:cNvSpPr>
+            <a:spLocks noGrp="1"/>
+          </p:cNvSpPr>
+          <p:nvPr/>
+        </p:nvSpPr>
+        <p:spPr>
+          <a:xfrm>
+            <a:off x="4362450" y="4552950"/>
+            <a:ext cx="2952750" cy="552450"/>
+          </a:xfrm>
+          <a:prstGeom prst="rect">
+            <a:avLst/>
+          </a:prstGeom>
+          <a:noFill/>
+          <a:ln w="0">
+            <a:noFill/>
+            <a:prstDash val="solid"/>
+          </a:ln>
+        </p:spPr>
+        <p:txBody>
+          <a:bodyPr wrap="square" lIns="0" tIns="0" rIns="0" bIns="0">
+            <a:normAutofit/>
+          </a:bodyPr>
+          <a:lstStyle>
+            <a:defPPr>
+              <a:defRPr sz="1200" b="1">
+                <a:solidFill>
+                  <a:srgbClr val="233342"/>
+                </a:solidFill>
+                <a:latin typeface="Arial"/>
+                <a:ea typeface="Arial"/>
+                <a:cs typeface="Arial"/>
+              </a:defRPr>
+            </a:defPPr>
+            <a:lvl1pPr>
+              <a:defRPr sz="1200" b="1">
+                <a:solidFill>
+                  <a:srgbClr val="233342"/>
+                </a:solidFill>
+                <a:latin typeface="Arial"/>
+                <a:ea typeface="Arial"/>
+                <a:cs typeface="Arial"/>
+              </a:defRPr>
+            </a:lvl1pPr>
+            <a:lvl2pPr>
+              <a:defRPr sz="1200" b="1">
+                <a:solidFill>
+                  <a:srgbClr val="233342"/>
+                </a:solidFill>
+                <a:latin typeface="Arial"/>
+                <a:ea typeface="Arial"/>
+                <a:cs typeface="Arial"/>
+              </a:defRPr>
+            </a:lvl2pPr>
+            <a:lvl3pPr>
+              <a:defRPr sz="1200" b="1">
+                <a:solidFill>
+                  <a:srgbClr val="233342"/>
+                </a:solidFill>
+                <a:latin typeface="Arial"/>
+                <a:ea typeface="Arial"/>
+                <a:cs typeface="Arial"/>
+              </a:defRPr>
+            </a:lvl3pPr>
+            <a:lvl4pPr>
+              <a:defRPr sz="1200" b="1">
+                <a:solidFill>
+                  <a:srgbClr val="233342"/>
+                </a:solidFill>
+                <a:latin typeface="Arial"/>
+                <a:ea typeface="Arial"/>
+                <a:cs typeface="Arial"/>
+              </a:defRPr>
+            </a:lvl4pPr>
+            <a:lvl5pPr>
+              <a:defRPr sz="1200" b="1">
+                <a:solidFill>
+                  <a:srgbClr val="233342"/>
+                </a:solidFill>
+                <a:latin typeface="Arial"/>
+                <a:ea typeface="Arial"/>
+                <a:cs typeface="Arial"/>
+              </a:defRPr>
+            </a:lvl5pPr>
+            <a:lvl6pPr>
+              <a:defRPr sz="1200" b="1">
+                <a:solidFill>
+                  <a:srgbClr val="233342"/>
+                </a:solidFill>
+                <a:latin typeface="Arial"/>
+                <a:ea typeface="Arial"/>
+                <a:cs typeface="Arial"/>
+              </a:defRPr>
+            </a:lvl6pPr>
+            <a:lvl7pPr>
+              <a:defRPr sz="1200" b="1">
+                <a:solidFill>
+                  <a:srgbClr val="233342"/>
+                </a:solidFill>
+                <a:latin typeface="Arial"/>
+                <a:ea typeface="Arial"/>
+                <a:cs typeface="Arial"/>
+              </a:defRPr>
+            </a:lvl7pPr>
+            <a:lvl8pPr>
+              <a:defRPr sz="1200" b="1">
+                <a:solidFill>
+                  <a:srgbClr val="233342"/>
+                </a:solidFill>
+                <a:latin typeface="Arial"/>
+                <a:ea typeface="Arial"/>
+                <a:cs typeface="Arial"/>
+              </a:defRPr>
+            </a:lvl8pPr>
+            <a:lvl9pPr>
+              <a:defRPr sz="1200" b="1">
+                <a:solidFill>
+                  <a:srgbClr val="233342"/>
+                </a:solidFill>
+                <a:latin typeface="Arial"/>
+                <a:ea typeface="Arial"/>
+                <a:cs typeface="Arial"/>
+              </a:defRPr>
+            </a:lvl9pPr>
+          </a:lstStyle>
+          <a:p>
+            <a:pPr>
+              <a:defRPr sz="1200" b="1">
+                <a:solidFill>
+                  <a:srgbClr val="233342"/>
+                </a:solidFill>
+                <a:latin typeface="Arial"/>
+                <a:ea typeface="Arial"/>
+                <a:cs typeface="Arial"/>
+              </a:defRPr>
+            </a:pPr>
+            <a:r>
+              <a:rPr sz="1200" b="1">
+                <a:solidFill>
+                  <a:srgbClr val="233342"/>
+                </a:solidFill>
+                <a:latin typeface="Arial"/>
+                <a:ea typeface="Arial"/>
+                <a:cs typeface="Arial"/>
+              </a:rPr>
+              <a:t>Zero-shot minimal-pair accuracy</a:t>
+            </a:r>
+          </a:p>
+        </p:txBody>
+      </p:sp>
+      <p:sp>
+        <p:nvSpPr>
+          <p:cNvPr id="15" name="矩形 14">
+            <a:extLst>
+              <a:ext uri="{FF2B5EF4-FFF2-40B4-BE49-F238E27FC236}">
+                <a16:creationId xmlns:a16="http://schemas.microsoft.com/office/drawing/2014/main" id="{7E69D42E-FCB0-4E63-A65F-14387A15D38F}"/>
+              </a:ext>
+            </a:extLst>
+          </p:cNvPr>
+          <p:cNvSpPr>
+            <a:spLocks noGrp="1"/>
+          </p:cNvSpPr>
+          <p:nvPr/>
+        </p:nvSpPr>
+        <p:spPr>
+          <a:xfrm>
+            <a:off x="7800975" y="1809750"/>
+            <a:ext cx="19050" cy="3105150"/>
+          </a:xfrm>
+          <a:prstGeom prst="rect">
+            <a:avLst/>
+          </a:prstGeom>
+          <a:solidFill>
+            <a:srgbClr val="D9D7D2"/>
+          </a:solidFill>
+          <a:ln w="0">
+            <a:noFill/>
+            <a:prstDash val="solid"/>
+          </a:ln>
+        </p:spPr>
+      </p:sp>
+      <p:sp>
+        <p:nvSpPr>
+          <p:cNvPr id="16" name="矩形 15">
+            <a:extLst>
+              <a:ext uri="{FF2B5EF4-FFF2-40B4-BE49-F238E27FC236}">
+                <a16:creationId xmlns:a16="http://schemas.microsoft.com/office/drawing/2014/main" id="{609D740C-ADC1-4F14-8A44-C5C63A054B76}"/>
+              </a:ext>
+            </a:extLst>
+          </p:cNvPr>
+          <p:cNvSpPr>
+            <a:spLocks noGrp="1"/>
+          </p:cNvSpPr>
+          <p:nvPr/>
+        </p:nvSpPr>
+        <p:spPr>
+          <a:xfrm>
+            <a:off x="8039100" y="1695450"/>
+            <a:ext cx="2952750" cy="762000"/>
+          </a:xfrm>
+          <a:prstGeom prst="rect">
+            <a:avLst/>
+          </a:prstGeom>
+          <a:noFill/>
+          <a:ln w="0">
+            <a:noFill/>
+            <a:prstDash val="solid"/>
+          </a:ln>
+        </p:spPr>
+        <p:txBody>
+          <a:bodyPr wrap="square" lIns="0" tIns="0" rIns="0" bIns="0">
+            <a:noAutofit/>
+          </a:bodyPr>
+          <a:lstStyle>
+            <a:defPPr>
+              <a:defRPr sz="4950" b="1">
+                <a:solidFill>
+                  <a:srgbClr val="9E1B32"/>
+                </a:solidFill>
+                <a:latin typeface="Arial"/>
+                <a:ea typeface="Arial"/>
+                <a:cs typeface="Arial"/>
+              </a:defRPr>
+            </a:defPPr>
+            <a:lvl1pPr>
+              <a:defRPr sz="4950" b="1">
+                <a:solidFill>
+                  <a:srgbClr val="9E1B32"/>
+                </a:solidFill>
+                <a:latin typeface="Arial"/>
+                <a:ea typeface="Arial"/>
+                <a:cs typeface="Arial"/>
+              </a:defRPr>
+            </a:lvl1pPr>
+            <a:lvl2pPr>
+              <a:defRPr sz="4950" b="1">
+                <a:solidFill>
+                  <a:srgbClr val="9E1B32"/>
+                </a:solidFill>
+                <a:latin typeface="Arial"/>
+                <a:ea typeface="Arial"/>
+                <a:cs typeface="Arial"/>
+              </a:defRPr>
+            </a:lvl2pPr>
+            <a:lvl3pPr>
+              <a:defRPr sz="4950" b="1">
+                <a:solidFill>
+                  <a:srgbClr val="9E1B32"/>
+                </a:solidFill>
+                <a:latin typeface="Arial"/>
+                <a:ea typeface="Arial"/>
+                <a:cs typeface="Arial"/>
+              </a:defRPr>
+            </a:lvl3pPr>
+            <a:lvl4pPr>
+              <a:defRPr sz="4950" b="1">
+                <a:solidFill>
+                  <a:srgbClr val="9E1B32"/>
+                </a:solidFill>
+                <a:latin typeface="Arial"/>
+                <a:ea typeface="Arial"/>
+                <a:cs typeface="Arial"/>
+              </a:defRPr>
+            </a:lvl4pPr>
+            <a:lvl5pPr>
+              <a:defRPr sz="4950" b="1">
+                <a:solidFill>
+                  <a:srgbClr val="9E1B32"/>
+                </a:solidFill>
+                <a:latin typeface="Arial"/>
+                <a:ea typeface="Arial"/>
+                <a:cs typeface="Arial"/>
+              </a:defRPr>
+            </a:lvl5pPr>
+            <a:lvl6pPr>
+              <a:defRPr sz="4950" b="1">
+                <a:solidFill>
+                  <a:srgbClr val="9E1B32"/>
+                </a:solidFill>
+                <a:latin typeface="Arial"/>
+                <a:ea typeface="Arial"/>
+                <a:cs typeface="Arial"/>
+              </a:defRPr>
+            </a:lvl6pPr>
+            <a:lvl7pPr>
+              <a:defRPr sz="4950" b="1">
+                <a:solidFill>
+                  <a:srgbClr val="9E1B32"/>
+                </a:solidFill>
+                <a:latin typeface="Arial"/>
+                <a:ea typeface="Arial"/>
+                <a:cs typeface="Arial"/>
+              </a:defRPr>
+            </a:lvl7pPr>
+            <a:lvl8pPr>
+              <a:defRPr sz="4950" b="1">
+                <a:solidFill>
+                  <a:srgbClr val="9E1B32"/>
+                </a:solidFill>
+                <a:latin typeface="Arial"/>
+                <a:ea typeface="Arial"/>
+                <a:cs typeface="Arial"/>
+              </a:defRPr>
+            </a:lvl8pPr>
+            <a:lvl9pPr>
+              <a:defRPr sz="4950" b="1">
+                <a:solidFill>
+                  <a:srgbClr val="9E1B32"/>
+                </a:solidFill>
+                <a:latin typeface="Arial"/>
+                <a:ea typeface="Arial"/>
+                <a:cs typeface="Arial"/>
+              </a:defRPr>
+            </a:lvl9pPr>
+          </a:lstStyle>
+          <a:p>
+            <a:pPr>
+              <a:defRPr sz="4950" b="1">
+                <a:solidFill>
+                  <a:srgbClr val="9E1B32"/>
+                </a:solidFill>
+                <a:latin typeface="Arial"/>
+                <a:ea typeface="Arial"/>
+                <a:cs typeface="Arial"/>
+              </a:defRPr>
+            </a:pPr>
+            <a:r>
+              <a:rPr lang="zh-CN" altLang="zh-CN" sz="4000"/>
+              <a:t>HANZI </a:t>
+            </a:r>
+          </a:p>
+          <a:p>
+            <a:pPr>
+              <a:defRPr sz="4950" b="1">
+                <a:solidFill>
+                  <a:srgbClr val="9E1B32"/>
+                </a:solidFill>
+                <a:latin typeface="Arial"/>
+                <a:ea typeface="Arial"/>
+                <a:cs typeface="Arial"/>
+              </a:defRPr>
+            </a:pPr>
+            <a:endParaRPr sz="4000" b="1">
+              <a:solidFill>
+                <a:srgbClr val="9E1B32"/>
+              </a:solidFill>
+              <a:latin typeface="Arial"/>
+              <a:ea typeface="Arial"/>
+              <a:cs typeface="Arial"/>
+            </a:endParaRPr>
+          </a:p>
+        </p:txBody>
+      </p:sp>
+      <p:sp>
+        <p:nvSpPr>
+          <p:cNvPr id="17" name="矩形 16">
+            <a:extLst>
+              <a:ext uri="{FF2B5EF4-FFF2-40B4-BE49-F238E27FC236}">
+                <a16:creationId xmlns:a16="http://schemas.microsoft.com/office/drawing/2014/main" id="{8F35418C-2353-4F63-8FD3-B2F2111F4F7E}"/>
+              </a:ext>
+            </a:extLst>
+          </p:cNvPr>
+          <p:cNvSpPr>
+            <a:spLocks noGrp="1"/>
+          </p:cNvSpPr>
+          <p:nvPr/>
+        </p:nvSpPr>
+        <p:spPr>
+          <a:xfrm>
+            <a:off x="8039100" y="2571750"/>
+            <a:ext cx="3048000" cy="342900"/>
+          </a:xfrm>
+          <a:prstGeom prst="rect">
+            <a:avLst/>
+          </a:prstGeom>
+          <a:noFill/>
+          <a:ln w="0">
+            <a:noFill/>
+            <a:prstDash val="solid"/>
+          </a:ln>
+        </p:spPr>
+        <p:txBody>
+          <a:bodyPr wrap="square" lIns="0" tIns="0" rIns="0" bIns="0">
+            <a:normAutofit/>
+          </a:bodyPr>
+          <a:lstStyle>
+            <a:defPPr>
+              <a:defRPr sz="1725" b="1">
+                <a:solidFill>
+                  <a:srgbClr val="20242A"/>
+                </a:solidFill>
+                <a:latin typeface="Arial"/>
+                <a:ea typeface="Arial"/>
+                <a:cs typeface="Arial"/>
+              </a:defRPr>
+            </a:defPPr>
+            <a:lvl1pPr>
+              <a:defRPr sz="1725" b="1">
+                <a:solidFill>
+                  <a:srgbClr val="20242A"/>
+                </a:solidFill>
+                <a:latin typeface="Arial"/>
+                <a:ea typeface="Arial"/>
+                <a:cs typeface="Arial"/>
+              </a:defRPr>
+            </a:lvl1pPr>
+            <a:lvl2pPr>
+              <a:defRPr sz="1725" b="1">
+                <a:solidFill>
+                  <a:srgbClr val="20242A"/>
+                </a:solidFill>
+                <a:latin typeface="Arial"/>
+                <a:ea typeface="Arial"/>
+                <a:cs typeface="Arial"/>
+              </a:defRPr>
+            </a:lvl2pPr>
+            <a:lvl3pPr>
+              <a:defRPr sz="1725" b="1">
+                <a:solidFill>
+                  <a:srgbClr val="20242A"/>
+                </a:solidFill>
+                <a:latin typeface="Arial"/>
+                <a:ea typeface="Arial"/>
+                <a:cs typeface="Arial"/>
+              </a:defRPr>
+            </a:lvl3pPr>
+            <a:lvl4pPr>
+              <a:defRPr sz="1725" b="1">
+                <a:solidFill>
+                  <a:srgbClr val="20242A"/>
+                </a:solidFill>
+                <a:latin typeface="Arial"/>
+                <a:ea typeface="Arial"/>
+                <a:cs typeface="Arial"/>
+              </a:defRPr>
+            </a:lvl4pPr>
+            <a:lvl5pPr>
+              <a:defRPr sz="1725" b="1">
+                <a:solidFill>
+                  <a:srgbClr val="20242A"/>
+                </a:solidFill>
+                <a:latin typeface="Arial"/>
+                <a:ea typeface="Arial"/>
+                <a:cs typeface="Arial"/>
+              </a:defRPr>
+            </a:lvl5pPr>
+            <a:lvl6pPr>
+              <a:defRPr sz="1725" b="1">
+                <a:solidFill>
+                  <a:srgbClr val="20242A"/>
+                </a:solidFill>
+                <a:latin typeface="Arial"/>
+                <a:ea typeface="Arial"/>
+                <a:cs typeface="Arial"/>
+              </a:defRPr>
+            </a:lvl6pPr>
+            <a:lvl7pPr>
+              <a:defRPr sz="1725" b="1">
+                <a:solidFill>
+                  <a:srgbClr val="20242A"/>
+                </a:solidFill>
+                <a:latin typeface="Arial"/>
+                <a:ea typeface="Arial"/>
+                <a:cs typeface="Arial"/>
+              </a:defRPr>
+            </a:lvl7pPr>
+            <a:lvl8pPr>
+              <a:defRPr sz="1725" b="1">
+                <a:solidFill>
+                  <a:srgbClr val="20242A"/>
+                </a:solidFill>
+                <a:latin typeface="Arial"/>
+                <a:ea typeface="Arial"/>
+                <a:cs typeface="Arial"/>
+              </a:defRPr>
+            </a:lvl8pPr>
+            <a:lvl9pPr>
+              <a:defRPr sz="1725" b="1">
+                <a:solidFill>
+                  <a:srgbClr val="20242A"/>
+                </a:solidFill>
+                <a:latin typeface="Arial"/>
+                <a:ea typeface="Arial"/>
+                <a:cs typeface="Arial"/>
+              </a:defRPr>
+            </a:lvl9pPr>
+          </a:lstStyle>
+          <a:p>
+            <a:pPr>
+              <a:defRPr sz="1725" b="1">
+                <a:solidFill>
+                  <a:srgbClr val="20242A"/>
+                </a:solidFill>
+                <a:latin typeface="Arial"/>
+                <a:ea typeface="Arial"/>
+                <a:cs typeface="Arial"/>
+              </a:defRPr>
+            </a:pPr>
+            <a:r>
+              <a:rPr sz="1725" b="1">
+                <a:solidFill>
+                  <a:srgbClr val="20242A"/>
+                </a:solidFill>
+                <a:latin typeface="Arial"/>
+                <a:ea typeface="Arial"/>
+                <a:cs typeface="Arial"/>
+              </a:rPr>
+              <a:t>COGNITIVE MODELING</a:t>
+            </a:r>
+          </a:p>
+        </p:txBody>
+      </p:sp>
+      <p:sp>
+        <p:nvSpPr>
+          <p:cNvPr id="18" name="矩形 17">
+            <a:extLst>
+              <a:ext uri="{FF2B5EF4-FFF2-40B4-BE49-F238E27FC236}">
+                <a16:creationId xmlns:a16="http://schemas.microsoft.com/office/drawing/2014/main" id="{582D4A88-07B5-41C3-9014-833107794ECD}"/>
+              </a:ext>
+            </a:extLst>
+          </p:cNvPr>
+          <p:cNvSpPr>
+            <a:spLocks noGrp="1"/>
+          </p:cNvSpPr>
+          <p:nvPr/>
+        </p:nvSpPr>
+        <p:spPr>
+          <a:xfrm>
+            <a:off x="8039100" y="3133725"/>
+            <a:ext cx="2952750" cy="1000125"/>
+          </a:xfrm>
+          <a:prstGeom prst="rect">
+            <a:avLst/>
+          </a:prstGeom>
+          <a:noFill/>
+          <a:ln w="0">
+            <a:noFill/>
+            <a:prstDash val="solid"/>
+          </a:ln>
+        </p:spPr>
+        <p:txBody>
+          <a:bodyPr wrap="square" lIns="0" tIns="0" rIns="0" bIns="0">
+            <a:normAutofit/>
+          </a:bodyPr>
+          <a:lstStyle>
+            <a:defPPr>
+              <a:defRPr sz="1500">
+                <a:solidFill>
+                  <a:srgbClr val="686E75"/>
+                </a:solidFill>
+                <a:latin typeface="Arial"/>
+                <a:ea typeface="Arial"/>
+                <a:cs typeface="Arial"/>
+              </a:defRPr>
+            </a:defPPr>
+            <a:lvl1pPr>
+              <a:defRPr sz="1500">
+                <a:solidFill>
+                  <a:srgbClr val="686E75"/>
+                </a:solidFill>
+                <a:latin typeface="Arial"/>
+                <a:ea typeface="Arial"/>
+                <a:cs typeface="Arial"/>
+              </a:defRPr>
+            </a:lvl1pPr>
+            <a:lvl2pPr>
+              <a:defRPr sz="1500">
+                <a:solidFill>
+                  <a:srgbClr val="686E75"/>
+                </a:solidFill>
+                <a:latin typeface="Arial"/>
+                <a:ea typeface="Arial"/>
+                <a:cs typeface="Arial"/>
+              </a:defRPr>
+            </a:lvl2pPr>
+            <a:lvl3pPr>
+              <a:defRPr sz="1500">
+                <a:solidFill>
+                  <a:srgbClr val="686E75"/>
+                </a:solidFill>
+                <a:latin typeface="Arial"/>
+                <a:ea typeface="Arial"/>
+                <a:cs typeface="Arial"/>
+              </a:defRPr>
+            </a:lvl3pPr>
+            <a:lvl4pPr>
+              <a:defRPr sz="1500">
+                <a:solidFill>
+                  <a:srgbClr val="686E75"/>
+                </a:solidFill>
+                <a:latin typeface="Arial"/>
+                <a:ea typeface="Arial"/>
+                <a:cs typeface="Arial"/>
+              </a:defRPr>
+            </a:lvl4pPr>
+            <a:lvl5pPr>
+              <a:defRPr sz="1500">
+                <a:solidFill>
+                  <a:srgbClr val="686E75"/>
+                </a:solidFill>
+                <a:latin typeface="Arial"/>
+                <a:ea typeface="Arial"/>
+                <a:cs typeface="Arial"/>
+              </a:defRPr>
+            </a:lvl5pPr>
+            <a:lvl6pPr>
+              <a:defRPr sz="1500">
+                <a:solidFill>
+                  <a:srgbClr val="686E75"/>
+                </a:solidFill>
+                <a:latin typeface="Arial"/>
+                <a:ea typeface="Arial"/>
+                <a:cs typeface="Arial"/>
+              </a:defRPr>
+            </a:lvl6pPr>
+            <a:lvl7pPr>
+              <a:defRPr sz="1500">
+                <a:solidFill>
+                  <a:srgbClr val="686E75"/>
+                </a:solidFill>
+                <a:latin typeface="Arial"/>
+                <a:ea typeface="Arial"/>
+                <a:cs typeface="Arial"/>
+              </a:defRPr>
+            </a:lvl7pPr>
+            <a:lvl8pPr>
+              <a:defRPr sz="1500">
+                <a:solidFill>
+                  <a:srgbClr val="686E75"/>
+                </a:solidFill>
+                <a:latin typeface="Arial"/>
+                <a:ea typeface="Arial"/>
+                <a:cs typeface="Arial"/>
+              </a:defRPr>
+            </a:lvl8pPr>
+            <a:lvl9pPr>
+              <a:defRPr sz="1500">
+                <a:solidFill>
+                  <a:srgbClr val="686E75"/>
+                </a:solidFill>
+                <a:latin typeface="Arial"/>
+                <a:ea typeface="Arial"/>
+                <a:cs typeface="Arial"/>
+              </a:defRPr>
+            </a:lvl9pPr>
+          </a:lstStyle>
+          <a:p>
+            <a:pPr>
+              <a:lnSpc>
+                <a:spcPct val="113000"/>
+              </a:lnSpc>
+              <a:buNone/>
+              <a:defRPr sz="1500">
+                <a:solidFill>
+                  <a:srgbClr val="686E75"/>
+                </a:solidFill>
+                <a:latin typeface="Arial"/>
+                <a:ea typeface="Arial"/>
+                <a:cs typeface="Arial"/>
+              </a:defRPr>
+            </a:pPr>
+            <a:r>
+              <a:rPr sz="1500">
+                <a:solidFill>
+                  <a:srgbClr val="686E75"/>
+                </a:solidFill>
+                <a:latin typeface="Arial"/>
+                <a:ea typeface="Arial"/>
+                <a:cs typeface="Arial"/>
+              </a:rPr>
+              <a:t>Word- and discourse-level alignment with human fMRI responses</a:t>
+            </a:r>
+          </a:p>
+        </p:txBody>
+      </p:sp>
+      <p:sp>
+        <p:nvSpPr>
+          <p:cNvPr id="19" name="矩形 18">
+            <a:extLst>
+              <a:ext uri="{FF2B5EF4-FFF2-40B4-BE49-F238E27FC236}">
+                <a16:creationId xmlns:a16="http://schemas.microsoft.com/office/drawing/2014/main" id="{DBD03E9C-CA00-4CF3-B503-4B47624B91F4}"/>
+              </a:ext>
+            </a:extLst>
+          </p:cNvPr>
+          <p:cNvSpPr>
+            <a:spLocks noGrp="1"/>
+          </p:cNvSpPr>
+          <p:nvPr/>
+        </p:nvSpPr>
+        <p:spPr>
+          <a:xfrm>
+            <a:off x="8039100" y="4343400"/>
+            <a:ext cx="2952750" cy="19050"/>
+          </a:xfrm>
+          <a:prstGeom prst="rect">
+            <a:avLst/>
+          </a:prstGeom>
+          <a:solidFill>
+            <a:srgbClr val="D9D7D2"/>
+          </a:solidFill>
+          <a:ln w="0">
+            <a:noFill/>
+            <a:prstDash val="solid"/>
+          </a:ln>
+        </p:spPr>
+      </p:sp>
+      <p:sp>
+        <p:nvSpPr>
+          <p:cNvPr id="20" name="矩形 19">
+            <a:extLst>
+              <a:ext uri="{FF2B5EF4-FFF2-40B4-BE49-F238E27FC236}">
+                <a16:creationId xmlns:a16="http://schemas.microsoft.com/office/drawing/2014/main" id="{C98D12A5-3435-438E-86FD-75D7F9CDFCC7}"/>
+              </a:ext>
+            </a:extLst>
+          </p:cNvPr>
+          <p:cNvSpPr>
+            <a:spLocks noGrp="1"/>
+          </p:cNvSpPr>
+          <p:nvPr/>
+        </p:nvSpPr>
+        <p:spPr>
+          <a:xfrm>
+            <a:off x="8039100" y="4552950"/>
+            <a:ext cx="2952750" cy="552450"/>
+          </a:xfrm>
+          <a:prstGeom prst="rect">
+            <a:avLst/>
+          </a:prstGeom>
+          <a:noFill/>
+          <a:ln w="0">
+            <a:noFill/>
+            <a:prstDash val="solid"/>
+          </a:ln>
+        </p:spPr>
+        <p:txBody>
+          <a:bodyPr wrap="square" lIns="0" tIns="0" rIns="0" bIns="0">
+            <a:normAutofit/>
+          </a:bodyPr>
+          <a:lstStyle>
+            <a:defPPr>
+              <a:defRPr sz="1200" b="1">
+                <a:solidFill>
+                  <a:srgbClr val="233342"/>
+                </a:solidFill>
+                <a:latin typeface="Arial"/>
+                <a:ea typeface="Arial"/>
+                <a:cs typeface="Arial"/>
+              </a:defRPr>
+            </a:defPPr>
+            <a:lvl1pPr>
+              <a:defRPr sz="1200" b="1">
+                <a:solidFill>
+                  <a:srgbClr val="233342"/>
+                </a:solidFill>
+                <a:latin typeface="Arial"/>
+                <a:ea typeface="Arial"/>
+                <a:cs typeface="Arial"/>
+              </a:defRPr>
+            </a:lvl1pPr>
+            <a:lvl2pPr>
+              <a:defRPr sz="1200" b="1">
+                <a:solidFill>
+                  <a:srgbClr val="233342"/>
+                </a:solidFill>
+                <a:latin typeface="Arial"/>
+                <a:ea typeface="Arial"/>
+                <a:cs typeface="Arial"/>
+              </a:defRPr>
+            </a:lvl2pPr>
+            <a:lvl3pPr>
+              <a:defRPr sz="1200" b="1">
+                <a:solidFill>
+                  <a:srgbClr val="233342"/>
+                </a:solidFill>
+                <a:latin typeface="Arial"/>
+                <a:ea typeface="Arial"/>
+                <a:cs typeface="Arial"/>
+              </a:defRPr>
+            </a:lvl3pPr>
+            <a:lvl4pPr>
+              <a:defRPr sz="1200" b="1">
+                <a:solidFill>
+                  <a:srgbClr val="233342"/>
+                </a:solidFill>
+                <a:latin typeface="Arial"/>
+                <a:ea typeface="Arial"/>
+                <a:cs typeface="Arial"/>
+              </a:defRPr>
+            </a:lvl4pPr>
+            <a:lvl5pPr>
+              <a:defRPr sz="1200" b="1">
+                <a:solidFill>
+                  <a:srgbClr val="233342"/>
+                </a:solidFill>
+                <a:latin typeface="Arial"/>
+                <a:ea typeface="Arial"/>
+                <a:cs typeface="Arial"/>
+              </a:defRPr>
+            </a:lvl5pPr>
+            <a:lvl6pPr>
+              <a:defRPr sz="1200" b="1">
+                <a:solidFill>
+                  <a:srgbClr val="233342"/>
+                </a:solidFill>
+                <a:latin typeface="Arial"/>
+                <a:ea typeface="Arial"/>
+                <a:cs typeface="Arial"/>
+              </a:defRPr>
+            </a:lvl6pPr>
+            <a:lvl7pPr>
+              <a:defRPr sz="1200" b="1">
+                <a:solidFill>
+                  <a:srgbClr val="233342"/>
+                </a:solidFill>
+                <a:latin typeface="Arial"/>
+                <a:ea typeface="Arial"/>
+                <a:cs typeface="Arial"/>
+              </a:defRPr>
+            </a:lvl7pPr>
+            <a:lvl8pPr>
+              <a:defRPr sz="1200" b="1">
+                <a:solidFill>
+                  <a:srgbClr val="233342"/>
+                </a:solidFill>
+                <a:latin typeface="Arial"/>
+                <a:ea typeface="Arial"/>
+                <a:cs typeface="Arial"/>
+              </a:defRPr>
+            </a:lvl8pPr>
+            <a:lvl9pPr>
+              <a:defRPr sz="1200" b="1">
+                <a:solidFill>
+                  <a:srgbClr val="233342"/>
+                </a:solidFill>
+                <a:latin typeface="Arial"/>
+                <a:ea typeface="Arial"/>
+                <a:cs typeface="Arial"/>
+              </a:defRPr>
+            </a:lvl9pPr>
+          </a:lstStyle>
+          <a:p>
+            <a:pPr>
+              <a:defRPr sz="1200" b="1">
+                <a:solidFill>
+                  <a:srgbClr val="233342"/>
+                </a:solidFill>
+                <a:latin typeface="Arial"/>
+                <a:ea typeface="Arial"/>
+                <a:cs typeface="Arial"/>
+              </a:defRPr>
+            </a:pPr>
+            <a:r>
+              <a:rPr sz="1200" b="1">
+                <a:solidFill>
+                  <a:srgbClr val="233342"/>
+                </a:solidFill>
+                <a:latin typeface="Arial"/>
+                <a:ea typeface="Arial"/>
+                <a:cs typeface="Arial"/>
+              </a:rPr>
+              <a:t>Correlation-based encoding scores</a:t>
+            </a:r>
+          </a:p>
+        </p:txBody>
+      </p:sp>
+      <p:sp>
+        <p:nvSpPr>
+          <p:cNvPr id="21" name="evaluation-protocol-strip">
+            <a:extLst>
+              <a:ext uri="{FF2B5EF4-FFF2-40B4-BE49-F238E27FC236}">
+                <a16:creationId xmlns:a16="http://schemas.microsoft.com/office/drawing/2014/main" id="{A5914E90-046D-4C09-9EBF-E0D49ED63D23}"/>
+              </a:ext>
+            </a:extLst>
+          </p:cNvPr>
+          <p:cNvSpPr>
+            <a:spLocks noGrp="1"/>
+          </p:cNvSpPr>
+          <p:nvPr/>
+        </p:nvSpPr>
+        <p:spPr>
+          <a:xfrm>
+            <a:off x="685800" y="5457825"/>
+            <a:ext cx="10820400" cy="685800"/>
+          </a:xfrm>
+          <a:prstGeom prst="rect">
+            <a:avLst/>
+          </a:prstGeom>
+          <a:solidFill>
+            <a:srgbClr val="F4F3F0"/>
+          </a:solidFill>
+          <a:ln w="0">
+            <a:noFill/>
+            <a:prstDash val="solid"/>
+          </a:ln>
+        </p:spPr>
+      </p:sp>
+      <p:sp>
+        <p:nvSpPr>
+          <p:cNvPr id="22" name="矩形 21">
+            <a:extLst>
+              <a:ext uri="{FF2B5EF4-FFF2-40B4-BE49-F238E27FC236}">
+                <a16:creationId xmlns:a16="http://schemas.microsoft.com/office/drawing/2014/main" id="{070AAE15-DD66-40B3-80EF-AE4BA47F5D4D}"/>
+              </a:ext>
+            </a:extLst>
+          </p:cNvPr>
+          <p:cNvSpPr>
+            <a:spLocks noGrp="1"/>
+          </p:cNvSpPr>
+          <p:nvPr/>
+        </p:nvSpPr>
+        <p:spPr>
+          <a:xfrm>
+            <a:off x="971550" y="5619750"/>
+            <a:ext cx="3905250" cy="285750"/>
+          </a:xfrm>
+          <a:prstGeom prst="rect">
+            <a:avLst/>
+          </a:prstGeom>
+          <a:noFill/>
+          <a:ln w="0">
+            <a:noFill/>
+            <a:prstDash val="solid"/>
+          </a:ln>
+        </p:spPr>
+        <p:txBody>
+          <a:bodyPr wrap="square" lIns="0" tIns="0" rIns="0" bIns="0">
+            <a:noAutofit/>
+          </a:bodyPr>
+          <a:lstStyle>
+            <a:defPPr algn="ctr">
+              <a:defRPr sz="1425" b="1">
+                <a:solidFill>
+                  <a:srgbClr val="233342"/>
+                </a:solidFill>
+                <a:latin typeface="Arial"/>
+                <a:ea typeface="Arial"/>
+                <a:cs typeface="Arial"/>
+              </a:defRPr>
+            </a:defPPr>
+            <a:lvl1pPr algn="ctr">
+              <a:defRPr sz="1425" b="1">
+                <a:solidFill>
+                  <a:srgbClr val="233342"/>
+                </a:solidFill>
+                <a:latin typeface="Arial"/>
+                <a:ea typeface="Arial"/>
+                <a:cs typeface="Arial"/>
+              </a:defRPr>
+            </a:lvl1pPr>
+            <a:lvl2pPr algn="ctr">
+              <a:defRPr sz="1425" b="1">
+                <a:solidFill>
+                  <a:srgbClr val="233342"/>
+                </a:solidFill>
+                <a:latin typeface="Arial"/>
+                <a:ea typeface="Arial"/>
+                <a:cs typeface="Arial"/>
+              </a:defRPr>
+            </a:lvl2pPr>
+            <a:lvl3pPr algn="ctr">
+              <a:defRPr sz="1425" b="1">
+                <a:solidFill>
+                  <a:srgbClr val="233342"/>
+                </a:solidFill>
+                <a:latin typeface="Arial"/>
+                <a:ea typeface="Arial"/>
+                <a:cs typeface="Arial"/>
+              </a:defRPr>
+            </a:lvl3pPr>
+            <a:lvl4pPr algn="ctr">
+              <a:defRPr sz="1425" b="1">
+                <a:solidFill>
+                  <a:srgbClr val="233342"/>
+                </a:solidFill>
+                <a:latin typeface="Arial"/>
+                <a:ea typeface="Arial"/>
+                <a:cs typeface="Arial"/>
+              </a:defRPr>
+            </a:lvl4pPr>
+            <a:lvl5pPr algn="ctr">
+              <a:defRPr sz="1425" b="1">
+                <a:solidFill>
+                  <a:srgbClr val="233342"/>
+                </a:solidFill>
+                <a:latin typeface="Arial"/>
+                <a:ea typeface="Arial"/>
+                <a:cs typeface="Arial"/>
+              </a:defRPr>
+            </a:lvl5pPr>
+            <a:lvl6pPr algn="ctr">
+              <a:defRPr sz="1425" b="1">
+                <a:solidFill>
+                  <a:srgbClr val="233342"/>
+                </a:solidFill>
+                <a:latin typeface="Arial"/>
+                <a:ea typeface="Arial"/>
+                <a:cs typeface="Arial"/>
+              </a:defRPr>
+            </a:lvl6pPr>
+            <a:lvl7pPr algn="ctr">
+              <a:defRPr sz="1425" b="1">
+                <a:solidFill>
+                  <a:srgbClr val="233342"/>
+                </a:solidFill>
+                <a:latin typeface="Arial"/>
+                <a:ea typeface="Arial"/>
+                <a:cs typeface="Arial"/>
+              </a:defRPr>
+            </a:lvl7pPr>
+            <a:lvl8pPr algn="ctr">
+              <a:defRPr sz="1425" b="1">
+                <a:solidFill>
+                  <a:srgbClr val="233342"/>
+                </a:solidFill>
+                <a:latin typeface="Arial"/>
+                <a:ea typeface="Arial"/>
+                <a:cs typeface="Arial"/>
+              </a:defRPr>
+            </a:lvl8pPr>
+            <a:lvl9pPr algn="ctr">
+              <a:defRPr sz="1425" b="1">
+                <a:solidFill>
+                  <a:srgbClr val="233342"/>
+                </a:solidFill>
+                <a:latin typeface="Arial"/>
+                <a:ea typeface="Arial"/>
+                <a:cs typeface="Arial"/>
+              </a:defRPr>
+            </a:lvl9pPr>
+          </a:lstStyle>
+          <a:p>
+            <a:pPr algn="ctr">
+              <a:defRPr sz="1425" b="1">
+                <a:solidFill>
+                  <a:srgbClr val="233342"/>
+                </a:solidFill>
+                <a:latin typeface="Arial"/>
+                <a:ea typeface="Arial"/>
+                <a:cs typeface="Arial"/>
+              </a:defRPr>
+            </a:pPr>
+            <a:r>
+              <a:rPr sz="1425" b="1">
+                <a:solidFill>
+                  <a:srgbClr val="233342"/>
+                </a:solidFill>
+                <a:latin typeface="Arial"/>
+                <a:ea typeface="Arial"/>
+                <a:cs typeface="Arial"/>
+              </a:rPr>
+              <a:t>OPEN DEVELOPMENT TASKS</a:t>
+            </a:r>
+          </a:p>
+        </p:txBody>
+      </p:sp>
+      <p:sp>
+        <p:nvSpPr>
+          <p:cNvPr id="23" name="矩形 22">
+            <a:extLst>
+              <a:ext uri="{FF2B5EF4-FFF2-40B4-BE49-F238E27FC236}">
+                <a16:creationId xmlns:a16="http://schemas.microsoft.com/office/drawing/2014/main" id="{E5D9209D-0A84-43EA-8515-97E3B11FFFF5}"/>
+              </a:ext>
+            </a:extLst>
+          </p:cNvPr>
+          <p:cNvSpPr>
+            <a:spLocks noGrp="1"/>
+          </p:cNvSpPr>
+          <p:nvPr/>
+        </p:nvSpPr>
+        <p:spPr>
+          <a:xfrm>
+            <a:off x="5810250" y="5619750"/>
+            <a:ext cx="571500" cy="285750"/>
+          </a:xfrm>
+          <a:prstGeom prst="rect">
+            <a:avLst/>
+          </a:prstGeom>
+          <a:noFill/>
+          <a:ln w="0">
+            <a:noFill/>
+            <a:prstDash val="solid"/>
+          </a:ln>
+        </p:spPr>
+        <p:txBody>
+          <a:bodyPr wrap="square" lIns="0" tIns="0" rIns="0" bIns="0">
+            <a:noAutofit/>
+          </a:bodyPr>
+          <a:lstStyle>
+            <a:defPPr algn="ctr">
+              <a:defRPr sz="1800" b="1">
+                <a:solidFill>
+                  <a:srgbClr val="C49A2C"/>
+                </a:solidFill>
+                <a:latin typeface="Arial"/>
+                <a:ea typeface="Arial"/>
+                <a:cs typeface="Arial"/>
+              </a:defRPr>
+            </a:defPPr>
+            <a:lvl1pPr algn="ctr">
+              <a:defRPr sz="1800" b="1">
+                <a:solidFill>
+                  <a:srgbClr val="C49A2C"/>
+                </a:solidFill>
+                <a:latin typeface="Arial"/>
+                <a:ea typeface="Arial"/>
+                <a:cs typeface="Arial"/>
+              </a:defRPr>
+            </a:lvl1pPr>
+            <a:lvl2pPr algn="ctr">
+              <a:defRPr sz="1800" b="1">
+                <a:solidFill>
+                  <a:srgbClr val="C49A2C"/>
+                </a:solidFill>
+                <a:latin typeface="Arial"/>
+                <a:ea typeface="Arial"/>
+                <a:cs typeface="Arial"/>
+              </a:defRPr>
+            </a:lvl2pPr>
+            <a:lvl3pPr algn="ctr">
+              <a:defRPr sz="1800" b="1">
+                <a:solidFill>
+                  <a:srgbClr val="C49A2C"/>
+                </a:solidFill>
+                <a:latin typeface="Arial"/>
+                <a:ea typeface="Arial"/>
+                <a:cs typeface="Arial"/>
+              </a:defRPr>
+            </a:lvl3pPr>
+            <a:lvl4pPr algn="ctr">
+              <a:defRPr sz="1800" b="1">
+                <a:solidFill>
+                  <a:srgbClr val="C49A2C"/>
+                </a:solidFill>
+                <a:latin typeface="Arial"/>
+                <a:ea typeface="Arial"/>
+                <a:cs typeface="Arial"/>
+              </a:defRPr>
+            </a:lvl4pPr>
+            <a:lvl5pPr algn="ctr">
+              <a:defRPr sz="1800" b="1">
+                <a:solidFill>
+                  <a:srgbClr val="C49A2C"/>
+                </a:solidFill>
+                <a:latin typeface="Arial"/>
+                <a:ea typeface="Arial"/>
+                <a:cs typeface="Arial"/>
+              </a:defRPr>
+            </a:lvl5pPr>
+            <a:lvl6pPr algn="ctr">
+              <a:defRPr sz="1800" b="1">
+                <a:solidFill>
+                  <a:srgbClr val="C49A2C"/>
+                </a:solidFill>
+                <a:latin typeface="Arial"/>
+                <a:ea typeface="Arial"/>
+                <a:cs typeface="Arial"/>
+              </a:defRPr>
+            </a:lvl6pPr>
+            <a:lvl7pPr algn="ctr">
+              <a:defRPr sz="1800" b="1">
+                <a:solidFill>
+                  <a:srgbClr val="C49A2C"/>
+                </a:solidFill>
+                <a:latin typeface="Arial"/>
+                <a:ea typeface="Arial"/>
+                <a:cs typeface="Arial"/>
+              </a:defRPr>
+            </a:lvl7pPr>
+            <a:lvl8pPr algn="ctr">
+              <a:defRPr sz="1800" b="1">
+                <a:solidFill>
+                  <a:srgbClr val="C49A2C"/>
+                </a:solidFill>
+                <a:latin typeface="Arial"/>
+                <a:ea typeface="Arial"/>
+                <a:cs typeface="Arial"/>
+              </a:defRPr>
+            </a:lvl8pPr>
+            <a:lvl9pPr algn="ctr">
+              <a:defRPr sz="1800" b="1">
+                <a:solidFill>
+                  <a:srgbClr val="C49A2C"/>
+                </a:solidFill>
+                <a:latin typeface="Arial"/>
+                <a:ea typeface="Arial"/>
+                <a:cs typeface="Arial"/>
+              </a:defRPr>
+            </a:lvl9pPr>
+          </a:lstStyle>
+          <a:p>
+            <a:pPr algn="ctr">
+              <a:defRPr sz="1800" b="1">
+                <a:solidFill>
+                  <a:srgbClr val="C49A2C"/>
+                </a:solidFill>
+                <a:latin typeface="Arial"/>
+                <a:ea typeface="Arial"/>
+                <a:cs typeface="Arial"/>
+              </a:defRPr>
+            </a:pPr>
+            <a:r>
+              <a:rPr sz="1800" b="1">
+                <a:solidFill>
+                  <a:srgbClr val="C49A2C"/>
+                </a:solidFill>
+                <a:latin typeface="Arial"/>
+                <a:ea typeface="Arial"/>
+                <a:cs typeface="Arial"/>
+              </a:rPr>
+              <a:t>+</a:t>
+            </a:r>
+          </a:p>
+        </p:txBody>
+      </p:sp>
+      <p:sp>
+        <p:nvSpPr>
+          <p:cNvPr id="24" name="矩形 23">
+            <a:extLst>
+              <a:ext uri="{FF2B5EF4-FFF2-40B4-BE49-F238E27FC236}">
+                <a16:creationId xmlns:a16="http://schemas.microsoft.com/office/drawing/2014/main" id="{7BA68E87-4247-434E-9A46-A48869B4282A}"/>
+              </a:ext>
+            </a:extLst>
+          </p:cNvPr>
+          <p:cNvSpPr>
+            <a:spLocks noGrp="1"/>
+          </p:cNvSpPr>
+          <p:nvPr/>
+        </p:nvSpPr>
+        <p:spPr>
+          <a:xfrm>
+            <a:off x="7162800" y="5619750"/>
+            <a:ext cx="3390900" cy="285750"/>
+          </a:xfrm>
+          <a:prstGeom prst="rect">
+            <a:avLst/>
+          </a:prstGeom>
+          <a:noFill/>
+          <a:ln w="0">
+            <a:noFill/>
+            <a:prstDash val="solid"/>
+          </a:ln>
+        </p:spPr>
+        <p:txBody>
+          <a:bodyPr wrap="square" lIns="0" tIns="0" rIns="0" bIns="0">
+            <a:noAutofit/>
+          </a:bodyPr>
+          <a:lstStyle>
+            <a:defPPr algn="ctr">
+              <a:defRPr sz="1425" b="1">
+                <a:solidFill>
+                  <a:srgbClr val="9E1B32"/>
+                </a:solidFill>
+                <a:latin typeface="Arial"/>
+                <a:ea typeface="Arial"/>
+                <a:cs typeface="Arial"/>
+              </a:defRPr>
+            </a:defPPr>
+            <a:lvl1pPr algn="ctr">
+              <a:defRPr sz="1425" b="1">
+                <a:solidFill>
+                  <a:srgbClr val="9E1B32"/>
+                </a:solidFill>
+                <a:latin typeface="Arial"/>
+                <a:ea typeface="Arial"/>
+                <a:cs typeface="Arial"/>
+              </a:defRPr>
+            </a:lvl1pPr>
+            <a:lvl2pPr algn="ctr">
+              <a:defRPr sz="1425" b="1">
+                <a:solidFill>
+                  <a:srgbClr val="9E1B32"/>
+                </a:solidFill>
+                <a:latin typeface="Arial"/>
+                <a:ea typeface="Arial"/>
+                <a:cs typeface="Arial"/>
+              </a:defRPr>
+            </a:lvl2pPr>
+            <a:lvl3pPr algn="ctr">
+              <a:defRPr sz="1425" b="1">
+                <a:solidFill>
+                  <a:srgbClr val="9E1B32"/>
+                </a:solidFill>
+                <a:latin typeface="Arial"/>
+                <a:ea typeface="Arial"/>
+                <a:cs typeface="Arial"/>
+              </a:defRPr>
+            </a:lvl3pPr>
+            <a:lvl4pPr algn="ctr">
+              <a:defRPr sz="1425" b="1">
+                <a:solidFill>
+                  <a:srgbClr val="9E1B32"/>
+                </a:solidFill>
+                <a:latin typeface="Arial"/>
+                <a:ea typeface="Arial"/>
+                <a:cs typeface="Arial"/>
+              </a:defRPr>
+            </a:lvl4pPr>
+            <a:lvl5pPr algn="ctr">
+              <a:defRPr sz="1425" b="1">
+                <a:solidFill>
+                  <a:srgbClr val="9E1B32"/>
+                </a:solidFill>
+                <a:latin typeface="Arial"/>
+                <a:ea typeface="Arial"/>
+                <a:cs typeface="Arial"/>
+              </a:defRPr>
+            </a:lvl5pPr>
+            <a:lvl6pPr algn="ctr">
+              <a:defRPr sz="1425" b="1">
+                <a:solidFill>
+                  <a:srgbClr val="9E1B32"/>
+                </a:solidFill>
+                <a:latin typeface="Arial"/>
+                <a:ea typeface="Arial"/>
+                <a:cs typeface="Arial"/>
+              </a:defRPr>
+            </a:lvl6pPr>
+            <a:lvl7pPr algn="ctr">
+              <a:defRPr sz="1425" b="1">
+                <a:solidFill>
+                  <a:srgbClr val="9E1B32"/>
+                </a:solidFill>
+                <a:latin typeface="Arial"/>
+                <a:ea typeface="Arial"/>
+                <a:cs typeface="Arial"/>
+              </a:defRPr>
+            </a:lvl7pPr>
+            <a:lvl8pPr algn="ctr">
+              <a:defRPr sz="1425" b="1">
+                <a:solidFill>
+                  <a:srgbClr val="9E1B32"/>
+                </a:solidFill>
+                <a:latin typeface="Arial"/>
+                <a:ea typeface="Arial"/>
+                <a:cs typeface="Arial"/>
+              </a:defRPr>
+            </a:lvl8pPr>
+            <a:lvl9pPr algn="ctr">
+              <a:defRPr sz="1425" b="1">
+                <a:solidFill>
+                  <a:srgbClr val="9E1B32"/>
+                </a:solidFill>
+                <a:latin typeface="Arial"/>
+                <a:ea typeface="Arial"/>
+                <a:cs typeface="Arial"/>
+              </a:defRPr>
+            </a:lvl9pPr>
+          </a:lstStyle>
+          <a:p>
+            <a:pPr algn="ctr">
+              <a:defRPr sz="1425" b="1">
+                <a:solidFill>
+                  <a:srgbClr val="9E1B32"/>
+                </a:solidFill>
+                <a:latin typeface="Arial"/>
+                <a:ea typeface="Arial"/>
+                <a:cs typeface="Arial"/>
+              </a:defRPr>
+            </a:pPr>
+            <a:r>
+              <a:rPr sz="1425" b="1">
+                <a:solidFill>
+                  <a:srgbClr val="9E1B32"/>
+                </a:solidFill>
+                <a:latin typeface="Arial"/>
+                <a:ea typeface="Arial"/>
+                <a:cs typeface="Arial"/>
+              </a:rPr>
+              <a:t>HIDDEN FINAL TASKS</a:t>
+            </a:r>
+          </a:p>
+        </p:txBody>
+      </p:sp>
+      <p:sp>
+        <p:nvSpPr>
+          <p:cNvPr id="25" name="slide-4-footer-label">
+            <a:extLst>
+              <a:ext uri="{FF2B5EF4-FFF2-40B4-BE49-F238E27FC236}">
+                <a16:creationId xmlns:a16="http://schemas.microsoft.com/office/drawing/2014/main" id="{4C13F1E4-67A4-4B01-8698-631EE193F524}"/>
+              </a:ext>
+            </a:extLst>
+          </p:cNvPr>
+          <p:cNvSpPr>
+            <a:spLocks noGrp="1"/>
+          </p:cNvSpPr>
+          <p:nvPr/>
+        </p:nvSpPr>
+        <p:spPr>
+          <a:xfrm>
+            <a:off x="685800" y="6486525"/>
+            <a:ext cx="3048000" cy="171450"/>
+          </a:xfrm>
+          <a:prstGeom prst="rect">
+            <a:avLst/>
+          </a:prstGeom>
+          <a:noFill/>
+          <a:ln w="0">
+            <a:noFill/>
+            <a:prstDash val="solid"/>
+          </a:ln>
+        </p:spPr>
+        <p:txBody>
+          <a:bodyPr wrap="square" lIns="0" tIns="0" rIns="0" bIns="0">
+            <a:noAutofit/>
+          </a:bodyPr>
+          <a:lstStyle>
+            <a:defPPr>
+              <a:defRPr sz="975">
+                <a:solidFill>
+                  <a:srgbClr val="A5A9AE"/>
+                </a:solidFill>
+                <a:latin typeface="Arial"/>
+                <a:ea typeface="Arial"/>
+                <a:cs typeface="Arial"/>
+              </a:defRPr>
+            </a:defPPr>
+            <a:lvl1pPr>
+              <a:defRPr sz="975">
+                <a:solidFill>
+                  <a:srgbClr val="A5A9AE"/>
+                </a:solidFill>
+                <a:latin typeface="Arial"/>
+                <a:ea typeface="Arial"/>
+                <a:cs typeface="Arial"/>
+              </a:defRPr>
+            </a:lvl1pPr>
+            <a:lvl2pPr>
+              <a:defRPr sz="975">
+                <a:solidFill>
+                  <a:srgbClr val="A5A9AE"/>
+                </a:solidFill>
+                <a:latin typeface="Arial"/>
+                <a:ea typeface="Arial"/>
+                <a:cs typeface="Arial"/>
+              </a:defRPr>
+            </a:lvl2pPr>
+            <a:lvl3pPr>
+              <a:defRPr sz="975">
+                <a:solidFill>
+                  <a:srgbClr val="A5A9AE"/>
+                </a:solidFill>
+                <a:latin typeface="Arial"/>
+                <a:ea typeface="Arial"/>
+                <a:cs typeface="Arial"/>
+              </a:defRPr>
+            </a:lvl3pPr>
+            <a:lvl4pPr>
+              <a:defRPr sz="975">
+                <a:solidFill>
+                  <a:srgbClr val="A5A9AE"/>
+                </a:solidFill>
+                <a:latin typeface="Arial"/>
+                <a:ea typeface="Arial"/>
+                <a:cs typeface="Arial"/>
+              </a:defRPr>
+            </a:lvl4pPr>
+            <a:lvl5pPr>
+              <a:defRPr sz="975">
+                <a:solidFill>
+                  <a:srgbClr val="A5A9AE"/>
+                </a:solidFill>
+                <a:latin typeface="Arial"/>
+                <a:ea typeface="Arial"/>
+                <a:cs typeface="Arial"/>
+              </a:defRPr>
+            </a:lvl5pPr>
+            <a:lvl6pPr>
+              <a:defRPr sz="975">
+                <a:solidFill>
+                  <a:srgbClr val="A5A9AE"/>
+                </a:solidFill>
+                <a:latin typeface="Arial"/>
+                <a:ea typeface="Arial"/>
+                <a:cs typeface="Arial"/>
+              </a:defRPr>
+            </a:lvl6pPr>
+            <a:lvl7pPr>
+              <a:defRPr sz="975">
+                <a:solidFill>
+                  <a:srgbClr val="A5A9AE"/>
+                </a:solidFill>
+                <a:latin typeface="Arial"/>
+                <a:ea typeface="Arial"/>
+                <a:cs typeface="Arial"/>
+              </a:defRPr>
+            </a:lvl7pPr>
+            <a:lvl8pPr>
+              <a:defRPr sz="975">
+                <a:solidFill>
+                  <a:srgbClr val="A5A9AE"/>
+                </a:solidFill>
+                <a:latin typeface="Arial"/>
+                <a:ea typeface="Arial"/>
+                <a:cs typeface="Arial"/>
+              </a:defRPr>
+            </a:lvl8pPr>
+            <a:lvl9pPr>
+              <a:defRPr sz="975">
+                <a:solidFill>
+                  <a:srgbClr val="A5A9AE"/>
+                </a:solidFill>
+                <a:latin typeface="Arial"/>
+                <a:ea typeface="Arial"/>
+                <a:cs typeface="Arial"/>
+              </a:defRPr>
+            </a:lvl9pPr>
+          </a:lstStyle>
+          <a:p>
+            <a:pPr>
+              <a:defRPr sz="975">
+                <a:solidFill>
+                  <a:srgbClr val="A5A9AE"/>
+                </a:solidFill>
+                <a:latin typeface="Arial"/>
+                <a:ea typeface="Arial"/>
+                <a:cs typeface="Arial"/>
+              </a:defRPr>
+            </a:pPr>
+            <a:r>
+              <a:rPr sz="975">
+                <a:solidFill>
+                  <a:srgbClr val="A5A9AE"/>
+                </a:solidFill>
+                <a:latin typeface="Arial"/>
+                <a:ea typeface="Arial"/>
+                <a:cs typeface="Arial"/>
+              </a:rPr>
+              <a:t>ChineseBabyLM  |  NLPCC 2026</a:t>
+            </a:r>
+          </a:p>
+        </p:txBody>
+      </p:sp>
+      <p:sp>
+        <p:nvSpPr>
+          <p:cNvPr id="26" name="slide-4-footer-number">
+            <a:extLst>
+              <a:ext uri="{FF2B5EF4-FFF2-40B4-BE49-F238E27FC236}">
+                <a16:creationId xmlns:a16="http://schemas.microsoft.com/office/drawing/2014/main" id="{F99695F2-4C5C-4675-B114-4511F4DF668C}"/>
+              </a:ext>
+            </a:extLst>
+          </p:cNvPr>
+          <p:cNvSpPr>
+            <a:spLocks noGrp="1"/>
+          </p:cNvSpPr>
+          <p:nvPr/>
+        </p:nvSpPr>
+        <p:spPr>
+          <a:xfrm>
+            <a:off x="11001375" y="6467475"/>
+            <a:ext cx="504825" cy="190500"/>
+          </a:xfrm>
+          <a:prstGeom prst="rect">
+            <a:avLst/>
+          </a:prstGeom>
+          <a:noFill/>
+          <a:ln w="0">
+            <a:noFill/>
+            <a:prstDash val="solid"/>
+          </a:ln>
+        </p:spPr>
+        <p:txBody>
+          <a:bodyPr wrap="square" lIns="0" tIns="0" rIns="0" bIns="0">
+            <a:noAutofit/>
+          </a:bodyPr>
+          <a:lstStyle>
+            <a:defPPr algn="r">
+              <a:defRPr sz="1050" b="1">
+                <a:solidFill>
+                  <a:srgbClr val="9E1B32"/>
+                </a:solidFill>
+                <a:latin typeface="Arial"/>
+                <a:ea typeface="Arial"/>
+                <a:cs typeface="Arial"/>
+              </a:defRPr>
+            </a:defPPr>
+            <a:lvl1pPr algn="r">
+              <a:defRPr sz="1050" b="1">
+                <a:solidFill>
+                  <a:srgbClr val="9E1B32"/>
+                </a:solidFill>
+                <a:latin typeface="Arial"/>
+                <a:ea typeface="Arial"/>
+                <a:cs typeface="Arial"/>
+              </a:defRPr>
+            </a:lvl1pPr>
+            <a:lvl2pPr algn="r">
+              <a:defRPr sz="1050" b="1">
+                <a:solidFill>
+                  <a:srgbClr val="9E1B32"/>
+                </a:solidFill>
+                <a:latin typeface="Arial"/>
+                <a:ea typeface="Arial"/>
+                <a:cs typeface="Arial"/>
+              </a:defRPr>
+            </a:lvl2pPr>
+            <a:lvl3pPr algn="r">
+              <a:defRPr sz="1050" b="1">
+                <a:solidFill>
+                  <a:srgbClr val="9E1B32"/>
+                </a:solidFill>
+                <a:latin typeface="Arial"/>
+                <a:ea typeface="Arial"/>
+                <a:cs typeface="Arial"/>
+              </a:defRPr>
+            </a:lvl3pPr>
+            <a:lvl4pPr algn="r">
+              <a:defRPr sz="1050" b="1">
+                <a:solidFill>
+                  <a:srgbClr val="9E1B32"/>
+                </a:solidFill>
+                <a:latin typeface="Arial"/>
+                <a:ea typeface="Arial"/>
+                <a:cs typeface="Arial"/>
+              </a:defRPr>
+            </a:lvl4pPr>
+            <a:lvl5pPr algn="r">
+              <a:defRPr sz="1050" b="1">
+                <a:solidFill>
+                  <a:srgbClr val="9E1B32"/>
+                </a:solidFill>
+                <a:latin typeface="Arial"/>
+                <a:ea typeface="Arial"/>
+                <a:cs typeface="Arial"/>
+              </a:defRPr>
+            </a:lvl5pPr>
+            <a:lvl6pPr algn="r">
+              <a:defRPr sz="1050" b="1">
+                <a:solidFill>
+                  <a:srgbClr val="9E1B32"/>
+                </a:solidFill>
+                <a:latin typeface="Arial"/>
+                <a:ea typeface="Arial"/>
+                <a:cs typeface="Arial"/>
+              </a:defRPr>
+            </a:lvl6pPr>
+            <a:lvl7pPr algn="r">
+              <a:defRPr sz="1050" b="1">
+                <a:solidFill>
+                  <a:srgbClr val="9E1B32"/>
+                </a:solidFill>
+                <a:latin typeface="Arial"/>
+                <a:ea typeface="Arial"/>
+                <a:cs typeface="Arial"/>
+              </a:defRPr>
+            </a:lvl7pPr>
+            <a:lvl8pPr algn="r">
+              <a:defRPr sz="1050" b="1">
+                <a:solidFill>
+                  <a:srgbClr val="9E1B32"/>
+                </a:solidFill>
+                <a:latin typeface="Arial"/>
+                <a:ea typeface="Arial"/>
+                <a:cs typeface="Arial"/>
+              </a:defRPr>
+            </a:lvl8pPr>
+            <a:lvl9pPr algn="r">
+              <a:defRPr sz="1050" b="1">
+                <a:solidFill>
+                  <a:srgbClr val="9E1B32"/>
+                </a:solidFill>
+                <a:latin typeface="Arial"/>
+                <a:ea typeface="Arial"/>
+                <a:cs typeface="Arial"/>
+              </a:defRPr>
+            </a:lvl9pPr>
+          </a:lstStyle>
+          <a:p>
+            <a:pPr algn="r">
+              <a:defRPr sz="1050" b="1">
+                <a:solidFill>
+                  <a:srgbClr val="9E1B32"/>
+                </a:solidFill>
+                <a:latin typeface="Arial"/>
+                <a:ea typeface="Arial"/>
+                <a:cs typeface="Arial"/>
+              </a:defRPr>
+            </a:pPr>
+            <a:r>
+              <a:rPr sz="1050" b="1">
+                <a:solidFill>
+                  <a:srgbClr val="9E1B32"/>
+                </a:solidFill>
+                <a:latin typeface="Arial"/>
+                <a:ea typeface="Arial"/>
+                <a:cs typeface="Arial"/>
+              </a:rPr>
+              <a:t>04</a:t>
+            </a:r>
+          </a:p>
+        </p:txBody>
+      </p:sp>
+    </p:spTree>
+    <p:extLst>
+      <p:ext uri="{BB962C8B-B14F-4D97-AF65-F5344CB8AC3E}">
+        <p14:creationId xmlns:p14="http://schemas.microsoft.com/office/powerpoint/2010/main" val="990775507"/>
+      </p:ext>
+    </p:extLst>
+  </p:cSld>
+  <p:clrMapOvr>
+    <a:masterClrMapping/>
+  </p:clrMapOvr>
+</p:sld>
+</file>
+
+<file path=ppt/slides/slide4.xml><?xml version="1.0" encoding="utf-8"?>
 <p:sld xmlns:a="http://schemas.openxmlformats.org/drawingml/2006/main" xmlns:r="http://schemas.openxmlformats.org/officeDocument/2006/relationships" xmlns:p="http://schemas.openxmlformats.org/presentationml/2006/main">
   <p:cSld>
     <p:bg>
@@ -11356,3313 +14600,6 @@
     <p:extLst>
       <p:ext uri="{BB962C8B-B14F-4D97-AF65-F5344CB8AC3E}">
         <p14:creationId xmlns:p14="http://schemas.microsoft.com/office/powerpoint/2010/main" val="1021212281"/>
-      </p:ext>
-    </p:extLst>
-  </p:cSld>
-  <p:clrMapOvr>
-    <a:masterClrMapping/>
-  </p:clrMapOvr>
-</p:sld>
-</file>
-
-<file path=ppt/slides/slide4.xml><?xml version="1.0" encoding="utf-8"?>
-<p:sld xmlns:a="http://schemas.openxmlformats.org/drawingml/2006/main" xmlns:r="http://schemas.openxmlformats.org/officeDocument/2006/relationships" xmlns:p="http://schemas.openxmlformats.org/presentationml/2006/main">
-  <p:cSld>
-    <p:bg>
-      <p:bgPr>
-        <a:solidFill>
-          <a:srgbClr val="FFFFFF"/>
-        </a:solidFill>
-        <a:effectLst/>
-      </p:bgPr>
-    </p:bg>
-    <p:spTree>
-      <p:nvGrpSpPr>
-        <p:cNvPr id="1" name=""/>
-        <p:cNvGrpSpPr/>
-        <p:nvPr/>
-      </p:nvGrpSpPr>
-      <p:grpSpPr>
-        <a:xfrm>
-          <a:off x="0" y="0"/>
-          <a:ext cx="0" cy="0"/>
-          <a:chOff x="0" y="0"/>
-          <a:chExt cx="0" cy="0"/>
-        </a:xfrm>
-      </p:grpSpPr>
-      <p:sp>
-        <p:nvSpPr>
-          <p:cNvPr id="27" name="slide-4-title">
-            <a:extLst>
-              <a:ext uri="{FF2B5EF4-FFF2-40B4-BE49-F238E27FC236}">
-                <a16:creationId xmlns:a16="http://schemas.microsoft.com/office/drawing/2014/main" id="{ED4EF037-91C8-4FEA-AA2C-D87C9FEEBDAF}"/>
-              </a:ext>
-            </a:extLst>
-          </p:cNvPr>
-          <p:cNvSpPr>
-            <a:spLocks noGrp="1"/>
-          </p:cNvSpPr>
-          <p:nvPr/>
-        </p:nvSpPr>
-        <p:spPr>
-          <a:xfrm>
-            <a:off x="685800" y="409575"/>
-            <a:ext cx="10001250" cy="533400"/>
-          </a:xfrm>
-          <a:prstGeom prst="rect">
-            <a:avLst/>
-          </a:prstGeom>
-          <a:noFill/>
-          <a:ln w="0">
-            <a:noFill/>
-            <a:prstDash val="solid"/>
-          </a:ln>
-        </p:spPr>
-        <p:txBody>
-          <a:bodyPr wrap="square" lIns="0" tIns="0" rIns="0" bIns="0">
-            <a:noAutofit/>
-          </a:bodyPr>
-          <a:lstStyle>
-            <a:defPPr>
-              <a:defRPr sz="3150" b="1">
-                <a:solidFill>
-                  <a:srgbClr val="20242A"/>
-                </a:solidFill>
-                <a:latin typeface="Arial"/>
-                <a:ea typeface="Arial"/>
-                <a:cs typeface="Arial"/>
-              </a:defRPr>
-            </a:defPPr>
-            <a:lvl1pPr>
-              <a:defRPr sz="3150" b="1">
-                <a:solidFill>
-                  <a:srgbClr val="20242A"/>
-                </a:solidFill>
-                <a:latin typeface="Arial"/>
-                <a:ea typeface="Arial"/>
-                <a:cs typeface="Arial"/>
-              </a:defRPr>
-            </a:lvl1pPr>
-            <a:lvl2pPr>
-              <a:defRPr sz="3150" b="1">
-                <a:solidFill>
-                  <a:srgbClr val="20242A"/>
-                </a:solidFill>
-                <a:latin typeface="Arial"/>
-                <a:ea typeface="Arial"/>
-                <a:cs typeface="Arial"/>
-              </a:defRPr>
-            </a:lvl2pPr>
-            <a:lvl3pPr>
-              <a:defRPr sz="3150" b="1">
-                <a:solidFill>
-                  <a:srgbClr val="20242A"/>
-                </a:solidFill>
-                <a:latin typeface="Arial"/>
-                <a:ea typeface="Arial"/>
-                <a:cs typeface="Arial"/>
-              </a:defRPr>
-            </a:lvl3pPr>
-            <a:lvl4pPr>
-              <a:defRPr sz="3150" b="1">
-                <a:solidFill>
-                  <a:srgbClr val="20242A"/>
-                </a:solidFill>
-                <a:latin typeface="Arial"/>
-                <a:ea typeface="Arial"/>
-                <a:cs typeface="Arial"/>
-              </a:defRPr>
-            </a:lvl4pPr>
-            <a:lvl5pPr>
-              <a:defRPr sz="3150" b="1">
-                <a:solidFill>
-                  <a:srgbClr val="20242A"/>
-                </a:solidFill>
-                <a:latin typeface="Arial"/>
-                <a:ea typeface="Arial"/>
-                <a:cs typeface="Arial"/>
-              </a:defRPr>
-            </a:lvl5pPr>
-            <a:lvl6pPr>
-              <a:defRPr sz="3150" b="1">
-                <a:solidFill>
-                  <a:srgbClr val="20242A"/>
-                </a:solidFill>
-                <a:latin typeface="Arial"/>
-                <a:ea typeface="Arial"/>
-                <a:cs typeface="Arial"/>
-              </a:defRPr>
-            </a:lvl6pPr>
-            <a:lvl7pPr>
-              <a:defRPr sz="3150" b="1">
-                <a:solidFill>
-                  <a:srgbClr val="20242A"/>
-                </a:solidFill>
-                <a:latin typeface="Arial"/>
-                <a:ea typeface="Arial"/>
-                <a:cs typeface="Arial"/>
-              </a:defRPr>
-            </a:lvl7pPr>
-            <a:lvl8pPr>
-              <a:defRPr sz="3150" b="1">
-                <a:solidFill>
-                  <a:srgbClr val="20242A"/>
-                </a:solidFill>
-                <a:latin typeface="Arial"/>
-                <a:ea typeface="Arial"/>
-                <a:cs typeface="Arial"/>
-              </a:defRPr>
-            </a:lvl8pPr>
-            <a:lvl9pPr>
-              <a:defRPr sz="3150" b="1">
-                <a:solidFill>
-                  <a:srgbClr val="20242A"/>
-                </a:solidFill>
-                <a:latin typeface="Arial"/>
-                <a:ea typeface="Arial"/>
-                <a:cs typeface="Arial"/>
-              </a:defRPr>
-            </a:lvl9pPr>
-          </a:lstStyle>
-          <a:p>
-            <a:pPr>
-              <a:defRPr sz="3150" b="1">
-                <a:solidFill>
-                  <a:srgbClr val="20242A"/>
-                </a:solidFill>
-                <a:latin typeface="Arial"/>
-                <a:ea typeface="Arial"/>
-                <a:cs typeface="Arial"/>
-              </a:defRPr>
-            </a:pPr>
-            <a:r>
-              <a:rPr sz="3150" b="1" dirty="0">
-                <a:solidFill>
-                  <a:srgbClr val="20242A"/>
-                </a:solidFill>
-                <a:latin typeface="Arial"/>
-                <a:ea typeface="Arial"/>
-                <a:cs typeface="Arial"/>
-              </a:rPr>
-              <a:t>Evaluation </a:t>
-            </a:r>
-            <a:r>
-              <a:rPr lang="en-US" sz="3150" b="1" dirty="0">
-                <a:solidFill>
-                  <a:srgbClr val="20242A"/>
-                </a:solidFill>
-                <a:latin typeface="Arial"/>
-                <a:ea typeface="Arial"/>
-                <a:cs typeface="Arial"/>
-              </a:rPr>
-              <a:t>Tracks</a:t>
-            </a:r>
-            <a:endParaRPr sz="3150" b="1" dirty="0">
-              <a:solidFill>
-                <a:srgbClr val="20242A"/>
-              </a:solidFill>
-              <a:latin typeface="Arial"/>
-              <a:ea typeface="Arial"/>
-              <a:cs typeface="Arial"/>
-            </a:endParaRPr>
-          </a:p>
-        </p:txBody>
-      </p:sp>
-      <p:sp>
-        <p:nvSpPr>
-          <p:cNvPr id="2" name="slide-4-top-rule">
-            <a:extLst>
-              <a:ext uri="{FF2B5EF4-FFF2-40B4-BE49-F238E27FC236}">
-                <a16:creationId xmlns:a16="http://schemas.microsoft.com/office/drawing/2014/main" id="{31C64AA6-A017-40C0-B692-B8AE66CA2B32}"/>
-              </a:ext>
-            </a:extLst>
-          </p:cNvPr>
-          <p:cNvSpPr>
-            <a:spLocks noGrp="1"/>
-          </p:cNvSpPr>
-          <p:nvPr/>
-        </p:nvSpPr>
-        <p:spPr>
-          <a:xfrm>
-            <a:off x="685800" y="1057275"/>
-            <a:ext cx="10820400" cy="19050"/>
-          </a:xfrm>
-          <a:prstGeom prst="rect">
-            <a:avLst/>
-          </a:prstGeom>
-          <a:solidFill>
-            <a:srgbClr val="D9D7D2"/>
-          </a:solidFill>
-          <a:ln w="0">
-            <a:noFill/>
-            <a:prstDash val="solid"/>
-          </a:ln>
-        </p:spPr>
-      </p:sp>
-      <p:sp>
-        <p:nvSpPr>
-          <p:cNvPr id="3" name="矩形 2">
-            <a:extLst>
-              <a:ext uri="{FF2B5EF4-FFF2-40B4-BE49-F238E27FC236}">
-                <a16:creationId xmlns:a16="http://schemas.microsoft.com/office/drawing/2014/main" id="{93DDBE9E-E15F-4293-B32E-E33A69941438}"/>
-              </a:ext>
-            </a:extLst>
-          </p:cNvPr>
-          <p:cNvSpPr>
-            <a:spLocks noGrp="1"/>
-          </p:cNvSpPr>
-          <p:nvPr/>
-        </p:nvSpPr>
-        <p:spPr>
-          <a:xfrm>
-            <a:off x="685800" y="1304925"/>
-            <a:ext cx="5429250" cy="228600"/>
-          </a:xfrm>
-          <a:prstGeom prst="rect">
-            <a:avLst/>
-          </a:prstGeom>
-          <a:noFill/>
-          <a:ln w="0">
-            <a:noFill/>
-            <a:prstDash val="solid"/>
-          </a:ln>
-        </p:spPr>
-        <p:txBody>
-          <a:bodyPr wrap="square" lIns="0" tIns="0" rIns="0" bIns="0">
-            <a:noAutofit/>
-          </a:bodyPr>
-          <a:lstStyle>
-            <a:defPPr>
-              <a:defRPr sz="1125" b="1">
-                <a:solidFill>
-                  <a:srgbClr val="C49A2C"/>
-                </a:solidFill>
-                <a:latin typeface="Arial"/>
-                <a:ea typeface="Arial"/>
-                <a:cs typeface="Arial"/>
-              </a:defRPr>
-            </a:defPPr>
-            <a:lvl1pPr>
-              <a:defRPr sz="1125" b="1">
-                <a:solidFill>
-                  <a:srgbClr val="C49A2C"/>
-                </a:solidFill>
-                <a:latin typeface="Arial"/>
-                <a:ea typeface="Arial"/>
-                <a:cs typeface="Arial"/>
-              </a:defRPr>
-            </a:lvl1pPr>
-            <a:lvl2pPr>
-              <a:defRPr sz="1125" b="1">
-                <a:solidFill>
-                  <a:srgbClr val="C49A2C"/>
-                </a:solidFill>
-                <a:latin typeface="Arial"/>
-                <a:ea typeface="Arial"/>
-                <a:cs typeface="Arial"/>
-              </a:defRPr>
-            </a:lvl2pPr>
-            <a:lvl3pPr>
-              <a:defRPr sz="1125" b="1">
-                <a:solidFill>
-                  <a:srgbClr val="C49A2C"/>
-                </a:solidFill>
-                <a:latin typeface="Arial"/>
-                <a:ea typeface="Arial"/>
-                <a:cs typeface="Arial"/>
-              </a:defRPr>
-            </a:lvl3pPr>
-            <a:lvl4pPr>
-              <a:defRPr sz="1125" b="1">
-                <a:solidFill>
-                  <a:srgbClr val="C49A2C"/>
-                </a:solidFill>
-                <a:latin typeface="Arial"/>
-                <a:ea typeface="Arial"/>
-                <a:cs typeface="Arial"/>
-              </a:defRPr>
-            </a:lvl4pPr>
-            <a:lvl5pPr>
-              <a:defRPr sz="1125" b="1">
-                <a:solidFill>
-                  <a:srgbClr val="C49A2C"/>
-                </a:solidFill>
-                <a:latin typeface="Arial"/>
-                <a:ea typeface="Arial"/>
-                <a:cs typeface="Arial"/>
-              </a:defRPr>
-            </a:lvl5pPr>
-            <a:lvl6pPr>
-              <a:defRPr sz="1125" b="1">
-                <a:solidFill>
-                  <a:srgbClr val="C49A2C"/>
-                </a:solidFill>
-                <a:latin typeface="Arial"/>
-                <a:ea typeface="Arial"/>
-                <a:cs typeface="Arial"/>
-              </a:defRPr>
-            </a:lvl6pPr>
-            <a:lvl7pPr>
-              <a:defRPr sz="1125" b="1">
-                <a:solidFill>
-                  <a:srgbClr val="C49A2C"/>
-                </a:solidFill>
-                <a:latin typeface="Arial"/>
-                <a:ea typeface="Arial"/>
-                <a:cs typeface="Arial"/>
-              </a:defRPr>
-            </a:lvl7pPr>
-            <a:lvl8pPr>
-              <a:defRPr sz="1125" b="1">
-                <a:solidFill>
-                  <a:srgbClr val="C49A2C"/>
-                </a:solidFill>
-                <a:latin typeface="Arial"/>
-                <a:ea typeface="Arial"/>
-                <a:cs typeface="Arial"/>
-              </a:defRPr>
-            </a:lvl8pPr>
-            <a:lvl9pPr>
-              <a:defRPr sz="1125" b="1">
-                <a:solidFill>
-                  <a:srgbClr val="C49A2C"/>
-                </a:solidFill>
-                <a:latin typeface="Arial"/>
-                <a:ea typeface="Arial"/>
-                <a:cs typeface="Arial"/>
-              </a:defRPr>
-            </a:lvl9pPr>
-          </a:lstStyle>
-          <a:p>
-            <a:pPr>
-              <a:defRPr sz="1125" b="1">
-                <a:solidFill>
-                  <a:srgbClr val="C49A2C"/>
-                </a:solidFill>
-                <a:latin typeface="Arial"/>
-                <a:ea typeface="Arial"/>
-                <a:cs typeface="Arial"/>
-              </a:defRPr>
-            </a:pPr>
-            <a:r>
-              <a:rPr sz="1125" b="1">
-                <a:solidFill>
-                  <a:srgbClr val="C49A2C"/>
-                </a:solidFill>
-                <a:latin typeface="Arial"/>
-                <a:ea typeface="Arial"/>
-                <a:cs typeface="Arial"/>
-              </a:rPr>
-              <a:t>14 TASKS IN THREE COMPLEMENTARY TRACKS</a:t>
-            </a:r>
-          </a:p>
-        </p:txBody>
-      </p:sp>
-      <p:sp>
-        <p:nvSpPr>
-          <p:cNvPr id="4" name="矩形 3">
-            <a:extLst>
-              <a:ext uri="{FF2B5EF4-FFF2-40B4-BE49-F238E27FC236}">
-                <a16:creationId xmlns:a16="http://schemas.microsoft.com/office/drawing/2014/main" id="{4A649897-7383-4A89-90B8-790AEFE0E312}"/>
-              </a:ext>
-            </a:extLst>
-          </p:cNvPr>
-          <p:cNvSpPr>
-            <a:spLocks noGrp="1"/>
-          </p:cNvSpPr>
-          <p:nvPr/>
-        </p:nvSpPr>
-        <p:spPr>
-          <a:xfrm>
-            <a:off x="685800" y="1695450"/>
-            <a:ext cx="2952750" cy="762000"/>
-          </a:xfrm>
-          <a:prstGeom prst="rect">
-            <a:avLst/>
-          </a:prstGeom>
-          <a:noFill/>
-          <a:ln w="0">
-            <a:noFill/>
-            <a:prstDash val="solid"/>
-          </a:ln>
-        </p:spPr>
-        <p:txBody>
-          <a:bodyPr wrap="square" lIns="0" tIns="0" rIns="0" bIns="0">
-            <a:noAutofit/>
-          </a:bodyPr>
-          <a:lstStyle>
-            <a:defPPr>
-              <a:defRPr sz="4950" b="1">
-                <a:solidFill>
-                  <a:srgbClr val="9E1B32"/>
-                </a:solidFill>
-                <a:latin typeface="Arial"/>
-                <a:ea typeface="Arial"/>
-                <a:cs typeface="Arial"/>
-              </a:defRPr>
-            </a:defPPr>
-            <a:lvl1pPr>
-              <a:defRPr sz="4950" b="1">
-                <a:solidFill>
-                  <a:srgbClr val="9E1B32"/>
-                </a:solidFill>
-                <a:latin typeface="Arial"/>
-                <a:ea typeface="Arial"/>
-                <a:cs typeface="Arial"/>
-              </a:defRPr>
-            </a:lvl1pPr>
-            <a:lvl2pPr>
-              <a:defRPr sz="4950" b="1">
-                <a:solidFill>
-                  <a:srgbClr val="9E1B32"/>
-                </a:solidFill>
-                <a:latin typeface="Arial"/>
-                <a:ea typeface="Arial"/>
-                <a:cs typeface="Arial"/>
-              </a:defRPr>
-            </a:lvl2pPr>
-            <a:lvl3pPr>
-              <a:defRPr sz="4950" b="1">
-                <a:solidFill>
-                  <a:srgbClr val="9E1B32"/>
-                </a:solidFill>
-                <a:latin typeface="Arial"/>
-                <a:ea typeface="Arial"/>
-                <a:cs typeface="Arial"/>
-              </a:defRPr>
-            </a:lvl3pPr>
-            <a:lvl4pPr>
-              <a:defRPr sz="4950" b="1">
-                <a:solidFill>
-                  <a:srgbClr val="9E1B32"/>
-                </a:solidFill>
-                <a:latin typeface="Arial"/>
-                <a:ea typeface="Arial"/>
-                <a:cs typeface="Arial"/>
-              </a:defRPr>
-            </a:lvl4pPr>
-            <a:lvl5pPr>
-              <a:defRPr sz="4950" b="1">
-                <a:solidFill>
-                  <a:srgbClr val="9E1B32"/>
-                </a:solidFill>
-                <a:latin typeface="Arial"/>
-                <a:ea typeface="Arial"/>
-                <a:cs typeface="Arial"/>
-              </a:defRPr>
-            </a:lvl5pPr>
-            <a:lvl6pPr>
-              <a:defRPr sz="4950" b="1">
-                <a:solidFill>
-                  <a:srgbClr val="9E1B32"/>
-                </a:solidFill>
-                <a:latin typeface="Arial"/>
-                <a:ea typeface="Arial"/>
-                <a:cs typeface="Arial"/>
-              </a:defRPr>
-            </a:lvl6pPr>
-            <a:lvl7pPr>
-              <a:defRPr sz="4950" b="1">
-                <a:solidFill>
-                  <a:srgbClr val="9E1B32"/>
-                </a:solidFill>
-                <a:latin typeface="Arial"/>
-                <a:ea typeface="Arial"/>
-                <a:cs typeface="Arial"/>
-              </a:defRPr>
-            </a:lvl7pPr>
-            <a:lvl8pPr>
-              <a:defRPr sz="4950" b="1">
-                <a:solidFill>
-                  <a:srgbClr val="9E1B32"/>
-                </a:solidFill>
-                <a:latin typeface="Arial"/>
-                <a:ea typeface="Arial"/>
-                <a:cs typeface="Arial"/>
-              </a:defRPr>
-            </a:lvl8pPr>
-            <a:lvl9pPr>
-              <a:defRPr sz="4950" b="1">
-                <a:solidFill>
-                  <a:srgbClr val="9E1B32"/>
-                </a:solidFill>
-                <a:latin typeface="Arial"/>
-                <a:ea typeface="Arial"/>
-                <a:cs typeface="Arial"/>
-              </a:defRPr>
-            </a:lvl9pPr>
-          </a:lstStyle>
-          <a:p>
-            <a:pPr>
-              <a:defRPr sz="4950" b="1">
-                <a:solidFill>
-                  <a:srgbClr val="9E1B32"/>
-                </a:solidFill>
-                <a:latin typeface="Arial"/>
-                <a:ea typeface="Arial"/>
-                <a:cs typeface="Arial"/>
-              </a:defRPr>
-            </a:pPr>
-            <a:r>
-              <a:rPr sz="4950" b="1">
-                <a:solidFill>
-                  <a:srgbClr val="9E1B32"/>
-                </a:solidFill>
-                <a:latin typeface="Arial"/>
-                <a:ea typeface="Arial"/>
-                <a:cs typeface="Arial"/>
-              </a:rPr>
-              <a:t>8</a:t>
-            </a:r>
-          </a:p>
-        </p:txBody>
-      </p:sp>
-      <p:sp>
-        <p:nvSpPr>
-          <p:cNvPr id="5" name="矩形 4">
-            <a:extLst>
-              <a:ext uri="{FF2B5EF4-FFF2-40B4-BE49-F238E27FC236}">
-                <a16:creationId xmlns:a16="http://schemas.microsoft.com/office/drawing/2014/main" id="{477AAA3E-F043-4D63-929C-A4D782AAD594}"/>
-              </a:ext>
-            </a:extLst>
-          </p:cNvPr>
-          <p:cNvSpPr>
-            <a:spLocks noGrp="1"/>
-          </p:cNvSpPr>
-          <p:nvPr/>
-        </p:nvSpPr>
-        <p:spPr>
-          <a:xfrm>
-            <a:off x="685800" y="2571750"/>
-            <a:ext cx="3048000" cy="342900"/>
-          </a:xfrm>
-          <a:prstGeom prst="rect">
-            <a:avLst/>
-          </a:prstGeom>
-          <a:noFill/>
-          <a:ln w="0">
-            <a:noFill/>
-            <a:prstDash val="solid"/>
-          </a:ln>
-        </p:spPr>
-        <p:txBody>
-          <a:bodyPr wrap="square" lIns="0" tIns="0" rIns="0" bIns="0">
-            <a:normAutofit/>
-          </a:bodyPr>
-          <a:lstStyle>
-            <a:defPPr>
-              <a:defRPr sz="1725" b="1">
-                <a:solidFill>
-                  <a:srgbClr val="20242A"/>
-                </a:solidFill>
-                <a:latin typeface="Arial"/>
-                <a:ea typeface="Arial"/>
-                <a:cs typeface="Arial"/>
-              </a:defRPr>
-            </a:defPPr>
-            <a:lvl1pPr>
-              <a:defRPr sz="1725" b="1">
-                <a:solidFill>
-                  <a:srgbClr val="20242A"/>
-                </a:solidFill>
-                <a:latin typeface="Arial"/>
-                <a:ea typeface="Arial"/>
-                <a:cs typeface="Arial"/>
-              </a:defRPr>
-            </a:lvl1pPr>
-            <a:lvl2pPr>
-              <a:defRPr sz="1725" b="1">
-                <a:solidFill>
-                  <a:srgbClr val="20242A"/>
-                </a:solidFill>
-                <a:latin typeface="Arial"/>
-                <a:ea typeface="Arial"/>
-                <a:cs typeface="Arial"/>
-              </a:defRPr>
-            </a:lvl2pPr>
-            <a:lvl3pPr>
-              <a:defRPr sz="1725" b="1">
-                <a:solidFill>
-                  <a:srgbClr val="20242A"/>
-                </a:solidFill>
-                <a:latin typeface="Arial"/>
-                <a:ea typeface="Arial"/>
-                <a:cs typeface="Arial"/>
-              </a:defRPr>
-            </a:lvl3pPr>
-            <a:lvl4pPr>
-              <a:defRPr sz="1725" b="1">
-                <a:solidFill>
-                  <a:srgbClr val="20242A"/>
-                </a:solidFill>
-                <a:latin typeface="Arial"/>
-                <a:ea typeface="Arial"/>
-                <a:cs typeface="Arial"/>
-              </a:defRPr>
-            </a:lvl4pPr>
-            <a:lvl5pPr>
-              <a:defRPr sz="1725" b="1">
-                <a:solidFill>
-                  <a:srgbClr val="20242A"/>
-                </a:solidFill>
-                <a:latin typeface="Arial"/>
-                <a:ea typeface="Arial"/>
-                <a:cs typeface="Arial"/>
-              </a:defRPr>
-            </a:lvl5pPr>
-            <a:lvl6pPr>
-              <a:defRPr sz="1725" b="1">
-                <a:solidFill>
-                  <a:srgbClr val="20242A"/>
-                </a:solidFill>
-                <a:latin typeface="Arial"/>
-                <a:ea typeface="Arial"/>
-                <a:cs typeface="Arial"/>
-              </a:defRPr>
-            </a:lvl6pPr>
-            <a:lvl7pPr>
-              <a:defRPr sz="1725" b="1">
-                <a:solidFill>
-                  <a:srgbClr val="20242A"/>
-                </a:solidFill>
-                <a:latin typeface="Arial"/>
-                <a:ea typeface="Arial"/>
-                <a:cs typeface="Arial"/>
-              </a:defRPr>
-            </a:lvl7pPr>
-            <a:lvl8pPr>
-              <a:defRPr sz="1725" b="1">
-                <a:solidFill>
-                  <a:srgbClr val="20242A"/>
-                </a:solidFill>
-                <a:latin typeface="Arial"/>
-                <a:ea typeface="Arial"/>
-                <a:cs typeface="Arial"/>
-              </a:defRPr>
-            </a:lvl8pPr>
-            <a:lvl9pPr>
-              <a:defRPr sz="1725" b="1">
-                <a:solidFill>
-                  <a:srgbClr val="20242A"/>
-                </a:solidFill>
-                <a:latin typeface="Arial"/>
-                <a:ea typeface="Arial"/>
-                <a:cs typeface="Arial"/>
-              </a:defRPr>
-            </a:lvl9pPr>
-          </a:lstStyle>
-          <a:p>
-            <a:pPr>
-              <a:defRPr sz="1725" b="1">
-                <a:solidFill>
-                  <a:srgbClr val="20242A"/>
-                </a:solidFill>
-                <a:latin typeface="Arial"/>
-                <a:ea typeface="Arial"/>
-                <a:cs typeface="Arial"/>
-              </a:defRPr>
-            </a:pPr>
-            <a:r>
-              <a:rPr sz="1725" b="1">
-                <a:solidFill>
-                  <a:srgbClr val="20242A"/>
-                </a:solidFill>
-                <a:latin typeface="Arial"/>
-                <a:ea typeface="Arial"/>
-                <a:cs typeface="Arial"/>
-              </a:rPr>
-              <a:t>NLU</a:t>
-            </a:r>
-          </a:p>
-        </p:txBody>
-      </p:sp>
-      <p:sp>
-        <p:nvSpPr>
-          <p:cNvPr id="6" name="矩形 5">
-            <a:extLst>
-              <a:ext uri="{FF2B5EF4-FFF2-40B4-BE49-F238E27FC236}">
-                <a16:creationId xmlns:a16="http://schemas.microsoft.com/office/drawing/2014/main" id="{7BBD1935-94F5-42FF-A533-9E7085456772}"/>
-              </a:ext>
-            </a:extLst>
-          </p:cNvPr>
-          <p:cNvSpPr>
-            <a:spLocks noGrp="1"/>
-          </p:cNvSpPr>
-          <p:nvPr/>
-        </p:nvSpPr>
-        <p:spPr>
-          <a:xfrm>
-            <a:off x="685800" y="3133725"/>
-            <a:ext cx="2952750" cy="1000125"/>
-          </a:xfrm>
-          <a:prstGeom prst="rect">
-            <a:avLst/>
-          </a:prstGeom>
-          <a:noFill/>
-          <a:ln w="0">
-            <a:noFill/>
-            <a:prstDash val="solid"/>
-          </a:ln>
-        </p:spPr>
-        <p:txBody>
-          <a:bodyPr wrap="square" lIns="0" tIns="0" rIns="0" bIns="0">
-            <a:normAutofit fontScale="96792"/>
-          </a:bodyPr>
-          <a:lstStyle>
-            <a:defPPr>
-              <a:defRPr sz="1500">
-                <a:solidFill>
-                  <a:srgbClr val="686E75"/>
-                </a:solidFill>
-                <a:latin typeface="Arial"/>
-                <a:ea typeface="Arial"/>
-                <a:cs typeface="Arial"/>
-              </a:defRPr>
-            </a:defPPr>
-            <a:lvl1pPr>
-              <a:defRPr sz="1500">
-                <a:solidFill>
-                  <a:srgbClr val="686E75"/>
-                </a:solidFill>
-                <a:latin typeface="Arial"/>
-                <a:ea typeface="Arial"/>
-                <a:cs typeface="Arial"/>
-              </a:defRPr>
-            </a:lvl1pPr>
-            <a:lvl2pPr>
-              <a:defRPr sz="1500">
-                <a:solidFill>
-                  <a:srgbClr val="686E75"/>
-                </a:solidFill>
-                <a:latin typeface="Arial"/>
-                <a:ea typeface="Arial"/>
-                <a:cs typeface="Arial"/>
-              </a:defRPr>
-            </a:lvl2pPr>
-            <a:lvl3pPr>
-              <a:defRPr sz="1500">
-                <a:solidFill>
-                  <a:srgbClr val="686E75"/>
-                </a:solidFill>
-                <a:latin typeface="Arial"/>
-                <a:ea typeface="Arial"/>
-                <a:cs typeface="Arial"/>
-              </a:defRPr>
-            </a:lvl3pPr>
-            <a:lvl4pPr>
-              <a:defRPr sz="1500">
-                <a:solidFill>
-                  <a:srgbClr val="686E75"/>
-                </a:solidFill>
-                <a:latin typeface="Arial"/>
-                <a:ea typeface="Arial"/>
-                <a:cs typeface="Arial"/>
-              </a:defRPr>
-            </a:lvl4pPr>
-            <a:lvl5pPr>
-              <a:defRPr sz="1500">
-                <a:solidFill>
-                  <a:srgbClr val="686E75"/>
-                </a:solidFill>
-                <a:latin typeface="Arial"/>
-                <a:ea typeface="Arial"/>
-                <a:cs typeface="Arial"/>
-              </a:defRPr>
-            </a:lvl5pPr>
-            <a:lvl6pPr>
-              <a:defRPr sz="1500">
-                <a:solidFill>
-                  <a:srgbClr val="686E75"/>
-                </a:solidFill>
-                <a:latin typeface="Arial"/>
-                <a:ea typeface="Arial"/>
-                <a:cs typeface="Arial"/>
-              </a:defRPr>
-            </a:lvl6pPr>
-            <a:lvl7pPr>
-              <a:defRPr sz="1500">
-                <a:solidFill>
-                  <a:srgbClr val="686E75"/>
-                </a:solidFill>
-                <a:latin typeface="Arial"/>
-                <a:ea typeface="Arial"/>
-                <a:cs typeface="Arial"/>
-              </a:defRPr>
-            </a:lvl7pPr>
-            <a:lvl8pPr>
-              <a:defRPr sz="1500">
-                <a:solidFill>
-                  <a:srgbClr val="686E75"/>
-                </a:solidFill>
-                <a:latin typeface="Arial"/>
-                <a:ea typeface="Arial"/>
-                <a:cs typeface="Arial"/>
-              </a:defRPr>
-            </a:lvl8pPr>
-            <a:lvl9pPr>
-              <a:defRPr sz="1500">
-                <a:solidFill>
-                  <a:srgbClr val="686E75"/>
-                </a:solidFill>
-                <a:latin typeface="Arial"/>
-                <a:ea typeface="Arial"/>
-                <a:cs typeface="Arial"/>
-              </a:defRPr>
-            </a:lvl9pPr>
-          </a:lstStyle>
-          <a:p>
-            <a:pPr>
-              <a:lnSpc>
-                <a:spcPct val="113000"/>
-              </a:lnSpc>
-              <a:buNone/>
-              <a:defRPr sz="1500">
-                <a:solidFill>
-                  <a:srgbClr val="686E75"/>
-                </a:solidFill>
-                <a:latin typeface="Arial"/>
-                <a:ea typeface="Arial"/>
-                <a:cs typeface="Arial"/>
-              </a:defRPr>
-            </a:pPr>
-            <a:r>
-              <a:rPr sz="1500">
-                <a:solidFill>
-                  <a:srgbClr val="686E75"/>
-                </a:solidFill>
-                <a:latin typeface="Arial"/>
-                <a:ea typeface="Arial"/>
-                <a:cs typeface="Arial"/>
-              </a:rPr>
-              <a:t>Grammar, semantic judgments, inference, classification, coreference, and reading comprehension</a:t>
-            </a:r>
-          </a:p>
-        </p:txBody>
-      </p:sp>
-      <p:sp>
-        <p:nvSpPr>
-          <p:cNvPr id="7" name="矩形 6">
-            <a:extLst>
-              <a:ext uri="{FF2B5EF4-FFF2-40B4-BE49-F238E27FC236}">
-                <a16:creationId xmlns:a16="http://schemas.microsoft.com/office/drawing/2014/main" id="{AC4678A9-EA1B-465C-8CAD-CE7AC135647A}"/>
-              </a:ext>
-            </a:extLst>
-          </p:cNvPr>
-          <p:cNvSpPr>
-            <a:spLocks noGrp="1"/>
-          </p:cNvSpPr>
-          <p:nvPr/>
-        </p:nvSpPr>
-        <p:spPr>
-          <a:xfrm>
-            <a:off x="685800" y="4343400"/>
-            <a:ext cx="2952750" cy="19050"/>
-          </a:xfrm>
-          <a:prstGeom prst="rect">
-            <a:avLst/>
-          </a:prstGeom>
-          <a:solidFill>
-            <a:srgbClr val="D9D7D2"/>
-          </a:solidFill>
-          <a:ln w="0">
-            <a:noFill/>
-            <a:prstDash val="solid"/>
-          </a:ln>
-        </p:spPr>
-      </p:sp>
-      <p:sp>
-        <p:nvSpPr>
-          <p:cNvPr id="8" name="矩形 7">
-            <a:extLst>
-              <a:ext uri="{FF2B5EF4-FFF2-40B4-BE49-F238E27FC236}">
-                <a16:creationId xmlns:a16="http://schemas.microsoft.com/office/drawing/2014/main" id="{9CF8B493-8A10-4448-A3B5-DA6493B69CA1}"/>
-              </a:ext>
-            </a:extLst>
-          </p:cNvPr>
-          <p:cNvSpPr>
-            <a:spLocks noGrp="1"/>
-          </p:cNvSpPr>
-          <p:nvPr/>
-        </p:nvSpPr>
-        <p:spPr>
-          <a:xfrm>
-            <a:off x="685800" y="4552950"/>
-            <a:ext cx="2952750" cy="552450"/>
-          </a:xfrm>
-          <a:prstGeom prst="rect">
-            <a:avLst/>
-          </a:prstGeom>
-          <a:noFill/>
-          <a:ln w="0">
-            <a:noFill/>
-            <a:prstDash val="solid"/>
-          </a:ln>
-        </p:spPr>
-        <p:txBody>
-          <a:bodyPr wrap="square" lIns="0" tIns="0" rIns="0" bIns="0">
-            <a:normAutofit/>
-          </a:bodyPr>
-          <a:lstStyle>
-            <a:defPPr>
-              <a:defRPr sz="1200" b="1">
-                <a:solidFill>
-                  <a:srgbClr val="233342"/>
-                </a:solidFill>
-                <a:latin typeface="Arial"/>
-                <a:ea typeface="Arial"/>
-                <a:cs typeface="Arial"/>
-              </a:defRPr>
-            </a:defPPr>
-            <a:lvl1pPr>
-              <a:defRPr sz="1200" b="1">
-                <a:solidFill>
-                  <a:srgbClr val="233342"/>
-                </a:solidFill>
-                <a:latin typeface="Arial"/>
-                <a:ea typeface="Arial"/>
-                <a:cs typeface="Arial"/>
-              </a:defRPr>
-            </a:lvl1pPr>
-            <a:lvl2pPr>
-              <a:defRPr sz="1200" b="1">
-                <a:solidFill>
-                  <a:srgbClr val="233342"/>
-                </a:solidFill>
-                <a:latin typeface="Arial"/>
-                <a:ea typeface="Arial"/>
-                <a:cs typeface="Arial"/>
-              </a:defRPr>
-            </a:lvl2pPr>
-            <a:lvl3pPr>
-              <a:defRPr sz="1200" b="1">
-                <a:solidFill>
-                  <a:srgbClr val="233342"/>
-                </a:solidFill>
-                <a:latin typeface="Arial"/>
-                <a:ea typeface="Arial"/>
-                <a:cs typeface="Arial"/>
-              </a:defRPr>
-            </a:lvl3pPr>
-            <a:lvl4pPr>
-              <a:defRPr sz="1200" b="1">
-                <a:solidFill>
-                  <a:srgbClr val="233342"/>
-                </a:solidFill>
-                <a:latin typeface="Arial"/>
-                <a:ea typeface="Arial"/>
-                <a:cs typeface="Arial"/>
-              </a:defRPr>
-            </a:lvl4pPr>
-            <a:lvl5pPr>
-              <a:defRPr sz="1200" b="1">
-                <a:solidFill>
-                  <a:srgbClr val="233342"/>
-                </a:solidFill>
-                <a:latin typeface="Arial"/>
-                <a:ea typeface="Arial"/>
-                <a:cs typeface="Arial"/>
-              </a:defRPr>
-            </a:lvl5pPr>
-            <a:lvl6pPr>
-              <a:defRPr sz="1200" b="1">
-                <a:solidFill>
-                  <a:srgbClr val="233342"/>
-                </a:solidFill>
-                <a:latin typeface="Arial"/>
-                <a:ea typeface="Arial"/>
-                <a:cs typeface="Arial"/>
-              </a:defRPr>
-            </a:lvl6pPr>
-            <a:lvl7pPr>
-              <a:defRPr sz="1200" b="1">
-                <a:solidFill>
-                  <a:srgbClr val="233342"/>
-                </a:solidFill>
-                <a:latin typeface="Arial"/>
-                <a:ea typeface="Arial"/>
-                <a:cs typeface="Arial"/>
-              </a:defRPr>
-            </a:lvl7pPr>
-            <a:lvl8pPr>
-              <a:defRPr sz="1200" b="1">
-                <a:solidFill>
-                  <a:srgbClr val="233342"/>
-                </a:solidFill>
-                <a:latin typeface="Arial"/>
-                <a:ea typeface="Arial"/>
-                <a:cs typeface="Arial"/>
-              </a:defRPr>
-            </a:lvl8pPr>
-            <a:lvl9pPr>
-              <a:defRPr sz="1200" b="1">
-                <a:solidFill>
-                  <a:srgbClr val="233342"/>
-                </a:solidFill>
-                <a:latin typeface="Arial"/>
-                <a:ea typeface="Arial"/>
-                <a:cs typeface="Arial"/>
-              </a:defRPr>
-            </a:lvl9pPr>
-          </a:lstStyle>
-          <a:p>
-            <a:pPr>
-              <a:defRPr sz="1200" b="1">
-                <a:solidFill>
-                  <a:srgbClr val="233342"/>
-                </a:solidFill>
-                <a:latin typeface="Arial"/>
-                <a:ea typeface="Arial"/>
-                <a:cs typeface="Arial"/>
-              </a:defRPr>
-            </a:pPr>
-            <a:r>
-              <a:rPr sz="1200" b="1">
-                <a:solidFill>
-                  <a:srgbClr val="233342"/>
-                </a:solidFill>
-                <a:latin typeface="Arial"/>
-                <a:ea typeface="Arial"/>
-                <a:cs typeface="Arial"/>
-              </a:rPr>
-              <a:t>Minimal-pair accuracy + fine-tuned task scores</a:t>
-            </a:r>
-          </a:p>
-        </p:txBody>
-      </p:sp>
-      <p:sp>
-        <p:nvSpPr>
-          <p:cNvPr id="9" name="矩形 8">
-            <a:extLst>
-              <a:ext uri="{FF2B5EF4-FFF2-40B4-BE49-F238E27FC236}">
-                <a16:creationId xmlns:a16="http://schemas.microsoft.com/office/drawing/2014/main" id="{10EF365B-CFFE-4C14-BD8B-B49DF9D48000}"/>
-              </a:ext>
-            </a:extLst>
-          </p:cNvPr>
-          <p:cNvSpPr>
-            <a:spLocks noGrp="1"/>
-          </p:cNvSpPr>
-          <p:nvPr/>
-        </p:nvSpPr>
-        <p:spPr>
-          <a:xfrm>
-            <a:off x="4124325" y="1809750"/>
-            <a:ext cx="19050" cy="3105150"/>
-          </a:xfrm>
-          <a:prstGeom prst="rect">
-            <a:avLst/>
-          </a:prstGeom>
-          <a:solidFill>
-            <a:srgbClr val="D9D7D2"/>
-          </a:solidFill>
-          <a:ln w="0">
-            <a:noFill/>
-            <a:prstDash val="solid"/>
-          </a:ln>
-        </p:spPr>
-      </p:sp>
-      <p:sp>
-        <p:nvSpPr>
-          <p:cNvPr id="10" name="矩形 9">
-            <a:extLst>
-              <a:ext uri="{FF2B5EF4-FFF2-40B4-BE49-F238E27FC236}">
-                <a16:creationId xmlns:a16="http://schemas.microsoft.com/office/drawing/2014/main" id="{3A1B5F54-9DEA-45BB-BBC6-D13CD0B2A6CF}"/>
-              </a:ext>
-            </a:extLst>
-          </p:cNvPr>
-          <p:cNvSpPr>
-            <a:spLocks noGrp="1"/>
-          </p:cNvSpPr>
-          <p:nvPr/>
-        </p:nvSpPr>
-        <p:spPr>
-          <a:xfrm>
-            <a:off x="4362450" y="1695450"/>
-            <a:ext cx="2952750" cy="762000"/>
-          </a:xfrm>
-          <a:prstGeom prst="rect">
-            <a:avLst/>
-          </a:prstGeom>
-          <a:noFill/>
-          <a:ln w="0">
-            <a:noFill/>
-            <a:prstDash val="solid"/>
-          </a:ln>
-        </p:spPr>
-        <p:txBody>
-          <a:bodyPr wrap="square" lIns="0" tIns="0" rIns="0" bIns="0">
-            <a:noAutofit/>
-          </a:bodyPr>
-          <a:lstStyle>
-            <a:defPPr>
-              <a:defRPr sz="4950" b="1">
-                <a:solidFill>
-                  <a:srgbClr val="9E1B32"/>
-                </a:solidFill>
-                <a:latin typeface="Arial"/>
-                <a:ea typeface="Arial"/>
-                <a:cs typeface="Arial"/>
-              </a:defRPr>
-            </a:defPPr>
-            <a:lvl1pPr>
-              <a:defRPr sz="4950" b="1">
-                <a:solidFill>
-                  <a:srgbClr val="9E1B32"/>
-                </a:solidFill>
-                <a:latin typeface="Arial"/>
-                <a:ea typeface="Arial"/>
-                <a:cs typeface="Arial"/>
-              </a:defRPr>
-            </a:lvl1pPr>
-            <a:lvl2pPr>
-              <a:defRPr sz="4950" b="1">
-                <a:solidFill>
-                  <a:srgbClr val="9E1B32"/>
-                </a:solidFill>
-                <a:latin typeface="Arial"/>
-                <a:ea typeface="Arial"/>
-                <a:cs typeface="Arial"/>
-              </a:defRPr>
-            </a:lvl2pPr>
-            <a:lvl3pPr>
-              <a:defRPr sz="4950" b="1">
-                <a:solidFill>
-                  <a:srgbClr val="9E1B32"/>
-                </a:solidFill>
-                <a:latin typeface="Arial"/>
-                <a:ea typeface="Arial"/>
-                <a:cs typeface="Arial"/>
-              </a:defRPr>
-            </a:lvl3pPr>
-            <a:lvl4pPr>
-              <a:defRPr sz="4950" b="1">
-                <a:solidFill>
-                  <a:srgbClr val="9E1B32"/>
-                </a:solidFill>
-                <a:latin typeface="Arial"/>
-                <a:ea typeface="Arial"/>
-                <a:cs typeface="Arial"/>
-              </a:defRPr>
-            </a:lvl4pPr>
-            <a:lvl5pPr>
-              <a:defRPr sz="4950" b="1">
-                <a:solidFill>
-                  <a:srgbClr val="9E1B32"/>
-                </a:solidFill>
-                <a:latin typeface="Arial"/>
-                <a:ea typeface="Arial"/>
-                <a:cs typeface="Arial"/>
-              </a:defRPr>
-            </a:lvl5pPr>
-            <a:lvl6pPr>
-              <a:defRPr sz="4950" b="1">
-                <a:solidFill>
-                  <a:srgbClr val="9E1B32"/>
-                </a:solidFill>
-                <a:latin typeface="Arial"/>
-                <a:ea typeface="Arial"/>
-                <a:cs typeface="Arial"/>
-              </a:defRPr>
-            </a:lvl6pPr>
-            <a:lvl7pPr>
-              <a:defRPr sz="4950" b="1">
-                <a:solidFill>
-                  <a:srgbClr val="9E1B32"/>
-                </a:solidFill>
-                <a:latin typeface="Arial"/>
-                <a:ea typeface="Arial"/>
-                <a:cs typeface="Arial"/>
-              </a:defRPr>
-            </a:lvl7pPr>
-            <a:lvl8pPr>
-              <a:defRPr sz="4950" b="1">
-                <a:solidFill>
-                  <a:srgbClr val="9E1B32"/>
-                </a:solidFill>
-                <a:latin typeface="Arial"/>
-                <a:ea typeface="Arial"/>
-                <a:cs typeface="Arial"/>
-              </a:defRPr>
-            </a:lvl8pPr>
-            <a:lvl9pPr>
-              <a:defRPr sz="4950" b="1">
-                <a:solidFill>
-                  <a:srgbClr val="9E1B32"/>
-                </a:solidFill>
-                <a:latin typeface="Arial"/>
-                <a:ea typeface="Arial"/>
-                <a:cs typeface="Arial"/>
-              </a:defRPr>
-            </a:lvl9pPr>
-          </a:lstStyle>
-          <a:p>
-            <a:pPr>
-              <a:defRPr sz="4950" b="1">
-                <a:solidFill>
-                  <a:srgbClr val="9E1B32"/>
-                </a:solidFill>
-                <a:latin typeface="Arial"/>
-                <a:ea typeface="Arial"/>
-                <a:cs typeface="Arial"/>
-              </a:defRPr>
-            </a:pPr>
-            <a:r>
-              <a:rPr sz="4950" b="1">
-                <a:solidFill>
-                  <a:srgbClr val="9E1B32"/>
-                </a:solidFill>
-                <a:latin typeface="Arial"/>
-                <a:ea typeface="Arial"/>
-                <a:cs typeface="Arial"/>
-              </a:rPr>
-              <a:t>4</a:t>
-            </a:r>
-          </a:p>
-        </p:txBody>
-      </p:sp>
-      <p:sp>
-        <p:nvSpPr>
-          <p:cNvPr id="11" name="矩形 10">
-            <a:extLst>
-              <a:ext uri="{FF2B5EF4-FFF2-40B4-BE49-F238E27FC236}">
-                <a16:creationId xmlns:a16="http://schemas.microsoft.com/office/drawing/2014/main" id="{6DBB9FCE-9A4D-4EED-92AE-45C6843DAB40}"/>
-              </a:ext>
-            </a:extLst>
-          </p:cNvPr>
-          <p:cNvSpPr>
-            <a:spLocks noGrp="1"/>
-          </p:cNvSpPr>
-          <p:nvPr/>
-        </p:nvSpPr>
-        <p:spPr>
-          <a:xfrm>
-            <a:off x="4362450" y="2571750"/>
-            <a:ext cx="3048000" cy="342900"/>
-          </a:xfrm>
-          <a:prstGeom prst="rect">
-            <a:avLst/>
-          </a:prstGeom>
-          <a:noFill/>
-          <a:ln w="0">
-            <a:noFill/>
-            <a:prstDash val="solid"/>
-          </a:ln>
-        </p:spPr>
-        <p:txBody>
-          <a:bodyPr wrap="square" lIns="0" tIns="0" rIns="0" bIns="0">
-            <a:normAutofit/>
-          </a:bodyPr>
-          <a:lstStyle>
-            <a:defPPr>
-              <a:defRPr sz="1725" b="1">
-                <a:solidFill>
-                  <a:srgbClr val="20242A"/>
-                </a:solidFill>
-                <a:latin typeface="Arial"/>
-                <a:ea typeface="Arial"/>
-                <a:cs typeface="Arial"/>
-              </a:defRPr>
-            </a:defPPr>
-            <a:lvl1pPr>
-              <a:defRPr sz="1725" b="1">
-                <a:solidFill>
-                  <a:srgbClr val="20242A"/>
-                </a:solidFill>
-                <a:latin typeface="Arial"/>
-                <a:ea typeface="Arial"/>
-                <a:cs typeface="Arial"/>
-              </a:defRPr>
-            </a:lvl1pPr>
-            <a:lvl2pPr>
-              <a:defRPr sz="1725" b="1">
-                <a:solidFill>
-                  <a:srgbClr val="20242A"/>
-                </a:solidFill>
-                <a:latin typeface="Arial"/>
-                <a:ea typeface="Arial"/>
-                <a:cs typeface="Arial"/>
-              </a:defRPr>
-            </a:lvl2pPr>
-            <a:lvl3pPr>
-              <a:defRPr sz="1725" b="1">
-                <a:solidFill>
-                  <a:srgbClr val="20242A"/>
-                </a:solidFill>
-                <a:latin typeface="Arial"/>
-                <a:ea typeface="Arial"/>
-                <a:cs typeface="Arial"/>
-              </a:defRPr>
-            </a:lvl3pPr>
-            <a:lvl4pPr>
-              <a:defRPr sz="1725" b="1">
-                <a:solidFill>
-                  <a:srgbClr val="20242A"/>
-                </a:solidFill>
-                <a:latin typeface="Arial"/>
-                <a:ea typeface="Arial"/>
-                <a:cs typeface="Arial"/>
-              </a:defRPr>
-            </a:lvl4pPr>
-            <a:lvl5pPr>
-              <a:defRPr sz="1725" b="1">
-                <a:solidFill>
-                  <a:srgbClr val="20242A"/>
-                </a:solidFill>
-                <a:latin typeface="Arial"/>
-                <a:ea typeface="Arial"/>
-                <a:cs typeface="Arial"/>
-              </a:defRPr>
-            </a:lvl5pPr>
-            <a:lvl6pPr>
-              <a:defRPr sz="1725" b="1">
-                <a:solidFill>
-                  <a:srgbClr val="20242A"/>
-                </a:solidFill>
-                <a:latin typeface="Arial"/>
-                <a:ea typeface="Arial"/>
-                <a:cs typeface="Arial"/>
-              </a:defRPr>
-            </a:lvl6pPr>
-            <a:lvl7pPr>
-              <a:defRPr sz="1725" b="1">
-                <a:solidFill>
-                  <a:srgbClr val="20242A"/>
-                </a:solidFill>
-                <a:latin typeface="Arial"/>
-                <a:ea typeface="Arial"/>
-                <a:cs typeface="Arial"/>
-              </a:defRPr>
-            </a:lvl7pPr>
-            <a:lvl8pPr>
-              <a:defRPr sz="1725" b="1">
-                <a:solidFill>
-                  <a:srgbClr val="20242A"/>
-                </a:solidFill>
-                <a:latin typeface="Arial"/>
-                <a:ea typeface="Arial"/>
-                <a:cs typeface="Arial"/>
-              </a:defRPr>
-            </a:lvl8pPr>
-            <a:lvl9pPr>
-              <a:defRPr sz="1725" b="1">
-                <a:solidFill>
-                  <a:srgbClr val="20242A"/>
-                </a:solidFill>
-                <a:latin typeface="Arial"/>
-                <a:ea typeface="Arial"/>
-                <a:cs typeface="Arial"/>
-              </a:defRPr>
-            </a:lvl9pPr>
-          </a:lstStyle>
-          <a:p>
-            <a:pPr>
-              <a:defRPr sz="1725" b="1">
-                <a:solidFill>
-                  <a:srgbClr val="20242A"/>
-                </a:solidFill>
-                <a:latin typeface="Arial"/>
-                <a:ea typeface="Arial"/>
-                <a:cs typeface="Arial"/>
-              </a:defRPr>
-            </a:pPr>
-            <a:r>
-              <a:rPr sz="1725" b="1">
-                <a:solidFill>
-                  <a:srgbClr val="20242A"/>
-                </a:solidFill>
-                <a:latin typeface="Arial"/>
-                <a:ea typeface="Arial"/>
-                <a:cs typeface="Arial"/>
-              </a:rPr>
-              <a:t>HANZI</a:t>
-            </a:r>
-          </a:p>
-        </p:txBody>
-      </p:sp>
-      <p:sp>
-        <p:nvSpPr>
-          <p:cNvPr id="12" name="矩形 11">
-            <a:extLst>
-              <a:ext uri="{FF2B5EF4-FFF2-40B4-BE49-F238E27FC236}">
-                <a16:creationId xmlns:a16="http://schemas.microsoft.com/office/drawing/2014/main" id="{8E4D2411-2A5A-4F2E-BD09-4B8039E2F4B3}"/>
-              </a:ext>
-            </a:extLst>
-          </p:cNvPr>
-          <p:cNvSpPr>
-            <a:spLocks noGrp="1"/>
-          </p:cNvSpPr>
-          <p:nvPr/>
-        </p:nvSpPr>
-        <p:spPr>
-          <a:xfrm>
-            <a:off x="4362450" y="3133725"/>
-            <a:ext cx="2952750" cy="1000125"/>
-          </a:xfrm>
-          <a:prstGeom prst="rect">
-            <a:avLst/>
-          </a:prstGeom>
-          <a:noFill/>
-          <a:ln w="0">
-            <a:noFill/>
-            <a:prstDash val="solid"/>
-          </a:ln>
-        </p:spPr>
-        <p:txBody>
-          <a:bodyPr wrap="square" lIns="0" tIns="0" rIns="0" bIns="0">
-            <a:normAutofit/>
-          </a:bodyPr>
-          <a:lstStyle>
-            <a:defPPr>
-              <a:defRPr sz="1500">
-                <a:solidFill>
-                  <a:srgbClr val="686E75"/>
-                </a:solidFill>
-                <a:latin typeface="Arial"/>
-                <a:ea typeface="Arial"/>
-                <a:cs typeface="Arial"/>
-              </a:defRPr>
-            </a:defPPr>
-            <a:lvl1pPr>
-              <a:defRPr sz="1500">
-                <a:solidFill>
-                  <a:srgbClr val="686E75"/>
-                </a:solidFill>
-                <a:latin typeface="Arial"/>
-                <a:ea typeface="Arial"/>
-                <a:cs typeface="Arial"/>
-              </a:defRPr>
-            </a:lvl1pPr>
-            <a:lvl2pPr>
-              <a:defRPr sz="1500">
-                <a:solidFill>
-                  <a:srgbClr val="686E75"/>
-                </a:solidFill>
-                <a:latin typeface="Arial"/>
-                <a:ea typeface="Arial"/>
-                <a:cs typeface="Arial"/>
-              </a:defRPr>
-            </a:lvl2pPr>
-            <a:lvl3pPr>
-              <a:defRPr sz="1500">
-                <a:solidFill>
-                  <a:srgbClr val="686E75"/>
-                </a:solidFill>
-                <a:latin typeface="Arial"/>
-                <a:ea typeface="Arial"/>
-                <a:cs typeface="Arial"/>
-              </a:defRPr>
-            </a:lvl3pPr>
-            <a:lvl4pPr>
-              <a:defRPr sz="1500">
-                <a:solidFill>
-                  <a:srgbClr val="686E75"/>
-                </a:solidFill>
-                <a:latin typeface="Arial"/>
-                <a:ea typeface="Arial"/>
-                <a:cs typeface="Arial"/>
-              </a:defRPr>
-            </a:lvl4pPr>
-            <a:lvl5pPr>
-              <a:defRPr sz="1500">
-                <a:solidFill>
-                  <a:srgbClr val="686E75"/>
-                </a:solidFill>
-                <a:latin typeface="Arial"/>
-                <a:ea typeface="Arial"/>
-                <a:cs typeface="Arial"/>
-              </a:defRPr>
-            </a:lvl5pPr>
-            <a:lvl6pPr>
-              <a:defRPr sz="1500">
-                <a:solidFill>
-                  <a:srgbClr val="686E75"/>
-                </a:solidFill>
-                <a:latin typeface="Arial"/>
-                <a:ea typeface="Arial"/>
-                <a:cs typeface="Arial"/>
-              </a:defRPr>
-            </a:lvl6pPr>
-            <a:lvl7pPr>
-              <a:defRPr sz="1500">
-                <a:solidFill>
-                  <a:srgbClr val="686E75"/>
-                </a:solidFill>
-                <a:latin typeface="Arial"/>
-                <a:ea typeface="Arial"/>
-                <a:cs typeface="Arial"/>
-              </a:defRPr>
-            </a:lvl7pPr>
-            <a:lvl8pPr>
-              <a:defRPr sz="1500">
-                <a:solidFill>
-                  <a:srgbClr val="686E75"/>
-                </a:solidFill>
-                <a:latin typeface="Arial"/>
-                <a:ea typeface="Arial"/>
-                <a:cs typeface="Arial"/>
-              </a:defRPr>
-            </a:lvl8pPr>
-            <a:lvl9pPr>
-              <a:defRPr sz="1500">
-                <a:solidFill>
-                  <a:srgbClr val="686E75"/>
-                </a:solidFill>
-                <a:latin typeface="Arial"/>
-                <a:ea typeface="Arial"/>
-                <a:cs typeface="Arial"/>
-              </a:defRPr>
-            </a:lvl9pPr>
-          </a:lstStyle>
-          <a:p>
-            <a:pPr>
-              <a:lnSpc>
-                <a:spcPct val="113000"/>
-              </a:lnSpc>
-              <a:buNone/>
-              <a:defRPr sz="1500">
-                <a:solidFill>
-                  <a:srgbClr val="686E75"/>
-                </a:solidFill>
-                <a:latin typeface="Arial"/>
-                <a:ea typeface="Arial"/>
-                <a:cs typeface="Arial"/>
-              </a:defRPr>
-            </a:pPr>
-            <a:r>
-              <a:rPr sz="1500">
-                <a:solidFill>
-                  <a:srgbClr val="686E75"/>
-                </a:solidFill>
-                <a:latin typeface="Arial"/>
-                <a:ea typeface="Arial"/>
-                <a:cs typeface="Arial"/>
-              </a:rPr>
-              <a:t>Character structure and pinyin through zero-shot minimal pairs</a:t>
-            </a:r>
-          </a:p>
-        </p:txBody>
-      </p:sp>
-      <p:sp>
-        <p:nvSpPr>
-          <p:cNvPr id="13" name="矩形 12">
-            <a:extLst>
-              <a:ext uri="{FF2B5EF4-FFF2-40B4-BE49-F238E27FC236}">
-                <a16:creationId xmlns:a16="http://schemas.microsoft.com/office/drawing/2014/main" id="{0ED1CD89-1E9A-4159-A88A-1F1A8714F805}"/>
-              </a:ext>
-            </a:extLst>
-          </p:cNvPr>
-          <p:cNvSpPr>
-            <a:spLocks noGrp="1"/>
-          </p:cNvSpPr>
-          <p:nvPr/>
-        </p:nvSpPr>
-        <p:spPr>
-          <a:xfrm>
-            <a:off x="4362450" y="4343400"/>
-            <a:ext cx="2952750" cy="19050"/>
-          </a:xfrm>
-          <a:prstGeom prst="rect">
-            <a:avLst/>
-          </a:prstGeom>
-          <a:solidFill>
-            <a:srgbClr val="D9D7D2"/>
-          </a:solidFill>
-          <a:ln w="0">
-            <a:noFill/>
-            <a:prstDash val="solid"/>
-          </a:ln>
-        </p:spPr>
-      </p:sp>
-      <p:sp>
-        <p:nvSpPr>
-          <p:cNvPr id="14" name="矩形 13">
-            <a:extLst>
-              <a:ext uri="{FF2B5EF4-FFF2-40B4-BE49-F238E27FC236}">
-                <a16:creationId xmlns:a16="http://schemas.microsoft.com/office/drawing/2014/main" id="{99D70EB1-E879-4419-9005-8FC16453FF3F}"/>
-              </a:ext>
-            </a:extLst>
-          </p:cNvPr>
-          <p:cNvSpPr>
-            <a:spLocks noGrp="1"/>
-          </p:cNvSpPr>
-          <p:nvPr/>
-        </p:nvSpPr>
-        <p:spPr>
-          <a:xfrm>
-            <a:off x="4362450" y="4552950"/>
-            <a:ext cx="2952750" cy="552450"/>
-          </a:xfrm>
-          <a:prstGeom prst="rect">
-            <a:avLst/>
-          </a:prstGeom>
-          <a:noFill/>
-          <a:ln w="0">
-            <a:noFill/>
-            <a:prstDash val="solid"/>
-          </a:ln>
-        </p:spPr>
-        <p:txBody>
-          <a:bodyPr wrap="square" lIns="0" tIns="0" rIns="0" bIns="0">
-            <a:normAutofit/>
-          </a:bodyPr>
-          <a:lstStyle>
-            <a:defPPr>
-              <a:defRPr sz="1200" b="1">
-                <a:solidFill>
-                  <a:srgbClr val="233342"/>
-                </a:solidFill>
-                <a:latin typeface="Arial"/>
-                <a:ea typeface="Arial"/>
-                <a:cs typeface="Arial"/>
-              </a:defRPr>
-            </a:defPPr>
-            <a:lvl1pPr>
-              <a:defRPr sz="1200" b="1">
-                <a:solidFill>
-                  <a:srgbClr val="233342"/>
-                </a:solidFill>
-                <a:latin typeface="Arial"/>
-                <a:ea typeface="Arial"/>
-                <a:cs typeface="Arial"/>
-              </a:defRPr>
-            </a:lvl1pPr>
-            <a:lvl2pPr>
-              <a:defRPr sz="1200" b="1">
-                <a:solidFill>
-                  <a:srgbClr val="233342"/>
-                </a:solidFill>
-                <a:latin typeface="Arial"/>
-                <a:ea typeface="Arial"/>
-                <a:cs typeface="Arial"/>
-              </a:defRPr>
-            </a:lvl2pPr>
-            <a:lvl3pPr>
-              <a:defRPr sz="1200" b="1">
-                <a:solidFill>
-                  <a:srgbClr val="233342"/>
-                </a:solidFill>
-                <a:latin typeface="Arial"/>
-                <a:ea typeface="Arial"/>
-                <a:cs typeface="Arial"/>
-              </a:defRPr>
-            </a:lvl3pPr>
-            <a:lvl4pPr>
-              <a:defRPr sz="1200" b="1">
-                <a:solidFill>
-                  <a:srgbClr val="233342"/>
-                </a:solidFill>
-                <a:latin typeface="Arial"/>
-                <a:ea typeface="Arial"/>
-                <a:cs typeface="Arial"/>
-              </a:defRPr>
-            </a:lvl4pPr>
-            <a:lvl5pPr>
-              <a:defRPr sz="1200" b="1">
-                <a:solidFill>
-                  <a:srgbClr val="233342"/>
-                </a:solidFill>
-                <a:latin typeface="Arial"/>
-                <a:ea typeface="Arial"/>
-                <a:cs typeface="Arial"/>
-              </a:defRPr>
-            </a:lvl5pPr>
-            <a:lvl6pPr>
-              <a:defRPr sz="1200" b="1">
-                <a:solidFill>
-                  <a:srgbClr val="233342"/>
-                </a:solidFill>
-                <a:latin typeface="Arial"/>
-                <a:ea typeface="Arial"/>
-                <a:cs typeface="Arial"/>
-              </a:defRPr>
-            </a:lvl6pPr>
-            <a:lvl7pPr>
-              <a:defRPr sz="1200" b="1">
-                <a:solidFill>
-                  <a:srgbClr val="233342"/>
-                </a:solidFill>
-                <a:latin typeface="Arial"/>
-                <a:ea typeface="Arial"/>
-                <a:cs typeface="Arial"/>
-              </a:defRPr>
-            </a:lvl7pPr>
-            <a:lvl8pPr>
-              <a:defRPr sz="1200" b="1">
-                <a:solidFill>
-                  <a:srgbClr val="233342"/>
-                </a:solidFill>
-                <a:latin typeface="Arial"/>
-                <a:ea typeface="Arial"/>
-                <a:cs typeface="Arial"/>
-              </a:defRPr>
-            </a:lvl8pPr>
-            <a:lvl9pPr>
-              <a:defRPr sz="1200" b="1">
-                <a:solidFill>
-                  <a:srgbClr val="233342"/>
-                </a:solidFill>
-                <a:latin typeface="Arial"/>
-                <a:ea typeface="Arial"/>
-                <a:cs typeface="Arial"/>
-              </a:defRPr>
-            </a:lvl9pPr>
-          </a:lstStyle>
-          <a:p>
-            <a:pPr>
-              <a:defRPr sz="1200" b="1">
-                <a:solidFill>
-                  <a:srgbClr val="233342"/>
-                </a:solidFill>
-                <a:latin typeface="Arial"/>
-                <a:ea typeface="Arial"/>
-                <a:cs typeface="Arial"/>
-              </a:defRPr>
-            </a:pPr>
-            <a:r>
-              <a:rPr sz="1200" b="1">
-                <a:solidFill>
-                  <a:srgbClr val="233342"/>
-                </a:solidFill>
-                <a:latin typeface="Arial"/>
-                <a:ea typeface="Arial"/>
-                <a:cs typeface="Arial"/>
-              </a:rPr>
-              <a:t>Zero-shot minimal-pair accuracy</a:t>
-            </a:r>
-          </a:p>
-        </p:txBody>
-      </p:sp>
-      <p:sp>
-        <p:nvSpPr>
-          <p:cNvPr id="15" name="矩形 14">
-            <a:extLst>
-              <a:ext uri="{FF2B5EF4-FFF2-40B4-BE49-F238E27FC236}">
-                <a16:creationId xmlns:a16="http://schemas.microsoft.com/office/drawing/2014/main" id="{7E69D42E-FCB0-4E63-A65F-14387A15D38F}"/>
-              </a:ext>
-            </a:extLst>
-          </p:cNvPr>
-          <p:cNvSpPr>
-            <a:spLocks noGrp="1"/>
-          </p:cNvSpPr>
-          <p:nvPr/>
-        </p:nvSpPr>
-        <p:spPr>
-          <a:xfrm>
-            <a:off x="7800975" y="1809750"/>
-            <a:ext cx="19050" cy="3105150"/>
-          </a:xfrm>
-          <a:prstGeom prst="rect">
-            <a:avLst/>
-          </a:prstGeom>
-          <a:solidFill>
-            <a:srgbClr val="D9D7D2"/>
-          </a:solidFill>
-          <a:ln w="0">
-            <a:noFill/>
-            <a:prstDash val="solid"/>
-          </a:ln>
-        </p:spPr>
-      </p:sp>
-      <p:sp>
-        <p:nvSpPr>
-          <p:cNvPr id="16" name="矩形 15">
-            <a:extLst>
-              <a:ext uri="{FF2B5EF4-FFF2-40B4-BE49-F238E27FC236}">
-                <a16:creationId xmlns:a16="http://schemas.microsoft.com/office/drawing/2014/main" id="{609D740C-ADC1-4F14-8A44-C5C63A054B76}"/>
-              </a:ext>
-            </a:extLst>
-          </p:cNvPr>
-          <p:cNvSpPr>
-            <a:spLocks noGrp="1"/>
-          </p:cNvSpPr>
-          <p:nvPr/>
-        </p:nvSpPr>
-        <p:spPr>
-          <a:xfrm>
-            <a:off x="8039100" y="1695450"/>
-            <a:ext cx="2952750" cy="762000"/>
-          </a:xfrm>
-          <a:prstGeom prst="rect">
-            <a:avLst/>
-          </a:prstGeom>
-          <a:noFill/>
-          <a:ln w="0">
-            <a:noFill/>
-            <a:prstDash val="solid"/>
-          </a:ln>
-        </p:spPr>
-        <p:txBody>
-          <a:bodyPr wrap="square" lIns="0" tIns="0" rIns="0" bIns="0">
-            <a:noAutofit/>
-          </a:bodyPr>
-          <a:lstStyle>
-            <a:defPPr>
-              <a:defRPr sz="4950" b="1">
-                <a:solidFill>
-                  <a:srgbClr val="9E1B32"/>
-                </a:solidFill>
-                <a:latin typeface="Arial"/>
-                <a:ea typeface="Arial"/>
-                <a:cs typeface="Arial"/>
-              </a:defRPr>
-            </a:defPPr>
-            <a:lvl1pPr>
-              <a:defRPr sz="4950" b="1">
-                <a:solidFill>
-                  <a:srgbClr val="9E1B32"/>
-                </a:solidFill>
-                <a:latin typeface="Arial"/>
-                <a:ea typeface="Arial"/>
-                <a:cs typeface="Arial"/>
-              </a:defRPr>
-            </a:lvl1pPr>
-            <a:lvl2pPr>
-              <a:defRPr sz="4950" b="1">
-                <a:solidFill>
-                  <a:srgbClr val="9E1B32"/>
-                </a:solidFill>
-                <a:latin typeface="Arial"/>
-                <a:ea typeface="Arial"/>
-                <a:cs typeface="Arial"/>
-              </a:defRPr>
-            </a:lvl2pPr>
-            <a:lvl3pPr>
-              <a:defRPr sz="4950" b="1">
-                <a:solidFill>
-                  <a:srgbClr val="9E1B32"/>
-                </a:solidFill>
-                <a:latin typeface="Arial"/>
-                <a:ea typeface="Arial"/>
-                <a:cs typeface="Arial"/>
-              </a:defRPr>
-            </a:lvl3pPr>
-            <a:lvl4pPr>
-              <a:defRPr sz="4950" b="1">
-                <a:solidFill>
-                  <a:srgbClr val="9E1B32"/>
-                </a:solidFill>
-                <a:latin typeface="Arial"/>
-                <a:ea typeface="Arial"/>
-                <a:cs typeface="Arial"/>
-              </a:defRPr>
-            </a:lvl4pPr>
-            <a:lvl5pPr>
-              <a:defRPr sz="4950" b="1">
-                <a:solidFill>
-                  <a:srgbClr val="9E1B32"/>
-                </a:solidFill>
-                <a:latin typeface="Arial"/>
-                <a:ea typeface="Arial"/>
-                <a:cs typeface="Arial"/>
-              </a:defRPr>
-            </a:lvl5pPr>
-            <a:lvl6pPr>
-              <a:defRPr sz="4950" b="1">
-                <a:solidFill>
-                  <a:srgbClr val="9E1B32"/>
-                </a:solidFill>
-                <a:latin typeface="Arial"/>
-                <a:ea typeface="Arial"/>
-                <a:cs typeface="Arial"/>
-              </a:defRPr>
-            </a:lvl6pPr>
-            <a:lvl7pPr>
-              <a:defRPr sz="4950" b="1">
-                <a:solidFill>
-                  <a:srgbClr val="9E1B32"/>
-                </a:solidFill>
-                <a:latin typeface="Arial"/>
-                <a:ea typeface="Arial"/>
-                <a:cs typeface="Arial"/>
-              </a:defRPr>
-            </a:lvl7pPr>
-            <a:lvl8pPr>
-              <a:defRPr sz="4950" b="1">
-                <a:solidFill>
-                  <a:srgbClr val="9E1B32"/>
-                </a:solidFill>
-                <a:latin typeface="Arial"/>
-                <a:ea typeface="Arial"/>
-                <a:cs typeface="Arial"/>
-              </a:defRPr>
-            </a:lvl8pPr>
-            <a:lvl9pPr>
-              <a:defRPr sz="4950" b="1">
-                <a:solidFill>
-                  <a:srgbClr val="9E1B32"/>
-                </a:solidFill>
-                <a:latin typeface="Arial"/>
-                <a:ea typeface="Arial"/>
-                <a:cs typeface="Arial"/>
-              </a:defRPr>
-            </a:lvl9pPr>
-          </a:lstStyle>
-          <a:p>
-            <a:pPr>
-              <a:defRPr sz="4950" b="1">
-                <a:solidFill>
-                  <a:srgbClr val="9E1B32"/>
-                </a:solidFill>
-                <a:latin typeface="Arial"/>
-                <a:ea typeface="Arial"/>
-                <a:cs typeface="Arial"/>
-              </a:defRPr>
-            </a:pPr>
-            <a:r>
-              <a:rPr sz="4950" b="1">
-                <a:solidFill>
-                  <a:srgbClr val="9E1B32"/>
-                </a:solidFill>
-                <a:latin typeface="Arial"/>
-                <a:ea typeface="Arial"/>
-                <a:cs typeface="Arial"/>
-              </a:rPr>
-              <a:t>2</a:t>
-            </a:r>
-          </a:p>
-        </p:txBody>
-      </p:sp>
-      <p:sp>
-        <p:nvSpPr>
-          <p:cNvPr id="17" name="矩形 16">
-            <a:extLst>
-              <a:ext uri="{FF2B5EF4-FFF2-40B4-BE49-F238E27FC236}">
-                <a16:creationId xmlns:a16="http://schemas.microsoft.com/office/drawing/2014/main" id="{8F35418C-2353-4F63-8FD3-B2F2111F4F7E}"/>
-              </a:ext>
-            </a:extLst>
-          </p:cNvPr>
-          <p:cNvSpPr>
-            <a:spLocks noGrp="1"/>
-          </p:cNvSpPr>
-          <p:nvPr/>
-        </p:nvSpPr>
-        <p:spPr>
-          <a:xfrm>
-            <a:off x="8039100" y="2571750"/>
-            <a:ext cx="3048000" cy="342900"/>
-          </a:xfrm>
-          <a:prstGeom prst="rect">
-            <a:avLst/>
-          </a:prstGeom>
-          <a:noFill/>
-          <a:ln w="0">
-            <a:noFill/>
-            <a:prstDash val="solid"/>
-          </a:ln>
-        </p:spPr>
-        <p:txBody>
-          <a:bodyPr wrap="square" lIns="0" tIns="0" rIns="0" bIns="0">
-            <a:normAutofit/>
-          </a:bodyPr>
-          <a:lstStyle>
-            <a:defPPr>
-              <a:defRPr sz="1725" b="1">
-                <a:solidFill>
-                  <a:srgbClr val="20242A"/>
-                </a:solidFill>
-                <a:latin typeface="Arial"/>
-                <a:ea typeface="Arial"/>
-                <a:cs typeface="Arial"/>
-              </a:defRPr>
-            </a:defPPr>
-            <a:lvl1pPr>
-              <a:defRPr sz="1725" b="1">
-                <a:solidFill>
-                  <a:srgbClr val="20242A"/>
-                </a:solidFill>
-                <a:latin typeface="Arial"/>
-                <a:ea typeface="Arial"/>
-                <a:cs typeface="Arial"/>
-              </a:defRPr>
-            </a:lvl1pPr>
-            <a:lvl2pPr>
-              <a:defRPr sz="1725" b="1">
-                <a:solidFill>
-                  <a:srgbClr val="20242A"/>
-                </a:solidFill>
-                <a:latin typeface="Arial"/>
-                <a:ea typeface="Arial"/>
-                <a:cs typeface="Arial"/>
-              </a:defRPr>
-            </a:lvl2pPr>
-            <a:lvl3pPr>
-              <a:defRPr sz="1725" b="1">
-                <a:solidFill>
-                  <a:srgbClr val="20242A"/>
-                </a:solidFill>
-                <a:latin typeface="Arial"/>
-                <a:ea typeface="Arial"/>
-                <a:cs typeface="Arial"/>
-              </a:defRPr>
-            </a:lvl3pPr>
-            <a:lvl4pPr>
-              <a:defRPr sz="1725" b="1">
-                <a:solidFill>
-                  <a:srgbClr val="20242A"/>
-                </a:solidFill>
-                <a:latin typeface="Arial"/>
-                <a:ea typeface="Arial"/>
-                <a:cs typeface="Arial"/>
-              </a:defRPr>
-            </a:lvl4pPr>
-            <a:lvl5pPr>
-              <a:defRPr sz="1725" b="1">
-                <a:solidFill>
-                  <a:srgbClr val="20242A"/>
-                </a:solidFill>
-                <a:latin typeface="Arial"/>
-                <a:ea typeface="Arial"/>
-                <a:cs typeface="Arial"/>
-              </a:defRPr>
-            </a:lvl5pPr>
-            <a:lvl6pPr>
-              <a:defRPr sz="1725" b="1">
-                <a:solidFill>
-                  <a:srgbClr val="20242A"/>
-                </a:solidFill>
-                <a:latin typeface="Arial"/>
-                <a:ea typeface="Arial"/>
-                <a:cs typeface="Arial"/>
-              </a:defRPr>
-            </a:lvl6pPr>
-            <a:lvl7pPr>
-              <a:defRPr sz="1725" b="1">
-                <a:solidFill>
-                  <a:srgbClr val="20242A"/>
-                </a:solidFill>
-                <a:latin typeface="Arial"/>
-                <a:ea typeface="Arial"/>
-                <a:cs typeface="Arial"/>
-              </a:defRPr>
-            </a:lvl7pPr>
-            <a:lvl8pPr>
-              <a:defRPr sz="1725" b="1">
-                <a:solidFill>
-                  <a:srgbClr val="20242A"/>
-                </a:solidFill>
-                <a:latin typeface="Arial"/>
-                <a:ea typeface="Arial"/>
-                <a:cs typeface="Arial"/>
-              </a:defRPr>
-            </a:lvl8pPr>
-            <a:lvl9pPr>
-              <a:defRPr sz="1725" b="1">
-                <a:solidFill>
-                  <a:srgbClr val="20242A"/>
-                </a:solidFill>
-                <a:latin typeface="Arial"/>
-                <a:ea typeface="Arial"/>
-                <a:cs typeface="Arial"/>
-              </a:defRPr>
-            </a:lvl9pPr>
-          </a:lstStyle>
-          <a:p>
-            <a:pPr>
-              <a:defRPr sz="1725" b="1">
-                <a:solidFill>
-                  <a:srgbClr val="20242A"/>
-                </a:solidFill>
-                <a:latin typeface="Arial"/>
-                <a:ea typeface="Arial"/>
-                <a:cs typeface="Arial"/>
-              </a:defRPr>
-            </a:pPr>
-            <a:r>
-              <a:rPr sz="1725" b="1">
-                <a:solidFill>
-                  <a:srgbClr val="20242A"/>
-                </a:solidFill>
-                <a:latin typeface="Arial"/>
-                <a:ea typeface="Arial"/>
-                <a:cs typeface="Arial"/>
-              </a:rPr>
-              <a:t>COGNITIVE MODELING</a:t>
-            </a:r>
-          </a:p>
-        </p:txBody>
-      </p:sp>
-      <p:sp>
-        <p:nvSpPr>
-          <p:cNvPr id="18" name="矩形 17">
-            <a:extLst>
-              <a:ext uri="{FF2B5EF4-FFF2-40B4-BE49-F238E27FC236}">
-                <a16:creationId xmlns:a16="http://schemas.microsoft.com/office/drawing/2014/main" id="{582D4A88-07B5-41C3-9014-833107794ECD}"/>
-              </a:ext>
-            </a:extLst>
-          </p:cNvPr>
-          <p:cNvSpPr>
-            <a:spLocks noGrp="1"/>
-          </p:cNvSpPr>
-          <p:nvPr/>
-        </p:nvSpPr>
-        <p:spPr>
-          <a:xfrm>
-            <a:off x="8039100" y="3133725"/>
-            <a:ext cx="2952750" cy="1000125"/>
-          </a:xfrm>
-          <a:prstGeom prst="rect">
-            <a:avLst/>
-          </a:prstGeom>
-          <a:noFill/>
-          <a:ln w="0">
-            <a:noFill/>
-            <a:prstDash val="solid"/>
-          </a:ln>
-        </p:spPr>
-        <p:txBody>
-          <a:bodyPr wrap="square" lIns="0" tIns="0" rIns="0" bIns="0">
-            <a:normAutofit/>
-          </a:bodyPr>
-          <a:lstStyle>
-            <a:defPPr>
-              <a:defRPr sz="1500">
-                <a:solidFill>
-                  <a:srgbClr val="686E75"/>
-                </a:solidFill>
-                <a:latin typeface="Arial"/>
-                <a:ea typeface="Arial"/>
-                <a:cs typeface="Arial"/>
-              </a:defRPr>
-            </a:defPPr>
-            <a:lvl1pPr>
-              <a:defRPr sz="1500">
-                <a:solidFill>
-                  <a:srgbClr val="686E75"/>
-                </a:solidFill>
-                <a:latin typeface="Arial"/>
-                <a:ea typeface="Arial"/>
-                <a:cs typeface="Arial"/>
-              </a:defRPr>
-            </a:lvl1pPr>
-            <a:lvl2pPr>
-              <a:defRPr sz="1500">
-                <a:solidFill>
-                  <a:srgbClr val="686E75"/>
-                </a:solidFill>
-                <a:latin typeface="Arial"/>
-                <a:ea typeface="Arial"/>
-                <a:cs typeface="Arial"/>
-              </a:defRPr>
-            </a:lvl2pPr>
-            <a:lvl3pPr>
-              <a:defRPr sz="1500">
-                <a:solidFill>
-                  <a:srgbClr val="686E75"/>
-                </a:solidFill>
-                <a:latin typeface="Arial"/>
-                <a:ea typeface="Arial"/>
-                <a:cs typeface="Arial"/>
-              </a:defRPr>
-            </a:lvl3pPr>
-            <a:lvl4pPr>
-              <a:defRPr sz="1500">
-                <a:solidFill>
-                  <a:srgbClr val="686E75"/>
-                </a:solidFill>
-                <a:latin typeface="Arial"/>
-                <a:ea typeface="Arial"/>
-                <a:cs typeface="Arial"/>
-              </a:defRPr>
-            </a:lvl4pPr>
-            <a:lvl5pPr>
-              <a:defRPr sz="1500">
-                <a:solidFill>
-                  <a:srgbClr val="686E75"/>
-                </a:solidFill>
-                <a:latin typeface="Arial"/>
-                <a:ea typeface="Arial"/>
-                <a:cs typeface="Arial"/>
-              </a:defRPr>
-            </a:lvl5pPr>
-            <a:lvl6pPr>
-              <a:defRPr sz="1500">
-                <a:solidFill>
-                  <a:srgbClr val="686E75"/>
-                </a:solidFill>
-                <a:latin typeface="Arial"/>
-                <a:ea typeface="Arial"/>
-                <a:cs typeface="Arial"/>
-              </a:defRPr>
-            </a:lvl6pPr>
-            <a:lvl7pPr>
-              <a:defRPr sz="1500">
-                <a:solidFill>
-                  <a:srgbClr val="686E75"/>
-                </a:solidFill>
-                <a:latin typeface="Arial"/>
-                <a:ea typeface="Arial"/>
-                <a:cs typeface="Arial"/>
-              </a:defRPr>
-            </a:lvl7pPr>
-            <a:lvl8pPr>
-              <a:defRPr sz="1500">
-                <a:solidFill>
-                  <a:srgbClr val="686E75"/>
-                </a:solidFill>
-                <a:latin typeface="Arial"/>
-                <a:ea typeface="Arial"/>
-                <a:cs typeface="Arial"/>
-              </a:defRPr>
-            </a:lvl8pPr>
-            <a:lvl9pPr>
-              <a:defRPr sz="1500">
-                <a:solidFill>
-                  <a:srgbClr val="686E75"/>
-                </a:solidFill>
-                <a:latin typeface="Arial"/>
-                <a:ea typeface="Arial"/>
-                <a:cs typeface="Arial"/>
-              </a:defRPr>
-            </a:lvl9pPr>
-          </a:lstStyle>
-          <a:p>
-            <a:pPr>
-              <a:lnSpc>
-                <a:spcPct val="113000"/>
-              </a:lnSpc>
-              <a:buNone/>
-              <a:defRPr sz="1500">
-                <a:solidFill>
-                  <a:srgbClr val="686E75"/>
-                </a:solidFill>
-                <a:latin typeface="Arial"/>
-                <a:ea typeface="Arial"/>
-                <a:cs typeface="Arial"/>
-              </a:defRPr>
-            </a:pPr>
-            <a:r>
-              <a:rPr sz="1500">
-                <a:solidFill>
-                  <a:srgbClr val="686E75"/>
-                </a:solidFill>
-                <a:latin typeface="Arial"/>
-                <a:ea typeface="Arial"/>
-                <a:cs typeface="Arial"/>
-              </a:rPr>
-              <a:t>Word- and discourse-level alignment with human fMRI responses</a:t>
-            </a:r>
-          </a:p>
-        </p:txBody>
-      </p:sp>
-      <p:sp>
-        <p:nvSpPr>
-          <p:cNvPr id="19" name="矩形 18">
-            <a:extLst>
-              <a:ext uri="{FF2B5EF4-FFF2-40B4-BE49-F238E27FC236}">
-                <a16:creationId xmlns:a16="http://schemas.microsoft.com/office/drawing/2014/main" id="{DBD03E9C-CA00-4CF3-B503-4B47624B91F4}"/>
-              </a:ext>
-            </a:extLst>
-          </p:cNvPr>
-          <p:cNvSpPr>
-            <a:spLocks noGrp="1"/>
-          </p:cNvSpPr>
-          <p:nvPr/>
-        </p:nvSpPr>
-        <p:spPr>
-          <a:xfrm>
-            <a:off x="8039100" y="4343400"/>
-            <a:ext cx="2952750" cy="19050"/>
-          </a:xfrm>
-          <a:prstGeom prst="rect">
-            <a:avLst/>
-          </a:prstGeom>
-          <a:solidFill>
-            <a:srgbClr val="D9D7D2"/>
-          </a:solidFill>
-          <a:ln w="0">
-            <a:noFill/>
-            <a:prstDash val="solid"/>
-          </a:ln>
-        </p:spPr>
-      </p:sp>
-      <p:sp>
-        <p:nvSpPr>
-          <p:cNvPr id="20" name="矩形 19">
-            <a:extLst>
-              <a:ext uri="{FF2B5EF4-FFF2-40B4-BE49-F238E27FC236}">
-                <a16:creationId xmlns:a16="http://schemas.microsoft.com/office/drawing/2014/main" id="{C98D12A5-3435-438E-86FD-75D7F9CDFCC7}"/>
-              </a:ext>
-            </a:extLst>
-          </p:cNvPr>
-          <p:cNvSpPr>
-            <a:spLocks noGrp="1"/>
-          </p:cNvSpPr>
-          <p:nvPr/>
-        </p:nvSpPr>
-        <p:spPr>
-          <a:xfrm>
-            <a:off x="8039100" y="4552950"/>
-            <a:ext cx="2952750" cy="552450"/>
-          </a:xfrm>
-          <a:prstGeom prst="rect">
-            <a:avLst/>
-          </a:prstGeom>
-          <a:noFill/>
-          <a:ln w="0">
-            <a:noFill/>
-            <a:prstDash val="solid"/>
-          </a:ln>
-        </p:spPr>
-        <p:txBody>
-          <a:bodyPr wrap="square" lIns="0" tIns="0" rIns="0" bIns="0">
-            <a:normAutofit/>
-          </a:bodyPr>
-          <a:lstStyle>
-            <a:defPPr>
-              <a:defRPr sz="1200" b="1">
-                <a:solidFill>
-                  <a:srgbClr val="233342"/>
-                </a:solidFill>
-                <a:latin typeface="Arial"/>
-                <a:ea typeface="Arial"/>
-                <a:cs typeface="Arial"/>
-              </a:defRPr>
-            </a:defPPr>
-            <a:lvl1pPr>
-              <a:defRPr sz="1200" b="1">
-                <a:solidFill>
-                  <a:srgbClr val="233342"/>
-                </a:solidFill>
-                <a:latin typeface="Arial"/>
-                <a:ea typeface="Arial"/>
-                <a:cs typeface="Arial"/>
-              </a:defRPr>
-            </a:lvl1pPr>
-            <a:lvl2pPr>
-              <a:defRPr sz="1200" b="1">
-                <a:solidFill>
-                  <a:srgbClr val="233342"/>
-                </a:solidFill>
-                <a:latin typeface="Arial"/>
-                <a:ea typeface="Arial"/>
-                <a:cs typeface="Arial"/>
-              </a:defRPr>
-            </a:lvl2pPr>
-            <a:lvl3pPr>
-              <a:defRPr sz="1200" b="1">
-                <a:solidFill>
-                  <a:srgbClr val="233342"/>
-                </a:solidFill>
-                <a:latin typeface="Arial"/>
-                <a:ea typeface="Arial"/>
-                <a:cs typeface="Arial"/>
-              </a:defRPr>
-            </a:lvl3pPr>
-            <a:lvl4pPr>
-              <a:defRPr sz="1200" b="1">
-                <a:solidFill>
-                  <a:srgbClr val="233342"/>
-                </a:solidFill>
-                <a:latin typeface="Arial"/>
-                <a:ea typeface="Arial"/>
-                <a:cs typeface="Arial"/>
-              </a:defRPr>
-            </a:lvl4pPr>
-            <a:lvl5pPr>
-              <a:defRPr sz="1200" b="1">
-                <a:solidFill>
-                  <a:srgbClr val="233342"/>
-                </a:solidFill>
-                <a:latin typeface="Arial"/>
-                <a:ea typeface="Arial"/>
-                <a:cs typeface="Arial"/>
-              </a:defRPr>
-            </a:lvl5pPr>
-            <a:lvl6pPr>
-              <a:defRPr sz="1200" b="1">
-                <a:solidFill>
-                  <a:srgbClr val="233342"/>
-                </a:solidFill>
-                <a:latin typeface="Arial"/>
-                <a:ea typeface="Arial"/>
-                <a:cs typeface="Arial"/>
-              </a:defRPr>
-            </a:lvl6pPr>
-            <a:lvl7pPr>
-              <a:defRPr sz="1200" b="1">
-                <a:solidFill>
-                  <a:srgbClr val="233342"/>
-                </a:solidFill>
-                <a:latin typeface="Arial"/>
-                <a:ea typeface="Arial"/>
-                <a:cs typeface="Arial"/>
-              </a:defRPr>
-            </a:lvl7pPr>
-            <a:lvl8pPr>
-              <a:defRPr sz="1200" b="1">
-                <a:solidFill>
-                  <a:srgbClr val="233342"/>
-                </a:solidFill>
-                <a:latin typeface="Arial"/>
-                <a:ea typeface="Arial"/>
-                <a:cs typeface="Arial"/>
-              </a:defRPr>
-            </a:lvl8pPr>
-            <a:lvl9pPr>
-              <a:defRPr sz="1200" b="1">
-                <a:solidFill>
-                  <a:srgbClr val="233342"/>
-                </a:solidFill>
-                <a:latin typeface="Arial"/>
-                <a:ea typeface="Arial"/>
-                <a:cs typeface="Arial"/>
-              </a:defRPr>
-            </a:lvl9pPr>
-          </a:lstStyle>
-          <a:p>
-            <a:pPr>
-              <a:defRPr sz="1200" b="1">
-                <a:solidFill>
-                  <a:srgbClr val="233342"/>
-                </a:solidFill>
-                <a:latin typeface="Arial"/>
-                <a:ea typeface="Arial"/>
-                <a:cs typeface="Arial"/>
-              </a:defRPr>
-            </a:pPr>
-            <a:r>
-              <a:rPr sz="1200" b="1">
-                <a:solidFill>
-                  <a:srgbClr val="233342"/>
-                </a:solidFill>
-                <a:latin typeface="Arial"/>
-                <a:ea typeface="Arial"/>
-                <a:cs typeface="Arial"/>
-              </a:rPr>
-              <a:t>Correlation-based encoding scores</a:t>
-            </a:r>
-          </a:p>
-        </p:txBody>
-      </p:sp>
-      <p:sp>
-        <p:nvSpPr>
-          <p:cNvPr id="21" name="evaluation-protocol-strip">
-            <a:extLst>
-              <a:ext uri="{FF2B5EF4-FFF2-40B4-BE49-F238E27FC236}">
-                <a16:creationId xmlns:a16="http://schemas.microsoft.com/office/drawing/2014/main" id="{A5914E90-046D-4C09-9EBF-E0D49ED63D23}"/>
-              </a:ext>
-            </a:extLst>
-          </p:cNvPr>
-          <p:cNvSpPr>
-            <a:spLocks noGrp="1"/>
-          </p:cNvSpPr>
-          <p:nvPr/>
-        </p:nvSpPr>
-        <p:spPr>
-          <a:xfrm>
-            <a:off x="685800" y="5457825"/>
-            <a:ext cx="10820400" cy="685800"/>
-          </a:xfrm>
-          <a:prstGeom prst="rect">
-            <a:avLst/>
-          </a:prstGeom>
-          <a:solidFill>
-            <a:srgbClr val="F4F3F0"/>
-          </a:solidFill>
-          <a:ln w="0">
-            <a:noFill/>
-            <a:prstDash val="solid"/>
-          </a:ln>
-        </p:spPr>
-      </p:sp>
-      <p:sp>
-        <p:nvSpPr>
-          <p:cNvPr id="22" name="矩形 21">
-            <a:extLst>
-              <a:ext uri="{FF2B5EF4-FFF2-40B4-BE49-F238E27FC236}">
-                <a16:creationId xmlns:a16="http://schemas.microsoft.com/office/drawing/2014/main" id="{070AAE15-DD66-40B3-80EF-AE4BA47F5D4D}"/>
-              </a:ext>
-            </a:extLst>
-          </p:cNvPr>
-          <p:cNvSpPr>
-            <a:spLocks noGrp="1"/>
-          </p:cNvSpPr>
-          <p:nvPr/>
-        </p:nvSpPr>
-        <p:spPr>
-          <a:xfrm>
-            <a:off x="971550" y="5619750"/>
-            <a:ext cx="3905250" cy="285750"/>
-          </a:xfrm>
-          <a:prstGeom prst="rect">
-            <a:avLst/>
-          </a:prstGeom>
-          <a:noFill/>
-          <a:ln w="0">
-            <a:noFill/>
-            <a:prstDash val="solid"/>
-          </a:ln>
-        </p:spPr>
-        <p:txBody>
-          <a:bodyPr wrap="square" lIns="0" tIns="0" rIns="0" bIns="0">
-            <a:noAutofit/>
-          </a:bodyPr>
-          <a:lstStyle>
-            <a:defPPr algn="ctr">
-              <a:defRPr sz="1425" b="1">
-                <a:solidFill>
-                  <a:srgbClr val="233342"/>
-                </a:solidFill>
-                <a:latin typeface="Arial"/>
-                <a:ea typeface="Arial"/>
-                <a:cs typeface="Arial"/>
-              </a:defRPr>
-            </a:defPPr>
-            <a:lvl1pPr algn="ctr">
-              <a:defRPr sz="1425" b="1">
-                <a:solidFill>
-                  <a:srgbClr val="233342"/>
-                </a:solidFill>
-                <a:latin typeface="Arial"/>
-                <a:ea typeface="Arial"/>
-                <a:cs typeface="Arial"/>
-              </a:defRPr>
-            </a:lvl1pPr>
-            <a:lvl2pPr algn="ctr">
-              <a:defRPr sz="1425" b="1">
-                <a:solidFill>
-                  <a:srgbClr val="233342"/>
-                </a:solidFill>
-                <a:latin typeface="Arial"/>
-                <a:ea typeface="Arial"/>
-                <a:cs typeface="Arial"/>
-              </a:defRPr>
-            </a:lvl2pPr>
-            <a:lvl3pPr algn="ctr">
-              <a:defRPr sz="1425" b="1">
-                <a:solidFill>
-                  <a:srgbClr val="233342"/>
-                </a:solidFill>
-                <a:latin typeface="Arial"/>
-                <a:ea typeface="Arial"/>
-                <a:cs typeface="Arial"/>
-              </a:defRPr>
-            </a:lvl3pPr>
-            <a:lvl4pPr algn="ctr">
-              <a:defRPr sz="1425" b="1">
-                <a:solidFill>
-                  <a:srgbClr val="233342"/>
-                </a:solidFill>
-                <a:latin typeface="Arial"/>
-                <a:ea typeface="Arial"/>
-                <a:cs typeface="Arial"/>
-              </a:defRPr>
-            </a:lvl4pPr>
-            <a:lvl5pPr algn="ctr">
-              <a:defRPr sz="1425" b="1">
-                <a:solidFill>
-                  <a:srgbClr val="233342"/>
-                </a:solidFill>
-                <a:latin typeface="Arial"/>
-                <a:ea typeface="Arial"/>
-                <a:cs typeface="Arial"/>
-              </a:defRPr>
-            </a:lvl5pPr>
-            <a:lvl6pPr algn="ctr">
-              <a:defRPr sz="1425" b="1">
-                <a:solidFill>
-                  <a:srgbClr val="233342"/>
-                </a:solidFill>
-                <a:latin typeface="Arial"/>
-                <a:ea typeface="Arial"/>
-                <a:cs typeface="Arial"/>
-              </a:defRPr>
-            </a:lvl6pPr>
-            <a:lvl7pPr algn="ctr">
-              <a:defRPr sz="1425" b="1">
-                <a:solidFill>
-                  <a:srgbClr val="233342"/>
-                </a:solidFill>
-                <a:latin typeface="Arial"/>
-                <a:ea typeface="Arial"/>
-                <a:cs typeface="Arial"/>
-              </a:defRPr>
-            </a:lvl7pPr>
-            <a:lvl8pPr algn="ctr">
-              <a:defRPr sz="1425" b="1">
-                <a:solidFill>
-                  <a:srgbClr val="233342"/>
-                </a:solidFill>
-                <a:latin typeface="Arial"/>
-                <a:ea typeface="Arial"/>
-                <a:cs typeface="Arial"/>
-              </a:defRPr>
-            </a:lvl8pPr>
-            <a:lvl9pPr algn="ctr">
-              <a:defRPr sz="1425" b="1">
-                <a:solidFill>
-                  <a:srgbClr val="233342"/>
-                </a:solidFill>
-                <a:latin typeface="Arial"/>
-                <a:ea typeface="Arial"/>
-                <a:cs typeface="Arial"/>
-              </a:defRPr>
-            </a:lvl9pPr>
-          </a:lstStyle>
-          <a:p>
-            <a:pPr algn="ctr">
-              <a:defRPr sz="1425" b="1">
-                <a:solidFill>
-                  <a:srgbClr val="233342"/>
-                </a:solidFill>
-                <a:latin typeface="Arial"/>
-                <a:ea typeface="Arial"/>
-                <a:cs typeface="Arial"/>
-              </a:defRPr>
-            </a:pPr>
-            <a:r>
-              <a:rPr sz="1425" b="1">
-                <a:solidFill>
-                  <a:srgbClr val="233342"/>
-                </a:solidFill>
-                <a:latin typeface="Arial"/>
-                <a:ea typeface="Arial"/>
-                <a:cs typeface="Arial"/>
-              </a:rPr>
-              <a:t>OPEN DEVELOPMENT TASKS</a:t>
-            </a:r>
-          </a:p>
-        </p:txBody>
-      </p:sp>
-      <p:sp>
-        <p:nvSpPr>
-          <p:cNvPr id="23" name="矩形 22">
-            <a:extLst>
-              <a:ext uri="{FF2B5EF4-FFF2-40B4-BE49-F238E27FC236}">
-                <a16:creationId xmlns:a16="http://schemas.microsoft.com/office/drawing/2014/main" id="{E5D9209D-0A84-43EA-8515-97E3B11FFFF5}"/>
-              </a:ext>
-            </a:extLst>
-          </p:cNvPr>
-          <p:cNvSpPr>
-            <a:spLocks noGrp="1"/>
-          </p:cNvSpPr>
-          <p:nvPr/>
-        </p:nvSpPr>
-        <p:spPr>
-          <a:xfrm>
-            <a:off x="5810250" y="5619750"/>
-            <a:ext cx="571500" cy="285750"/>
-          </a:xfrm>
-          <a:prstGeom prst="rect">
-            <a:avLst/>
-          </a:prstGeom>
-          <a:noFill/>
-          <a:ln w="0">
-            <a:noFill/>
-            <a:prstDash val="solid"/>
-          </a:ln>
-        </p:spPr>
-        <p:txBody>
-          <a:bodyPr wrap="square" lIns="0" tIns="0" rIns="0" bIns="0">
-            <a:noAutofit/>
-          </a:bodyPr>
-          <a:lstStyle>
-            <a:defPPr algn="ctr">
-              <a:defRPr sz="1800" b="1">
-                <a:solidFill>
-                  <a:srgbClr val="C49A2C"/>
-                </a:solidFill>
-                <a:latin typeface="Arial"/>
-                <a:ea typeface="Arial"/>
-                <a:cs typeface="Arial"/>
-              </a:defRPr>
-            </a:defPPr>
-            <a:lvl1pPr algn="ctr">
-              <a:defRPr sz="1800" b="1">
-                <a:solidFill>
-                  <a:srgbClr val="C49A2C"/>
-                </a:solidFill>
-                <a:latin typeface="Arial"/>
-                <a:ea typeface="Arial"/>
-                <a:cs typeface="Arial"/>
-              </a:defRPr>
-            </a:lvl1pPr>
-            <a:lvl2pPr algn="ctr">
-              <a:defRPr sz="1800" b="1">
-                <a:solidFill>
-                  <a:srgbClr val="C49A2C"/>
-                </a:solidFill>
-                <a:latin typeface="Arial"/>
-                <a:ea typeface="Arial"/>
-                <a:cs typeface="Arial"/>
-              </a:defRPr>
-            </a:lvl2pPr>
-            <a:lvl3pPr algn="ctr">
-              <a:defRPr sz="1800" b="1">
-                <a:solidFill>
-                  <a:srgbClr val="C49A2C"/>
-                </a:solidFill>
-                <a:latin typeface="Arial"/>
-                <a:ea typeface="Arial"/>
-                <a:cs typeface="Arial"/>
-              </a:defRPr>
-            </a:lvl3pPr>
-            <a:lvl4pPr algn="ctr">
-              <a:defRPr sz="1800" b="1">
-                <a:solidFill>
-                  <a:srgbClr val="C49A2C"/>
-                </a:solidFill>
-                <a:latin typeface="Arial"/>
-                <a:ea typeface="Arial"/>
-                <a:cs typeface="Arial"/>
-              </a:defRPr>
-            </a:lvl4pPr>
-            <a:lvl5pPr algn="ctr">
-              <a:defRPr sz="1800" b="1">
-                <a:solidFill>
-                  <a:srgbClr val="C49A2C"/>
-                </a:solidFill>
-                <a:latin typeface="Arial"/>
-                <a:ea typeface="Arial"/>
-                <a:cs typeface="Arial"/>
-              </a:defRPr>
-            </a:lvl5pPr>
-            <a:lvl6pPr algn="ctr">
-              <a:defRPr sz="1800" b="1">
-                <a:solidFill>
-                  <a:srgbClr val="C49A2C"/>
-                </a:solidFill>
-                <a:latin typeface="Arial"/>
-                <a:ea typeface="Arial"/>
-                <a:cs typeface="Arial"/>
-              </a:defRPr>
-            </a:lvl6pPr>
-            <a:lvl7pPr algn="ctr">
-              <a:defRPr sz="1800" b="1">
-                <a:solidFill>
-                  <a:srgbClr val="C49A2C"/>
-                </a:solidFill>
-                <a:latin typeface="Arial"/>
-                <a:ea typeface="Arial"/>
-                <a:cs typeface="Arial"/>
-              </a:defRPr>
-            </a:lvl7pPr>
-            <a:lvl8pPr algn="ctr">
-              <a:defRPr sz="1800" b="1">
-                <a:solidFill>
-                  <a:srgbClr val="C49A2C"/>
-                </a:solidFill>
-                <a:latin typeface="Arial"/>
-                <a:ea typeface="Arial"/>
-                <a:cs typeface="Arial"/>
-              </a:defRPr>
-            </a:lvl8pPr>
-            <a:lvl9pPr algn="ctr">
-              <a:defRPr sz="1800" b="1">
-                <a:solidFill>
-                  <a:srgbClr val="C49A2C"/>
-                </a:solidFill>
-                <a:latin typeface="Arial"/>
-                <a:ea typeface="Arial"/>
-                <a:cs typeface="Arial"/>
-              </a:defRPr>
-            </a:lvl9pPr>
-          </a:lstStyle>
-          <a:p>
-            <a:pPr algn="ctr">
-              <a:defRPr sz="1800" b="1">
-                <a:solidFill>
-                  <a:srgbClr val="C49A2C"/>
-                </a:solidFill>
-                <a:latin typeface="Arial"/>
-                <a:ea typeface="Arial"/>
-                <a:cs typeface="Arial"/>
-              </a:defRPr>
-            </a:pPr>
-            <a:r>
-              <a:rPr sz="1800" b="1">
-                <a:solidFill>
-                  <a:srgbClr val="C49A2C"/>
-                </a:solidFill>
-                <a:latin typeface="Arial"/>
-                <a:ea typeface="Arial"/>
-                <a:cs typeface="Arial"/>
-              </a:rPr>
-              <a:t>+</a:t>
-            </a:r>
-          </a:p>
-        </p:txBody>
-      </p:sp>
-      <p:sp>
-        <p:nvSpPr>
-          <p:cNvPr id="24" name="矩形 23">
-            <a:extLst>
-              <a:ext uri="{FF2B5EF4-FFF2-40B4-BE49-F238E27FC236}">
-                <a16:creationId xmlns:a16="http://schemas.microsoft.com/office/drawing/2014/main" id="{7BA68E87-4247-434E-9A46-A48869B4282A}"/>
-              </a:ext>
-            </a:extLst>
-          </p:cNvPr>
-          <p:cNvSpPr>
-            <a:spLocks noGrp="1"/>
-          </p:cNvSpPr>
-          <p:nvPr/>
-        </p:nvSpPr>
-        <p:spPr>
-          <a:xfrm>
-            <a:off x="7162800" y="5619750"/>
-            <a:ext cx="3390900" cy="285750"/>
-          </a:xfrm>
-          <a:prstGeom prst="rect">
-            <a:avLst/>
-          </a:prstGeom>
-          <a:noFill/>
-          <a:ln w="0">
-            <a:noFill/>
-            <a:prstDash val="solid"/>
-          </a:ln>
-        </p:spPr>
-        <p:txBody>
-          <a:bodyPr wrap="square" lIns="0" tIns="0" rIns="0" bIns="0">
-            <a:noAutofit/>
-          </a:bodyPr>
-          <a:lstStyle>
-            <a:defPPr algn="ctr">
-              <a:defRPr sz="1425" b="1">
-                <a:solidFill>
-                  <a:srgbClr val="9E1B32"/>
-                </a:solidFill>
-                <a:latin typeface="Arial"/>
-                <a:ea typeface="Arial"/>
-                <a:cs typeface="Arial"/>
-              </a:defRPr>
-            </a:defPPr>
-            <a:lvl1pPr algn="ctr">
-              <a:defRPr sz="1425" b="1">
-                <a:solidFill>
-                  <a:srgbClr val="9E1B32"/>
-                </a:solidFill>
-                <a:latin typeface="Arial"/>
-                <a:ea typeface="Arial"/>
-                <a:cs typeface="Arial"/>
-              </a:defRPr>
-            </a:lvl1pPr>
-            <a:lvl2pPr algn="ctr">
-              <a:defRPr sz="1425" b="1">
-                <a:solidFill>
-                  <a:srgbClr val="9E1B32"/>
-                </a:solidFill>
-                <a:latin typeface="Arial"/>
-                <a:ea typeface="Arial"/>
-                <a:cs typeface="Arial"/>
-              </a:defRPr>
-            </a:lvl2pPr>
-            <a:lvl3pPr algn="ctr">
-              <a:defRPr sz="1425" b="1">
-                <a:solidFill>
-                  <a:srgbClr val="9E1B32"/>
-                </a:solidFill>
-                <a:latin typeface="Arial"/>
-                <a:ea typeface="Arial"/>
-                <a:cs typeface="Arial"/>
-              </a:defRPr>
-            </a:lvl3pPr>
-            <a:lvl4pPr algn="ctr">
-              <a:defRPr sz="1425" b="1">
-                <a:solidFill>
-                  <a:srgbClr val="9E1B32"/>
-                </a:solidFill>
-                <a:latin typeface="Arial"/>
-                <a:ea typeface="Arial"/>
-                <a:cs typeface="Arial"/>
-              </a:defRPr>
-            </a:lvl4pPr>
-            <a:lvl5pPr algn="ctr">
-              <a:defRPr sz="1425" b="1">
-                <a:solidFill>
-                  <a:srgbClr val="9E1B32"/>
-                </a:solidFill>
-                <a:latin typeface="Arial"/>
-                <a:ea typeface="Arial"/>
-                <a:cs typeface="Arial"/>
-              </a:defRPr>
-            </a:lvl5pPr>
-            <a:lvl6pPr algn="ctr">
-              <a:defRPr sz="1425" b="1">
-                <a:solidFill>
-                  <a:srgbClr val="9E1B32"/>
-                </a:solidFill>
-                <a:latin typeface="Arial"/>
-                <a:ea typeface="Arial"/>
-                <a:cs typeface="Arial"/>
-              </a:defRPr>
-            </a:lvl6pPr>
-            <a:lvl7pPr algn="ctr">
-              <a:defRPr sz="1425" b="1">
-                <a:solidFill>
-                  <a:srgbClr val="9E1B32"/>
-                </a:solidFill>
-                <a:latin typeface="Arial"/>
-                <a:ea typeface="Arial"/>
-                <a:cs typeface="Arial"/>
-              </a:defRPr>
-            </a:lvl7pPr>
-            <a:lvl8pPr algn="ctr">
-              <a:defRPr sz="1425" b="1">
-                <a:solidFill>
-                  <a:srgbClr val="9E1B32"/>
-                </a:solidFill>
-                <a:latin typeface="Arial"/>
-                <a:ea typeface="Arial"/>
-                <a:cs typeface="Arial"/>
-              </a:defRPr>
-            </a:lvl8pPr>
-            <a:lvl9pPr algn="ctr">
-              <a:defRPr sz="1425" b="1">
-                <a:solidFill>
-                  <a:srgbClr val="9E1B32"/>
-                </a:solidFill>
-                <a:latin typeface="Arial"/>
-                <a:ea typeface="Arial"/>
-                <a:cs typeface="Arial"/>
-              </a:defRPr>
-            </a:lvl9pPr>
-          </a:lstStyle>
-          <a:p>
-            <a:pPr algn="ctr">
-              <a:defRPr sz="1425" b="1">
-                <a:solidFill>
-                  <a:srgbClr val="9E1B32"/>
-                </a:solidFill>
-                <a:latin typeface="Arial"/>
-                <a:ea typeface="Arial"/>
-                <a:cs typeface="Arial"/>
-              </a:defRPr>
-            </a:pPr>
-            <a:r>
-              <a:rPr sz="1425" b="1">
-                <a:solidFill>
-                  <a:srgbClr val="9E1B32"/>
-                </a:solidFill>
-                <a:latin typeface="Arial"/>
-                <a:ea typeface="Arial"/>
-                <a:cs typeface="Arial"/>
-              </a:rPr>
-              <a:t>HIDDEN FINAL TASKS</a:t>
-            </a:r>
-          </a:p>
-        </p:txBody>
-      </p:sp>
-      <p:sp>
-        <p:nvSpPr>
-          <p:cNvPr id="25" name="slide-4-footer-label">
-            <a:extLst>
-              <a:ext uri="{FF2B5EF4-FFF2-40B4-BE49-F238E27FC236}">
-                <a16:creationId xmlns:a16="http://schemas.microsoft.com/office/drawing/2014/main" id="{4C13F1E4-67A4-4B01-8698-631EE193F524}"/>
-              </a:ext>
-            </a:extLst>
-          </p:cNvPr>
-          <p:cNvSpPr>
-            <a:spLocks noGrp="1"/>
-          </p:cNvSpPr>
-          <p:nvPr/>
-        </p:nvSpPr>
-        <p:spPr>
-          <a:xfrm>
-            <a:off x="685800" y="6486525"/>
-            <a:ext cx="3048000" cy="171450"/>
-          </a:xfrm>
-          <a:prstGeom prst="rect">
-            <a:avLst/>
-          </a:prstGeom>
-          <a:noFill/>
-          <a:ln w="0">
-            <a:noFill/>
-            <a:prstDash val="solid"/>
-          </a:ln>
-        </p:spPr>
-        <p:txBody>
-          <a:bodyPr wrap="square" lIns="0" tIns="0" rIns="0" bIns="0">
-            <a:noAutofit/>
-          </a:bodyPr>
-          <a:lstStyle>
-            <a:defPPr>
-              <a:defRPr sz="975">
-                <a:solidFill>
-                  <a:srgbClr val="A5A9AE"/>
-                </a:solidFill>
-                <a:latin typeface="Arial"/>
-                <a:ea typeface="Arial"/>
-                <a:cs typeface="Arial"/>
-              </a:defRPr>
-            </a:defPPr>
-            <a:lvl1pPr>
-              <a:defRPr sz="975">
-                <a:solidFill>
-                  <a:srgbClr val="A5A9AE"/>
-                </a:solidFill>
-                <a:latin typeface="Arial"/>
-                <a:ea typeface="Arial"/>
-                <a:cs typeface="Arial"/>
-              </a:defRPr>
-            </a:lvl1pPr>
-            <a:lvl2pPr>
-              <a:defRPr sz="975">
-                <a:solidFill>
-                  <a:srgbClr val="A5A9AE"/>
-                </a:solidFill>
-                <a:latin typeface="Arial"/>
-                <a:ea typeface="Arial"/>
-                <a:cs typeface="Arial"/>
-              </a:defRPr>
-            </a:lvl2pPr>
-            <a:lvl3pPr>
-              <a:defRPr sz="975">
-                <a:solidFill>
-                  <a:srgbClr val="A5A9AE"/>
-                </a:solidFill>
-                <a:latin typeface="Arial"/>
-                <a:ea typeface="Arial"/>
-                <a:cs typeface="Arial"/>
-              </a:defRPr>
-            </a:lvl3pPr>
-            <a:lvl4pPr>
-              <a:defRPr sz="975">
-                <a:solidFill>
-                  <a:srgbClr val="A5A9AE"/>
-                </a:solidFill>
-                <a:latin typeface="Arial"/>
-                <a:ea typeface="Arial"/>
-                <a:cs typeface="Arial"/>
-              </a:defRPr>
-            </a:lvl4pPr>
-            <a:lvl5pPr>
-              <a:defRPr sz="975">
-                <a:solidFill>
-                  <a:srgbClr val="A5A9AE"/>
-                </a:solidFill>
-                <a:latin typeface="Arial"/>
-                <a:ea typeface="Arial"/>
-                <a:cs typeface="Arial"/>
-              </a:defRPr>
-            </a:lvl5pPr>
-            <a:lvl6pPr>
-              <a:defRPr sz="975">
-                <a:solidFill>
-                  <a:srgbClr val="A5A9AE"/>
-                </a:solidFill>
-                <a:latin typeface="Arial"/>
-                <a:ea typeface="Arial"/>
-                <a:cs typeface="Arial"/>
-              </a:defRPr>
-            </a:lvl6pPr>
-            <a:lvl7pPr>
-              <a:defRPr sz="975">
-                <a:solidFill>
-                  <a:srgbClr val="A5A9AE"/>
-                </a:solidFill>
-                <a:latin typeface="Arial"/>
-                <a:ea typeface="Arial"/>
-                <a:cs typeface="Arial"/>
-              </a:defRPr>
-            </a:lvl7pPr>
-            <a:lvl8pPr>
-              <a:defRPr sz="975">
-                <a:solidFill>
-                  <a:srgbClr val="A5A9AE"/>
-                </a:solidFill>
-                <a:latin typeface="Arial"/>
-                <a:ea typeface="Arial"/>
-                <a:cs typeface="Arial"/>
-              </a:defRPr>
-            </a:lvl8pPr>
-            <a:lvl9pPr>
-              <a:defRPr sz="975">
-                <a:solidFill>
-                  <a:srgbClr val="A5A9AE"/>
-                </a:solidFill>
-                <a:latin typeface="Arial"/>
-                <a:ea typeface="Arial"/>
-                <a:cs typeface="Arial"/>
-              </a:defRPr>
-            </a:lvl9pPr>
-          </a:lstStyle>
-          <a:p>
-            <a:pPr>
-              <a:defRPr sz="975">
-                <a:solidFill>
-                  <a:srgbClr val="A5A9AE"/>
-                </a:solidFill>
-                <a:latin typeface="Arial"/>
-                <a:ea typeface="Arial"/>
-                <a:cs typeface="Arial"/>
-              </a:defRPr>
-            </a:pPr>
-            <a:r>
-              <a:rPr sz="975">
-                <a:solidFill>
-                  <a:srgbClr val="A5A9AE"/>
-                </a:solidFill>
-                <a:latin typeface="Arial"/>
-                <a:ea typeface="Arial"/>
-                <a:cs typeface="Arial"/>
-              </a:rPr>
-              <a:t>ChineseBabyLM  |  NLPCC 2026</a:t>
-            </a:r>
-          </a:p>
-        </p:txBody>
-      </p:sp>
-      <p:sp>
-        <p:nvSpPr>
-          <p:cNvPr id="26" name="slide-4-footer-number">
-            <a:extLst>
-              <a:ext uri="{FF2B5EF4-FFF2-40B4-BE49-F238E27FC236}">
-                <a16:creationId xmlns:a16="http://schemas.microsoft.com/office/drawing/2014/main" id="{F99695F2-4C5C-4675-B114-4511F4DF668C}"/>
-              </a:ext>
-            </a:extLst>
-          </p:cNvPr>
-          <p:cNvSpPr>
-            <a:spLocks noGrp="1"/>
-          </p:cNvSpPr>
-          <p:nvPr/>
-        </p:nvSpPr>
-        <p:spPr>
-          <a:xfrm>
-            <a:off x="11001375" y="6467475"/>
-            <a:ext cx="504825" cy="190500"/>
-          </a:xfrm>
-          <a:prstGeom prst="rect">
-            <a:avLst/>
-          </a:prstGeom>
-          <a:noFill/>
-          <a:ln w="0">
-            <a:noFill/>
-            <a:prstDash val="solid"/>
-          </a:ln>
-        </p:spPr>
-        <p:txBody>
-          <a:bodyPr wrap="square" lIns="0" tIns="0" rIns="0" bIns="0">
-            <a:noAutofit/>
-          </a:bodyPr>
-          <a:lstStyle>
-            <a:defPPr algn="r">
-              <a:defRPr sz="1050" b="1">
-                <a:solidFill>
-                  <a:srgbClr val="9E1B32"/>
-                </a:solidFill>
-                <a:latin typeface="Arial"/>
-                <a:ea typeface="Arial"/>
-                <a:cs typeface="Arial"/>
-              </a:defRPr>
-            </a:defPPr>
-            <a:lvl1pPr algn="r">
-              <a:defRPr sz="1050" b="1">
-                <a:solidFill>
-                  <a:srgbClr val="9E1B32"/>
-                </a:solidFill>
-                <a:latin typeface="Arial"/>
-                <a:ea typeface="Arial"/>
-                <a:cs typeface="Arial"/>
-              </a:defRPr>
-            </a:lvl1pPr>
-            <a:lvl2pPr algn="r">
-              <a:defRPr sz="1050" b="1">
-                <a:solidFill>
-                  <a:srgbClr val="9E1B32"/>
-                </a:solidFill>
-                <a:latin typeface="Arial"/>
-                <a:ea typeface="Arial"/>
-                <a:cs typeface="Arial"/>
-              </a:defRPr>
-            </a:lvl2pPr>
-            <a:lvl3pPr algn="r">
-              <a:defRPr sz="1050" b="1">
-                <a:solidFill>
-                  <a:srgbClr val="9E1B32"/>
-                </a:solidFill>
-                <a:latin typeface="Arial"/>
-                <a:ea typeface="Arial"/>
-                <a:cs typeface="Arial"/>
-              </a:defRPr>
-            </a:lvl3pPr>
-            <a:lvl4pPr algn="r">
-              <a:defRPr sz="1050" b="1">
-                <a:solidFill>
-                  <a:srgbClr val="9E1B32"/>
-                </a:solidFill>
-                <a:latin typeface="Arial"/>
-                <a:ea typeface="Arial"/>
-                <a:cs typeface="Arial"/>
-              </a:defRPr>
-            </a:lvl4pPr>
-            <a:lvl5pPr algn="r">
-              <a:defRPr sz="1050" b="1">
-                <a:solidFill>
-                  <a:srgbClr val="9E1B32"/>
-                </a:solidFill>
-                <a:latin typeface="Arial"/>
-                <a:ea typeface="Arial"/>
-                <a:cs typeface="Arial"/>
-              </a:defRPr>
-            </a:lvl5pPr>
-            <a:lvl6pPr algn="r">
-              <a:defRPr sz="1050" b="1">
-                <a:solidFill>
-                  <a:srgbClr val="9E1B32"/>
-                </a:solidFill>
-                <a:latin typeface="Arial"/>
-                <a:ea typeface="Arial"/>
-                <a:cs typeface="Arial"/>
-              </a:defRPr>
-            </a:lvl6pPr>
-            <a:lvl7pPr algn="r">
-              <a:defRPr sz="1050" b="1">
-                <a:solidFill>
-                  <a:srgbClr val="9E1B32"/>
-                </a:solidFill>
-                <a:latin typeface="Arial"/>
-                <a:ea typeface="Arial"/>
-                <a:cs typeface="Arial"/>
-              </a:defRPr>
-            </a:lvl7pPr>
-            <a:lvl8pPr algn="r">
-              <a:defRPr sz="1050" b="1">
-                <a:solidFill>
-                  <a:srgbClr val="9E1B32"/>
-                </a:solidFill>
-                <a:latin typeface="Arial"/>
-                <a:ea typeface="Arial"/>
-                <a:cs typeface="Arial"/>
-              </a:defRPr>
-            </a:lvl8pPr>
-            <a:lvl9pPr algn="r">
-              <a:defRPr sz="1050" b="1">
-                <a:solidFill>
-                  <a:srgbClr val="9E1B32"/>
-                </a:solidFill>
-                <a:latin typeface="Arial"/>
-                <a:ea typeface="Arial"/>
-                <a:cs typeface="Arial"/>
-              </a:defRPr>
-            </a:lvl9pPr>
-          </a:lstStyle>
-          <a:p>
-            <a:pPr algn="r">
-              <a:defRPr sz="1050" b="1">
-                <a:solidFill>
-                  <a:srgbClr val="9E1B32"/>
-                </a:solidFill>
-                <a:latin typeface="Arial"/>
-                <a:ea typeface="Arial"/>
-                <a:cs typeface="Arial"/>
-              </a:defRPr>
-            </a:pPr>
-            <a:r>
-              <a:rPr sz="1050" b="1">
-                <a:solidFill>
-                  <a:srgbClr val="9E1B32"/>
-                </a:solidFill>
-                <a:latin typeface="Arial"/>
-                <a:ea typeface="Arial"/>
-                <a:cs typeface="Arial"/>
-              </a:rPr>
-              <a:t>04</a:t>
-            </a:r>
-          </a:p>
-        </p:txBody>
-      </p:sp>
-    </p:spTree>
-    <p:extLst>
-      <p:ext uri="{BB962C8B-B14F-4D97-AF65-F5344CB8AC3E}">
-        <p14:creationId xmlns:p14="http://schemas.microsoft.com/office/powerpoint/2010/main" val="990775507"/>
       </p:ext>
     </p:extLst>
   </p:cSld>
@@ -22948,7 +22885,7 @@
         </p:spPr>
         <p:txBody>
           <a:bodyPr wrap="square" lIns="0" tIns="0" rIns="0" bIns="0">
-            <a:normAutofit fontScale="91912"/>
+            <a:normAutofit fontScale="99412" lnSpcReduction="10000"/>
           </a:bodyPr>
           <a:lstStyle>
             <a:defPPr>
